--- a/python/CourseDesign/Week04e/Lecture8_IIR_Bilinear_Transform_ML_Preprocessing_Microsoft_PowerPoint.pptx
+++ b/python/CourseDesign/Week04e/Lecture8_IIR_Bilinear_Transform_ML_Preprocessing_Microsoft_PowerPoint.pptx
@@ -5,46 +5,46 @@
     <p:sldMasterId id="2147483648" r:id="rId1"/>
   </p:sldMasterIdLst>
   <p:sldIdLst>
-    <p:sldId id="256" r:id="rId7"/>
-    <p:sldId id="257" r:id="rId8"/>
-    <p:sldId id="258" r:id="rId9"/>
-    <p:sldId id="259" r:id="rId10"/>
-    <p:sldId id="260" r:id="rId11"/>
-    <p:sldId id="261" r:id="rId12"/>
-    <p:sldId id="262" r:id="rId13"/>
-    <p:sldId id="263" r:id="rId14"/>
-    <p:sldId id="264" r:id="rId15"/>
-    <p:sldId id="265" r:id="rId16"/>
-    <p:sldId id="266" r:id="rId17"/>
-    <p:sldId id="267" r:id="rId18"/>
-    <p:sldId id="268" r:id="rId19"/>
-    <p:sldId id="269" r:id="rId20"/>
-    <p:sldId id="270" r:id="rId21"/>
-    <p:sldId id="271" r:id="rId22"/>
-    <p:sldId id="272" r:id="rId23"/>
-    <p:sldId id="273" r:id="rId24"/>
-    <p:sldId id="274" r:id="rId25"/>
-    <p:sldId id="275" r:id="rId26"/>
-    <p:sldId id="276" r:id="rId27"/>
-    <p:sldId id="277" r:id="rId28"/>
-    <p:sldId id="278" r:id="rId29"/>
-    <p:sldId id="279" r:id="rId30"/>
-    <p:sldId id="280" r:id="rId31"/>
-    <p:sldId id="281" r:id="rId32"/>
-    <p:sldId id="282" r:id="rId33"/>
-    <p:sldId id="283" r:id="rId34"/>
-    <p:sldId id="284" r:id="rId35"/>
-    <p:sldId id="285" r:id="rId36"/>
-    <p:sldId id="286" r:id="rId37"/>
-    <p:sldId id="287" r:id="rId38"/>
-    <p:sldId id="288" r:id="rId39"/>
-    <p:sldId id="289" r:id="rId40"/>
-    <p:sldId id="290" r:id="rId41"/>
-    <p:sldId id="291" r:id="rId42"/>
-    <p:sldId id="292" r:id="rId43"/>
+    <p:sldId id="256" r:id="rId2"/>
+    <p:sldId id="257" r:id="rId3"/>
+    <p:sldId id="258" r:id="rId4"/>
+    <p:sldId id="259" r:id="rId5"/>
+    <p:sldId id="260" r:id="rId6"/>
+    <p:sldId id="261" r:id="rId7"/>
+    <p:sldId id="262" r:id="rId8"/>
+    <p:sldId id="263" r:id="rId9"/>
+    <p:sldId id="264" r:id="rId10"/>
+    <p:sldId id="265" r:id="rId11"/>
+    <p:sldId id="266" r:id="rId12"/>
+    <p:sldId id="267" r:id="rId13"/>
+    <p:sldId id="268" r:id="rId14"/>
+    <p:sldId id="269" r:id="rId15"/>
+    <p:sldId id="270" r:id="rId16"/>
+    <p:sldId id="271" r:id="rId17"/>
+    <p:sldId id="272" r:id="rId18"/>
+    <p:sldId id="273" r:id="rId19"/>
+    <p:sldId id="274" r:id="rId20"/>
+    <p:sldId id="275" r:id="rId21"/>
+    <p:sldId id="276" r:id="rId22"/>
+    <p:sldId id="277" r:id="rId23"/>
+    <p:sldId id="278" r:id="rId24"/>
+    <p:sldId id="279" r:id="rId25"/>
+    <p:sldId id="280" r:id="rId26"/>
+    <p:sldId id="281" r:id="rId27"/>
+    <p:sldId id="282" r:id="rId28"/>
+    <p:sldId id="283" r:id="rId29"/>
+    <p:sldId id="284" r:id="rId30"/>
+    <p:sldId id="285" r:id="rId31"/>
+    <p:sldId id="286" r:id="rId32"/>
+    <p:sldId id="287" r:id="rId33"/>
+    <p:sldId id="288" r:id="rId34"/>
+    <p:sldId id="289" r:id="rId35"/>
+    <p:sldId id="290" r:id="rId36"/>
+    <p:sldId id="291" r:id="rId37"/>
+    <p:sldId id="292" r:id="rId38"/>
   </p:sldIdLst>
-  <p:sldSz cx="12191695" cy="6858000" type="screen4x3"/>
-  <p:notesSz cx="6858000" cy="9144000"/>
+  <p:sldSz cx="12192000" cy="6858000"/>
+  <p:notesSz cx="7315200" cy="9601200"/>
   <p:defaultTextStyle>
     <a:defPPr>
       <a:defRPr lang="en-US"/>
@@ -140,6 +140,22 @@
       </a:defRPr>
     </a:lvl9pPr>
   </p:defaultTextStyle>
+  <p:extLst>
+    <p:ext uri="{EFAFB233-063F-42B5-8137-9DF3F51BA10A}">
+      <p15:sldGuideLst xmlns:p15="http://schemas.microsoft.com/office/powerpoint/2012/main">
+        <p15:guide id="1" orient="horz" pos="2160">
+          <p15:clr>
+            <a:srgbClr val="A4A3A4"/>
+          </p15:clr>
+        </p15:guide>
+        <p15:guide id="2" pos="2880">
+          <p15:clr>
+            <a:srgbClr val="A4A3A4"/>
+          </p15:clr>
+        </p15:guide>
+      </p15:sldGuideLst>
+    </p:ext>
+  </p:extLst>
 </p:presentation>
 </file>
 
@@ -181,10 +197,9 @@
           <a:lstStyle/>
           <a:p>
             <a:r>
-              <a:rPr lang="en-US" smtClean="0"/>
+              <a:rPr lang="en-US"/>
               <a:t>Click to edit Master title style</a:t>
             </a:r>
-            <a:endParaRPr lang="en-US"/>
           </a:p>
         </p:txBody>
       </p:sp>
@@ -300,10 +315,9 @@
           </a:lstStyle>
           <a:p>
             <a:r>
-              <a:rPr lang="en-US" smtClean="0"/>
+              <a:rPr lang="en-US"/>
               <a:t>Click to edit Master subtitle style</a:t>
             </a:r>
-            <a:endParaRPr lang="en-US"/>
           </a:p>
         </p:txBody>
       </p:sp>
@@ -324,7 +338,7 @@
           <a:p>
             <a:fld id="{5BCAD085-E8A6-8845-BD4E-CB4CCA059FC4}" type="datetimeFigureOut">
               <a:rPr lang="en-US" smtClean="0"/>
-              <a:t>1/27/13</a:t>
+              <a:t>9/1/2026</a:t>
             </a:fld>
             <a:endParaRPr lang="en-US"/>
           </a:p>
@@ -418,10 +432,9 @@
           <a:lstStyle/>
           <a:p>
             <a:r>
-              <a:rPr lang="en-US" smtClean="0"/>
+              <a:rPr lang="en-US"/>
               <a:t>Click to edit Master title style</a:t>
             </a:r>
-            <a:endParaRPr lang="en-US"/>
           </a:p>
         </p:txBody>
       </p:sp>
@@ -442,38 +455,37 @@
           <a:p>
             <a:pPr lvl="0"/>
             <a:r>
-              <a:rPr lang="en-US" smtClean="0"/>
+              <a:rPr lang="en-US"/>
               <a:t>Click to edit Master text styles</a:t>
             </a:r>
           </a:p>
           <a:p>
             <a:pPr lvl="1"/>
             <a:r>
-              <a:rPr lang="en-US" smtClean="0"/>
+              <a:rPr lang="en-US"/>
               <a:t>Second level</a:t>
             </a:r>
           </a:p>
           <a:p>
             <a:pPr lvl="2"/>
             <a:r>
-              <a:rPr lang="en-US" smtClean="0"/>
+              <a:rPr lang="en-US"/>
               <a:t>Third level</a:t>
             </a:r>
           </a:p>
           <a:p>
             <a:pPr lvl="3"/>
             <a:r>
-              <a:rPr lang="en-US" smtClean="0"/>
+              <a:rPr lang="en-US"/>
               <a:t>Fourth level</a:t>
             </a:r>
           </a:p>
           <a:p>
             <a:pPr lvl="4"/>
             <a:r>
-              <a:rPr lang="en-US" smtClean="0"/>
+              <a:rPr lang="en-US"/>
               <a:t>Fifth level</a:t>
             </a:r>
-            <a:endParaRPr lang="en-US"/>
           </a:p>
         </p:txBody>
       </p:sp>
@@ -494,7 +506,7 @@
           <a:p>
             <a:fld id="{5BCAD085-E8A6-8845-BD4E-CB4CCA059FC4}" type="datetimeFigureOut">
               <a:rPr lang="en-US" smtClean="0"/>
-              <a:t>1/27/13</a:t>
+              <a:t>9/1/2026</a:t>
             </a:fld>
             <a:endParaRPr lang="en-US"/>
           </a:p>
@@ -593,10 +605,9 @@
           <a:lstStyle/>
           <a:p>
             <a:r>
-              <a:rPr lang="en-US" smtClean="0"/>
+              <a:rPr lang="en-US"/>
               <a:t>Click to edit Master title style</a:t>
             </a:r>
-            <a:endParaRPr lang="en-US"/>
           </a:p>
         </p:txBody>
       </p:sp>
@@ -622,38 +633,37 @@
           <a:p>
             <a:pPr lvl="0"/>
             <a:r>
-              <a:rPr lang="en-US" smtClean="0"/>
+              <a:rPr lang="en-US"/>
               <a:t>Click to edit Master text styles</a:t>
             </a:r>
           </a:p>
           <a:p>
             <a:pPr lvl="1"/>
             <a:r>
-              <a:rPr lang="en-US" smtClean="0"/>
+              <a:rPr lang="en-US"/>
               <a:t>Second level</a:t>
             </a:r>
           </a:p>
           <a:p>
             <a:pPr lvl="2"/>
             <a:r>
-              <a:rPr lang="en-US" smtClean="0"/>
+              <a:rPr lang="en-US"/>
               <a:t>Third level</a:t>
             </a:r>
           </a:p>
           <a:p>
             <a:pPr lvl="3"/>
             <a:r>
-              <a:rPr lang="en-US" smtClean="0"/>
+              <a:rPr lang="en-US"/>
               <a:t>Fourth level</a:t>
             </a:r>
           </a:p>
           <a:p>
             <a:pPr lvl="4"/>
             <a:r>
-              <a:rPr lang="en-US" smtClean="0"/>
+              <a:rPr lang="en-US"/>
               <a:t>Fifth level</a:t>
             </a:r>
-            <a:endParaRPr lang="en-US"/>
           </a:p>
         </p:txBody>
       </p:sp>
@@ -674,7 +684,7 @@
           <a:p>
             <a:fld id="{5BCAD085-E8A6-8845-BD4E-CB4CCA059FC4}" type="datetimeFigureOut">
               <a:rPr lang="en-US" smtClean="0"/>
-              <a:t>1/27/13</a:t>
+              <a:t>9/1/2026</a:t>
             </a:fld>
             <a:endParaRPr lang="en-US"/>
           </a:p>
@@ -768,10 +778,9 @@
           <a:lstStyle/>
           <a:p>
             <a:r>
-              <a:rPr lang="en-US" smtClean="0"/>
+              <a:rPr lang="en-US"/>
               <a:t>Click to edit Master title style</a:t>
             </a:r>
-            <a:endParaRPr lang="en-US"/>
           </a:p>
         </p:txBody>
       </p:sp>
@@ -792,38 +801,37 @@
           <a:p>
             <a:pPr lvl="0"/>
             <a:r>
-              <a:rPr lang="en-US" smtClean="0"/>
+              <a:rPr lang="en-US"/>
               <a:t>Click to edit Master text styles</a:t>
             </a:r>
           </a:p>
           <a:p>
             <a:pPr lvl="1"/>
             <a:r>
-              <a:rPr lang="en-US" smtClean="0"/>
+              <a:rPr lang="en-US"/>
               <a:t>Second level</a:t>
             </a:r>
           </a:p>
           <a:p>
             <a:pPr lvl="2"/>
             <a:r>
-              <a:rPr lang="en-US" smtClean="0"/>
+              <a:rPr lang="en-US"/>
               <a:t>Third level</a:t>
             </a:r>
           </a:p>
           <a:p>
             <a:pPr lvl="3"/>
             <a:r>
-              <a:rPr lang="en-US" smtClean="0"/>
+              <a:rPr lang="en-US"/>
               <a:t>Fourth level</a:t>
             </a:r>
           </a:p>
           <a:p>
             <a:pPr lvl="4"/>
             <a:r>
-              <a:rPr lang="en-US" smtClean="0"/>
+              <a:rPr lang="en-US"/>
               <a:t>Fifth level</a:t>
             </a:r>
-            <a:endParaRPr lang="en-US"/>
           </a:p>
         </p:txBody>
       </p:sp>
@@ -844,7 +852,7 @@
           <a:p>
             <a:fld id="{5BCAD085-E8A6-8845-BD4E-CB4CCA059FC4}" type="datetimeFigureOut">
               <a:rPr lang="en-US" smtClean="0"/>
-              <a:t>1/27/13</a:t>
+              <a:t>9/1/2026</a:t>
             </a:fld>
             <a:endParaRPr lang="en-US"/>
           </a:p>
@@ -947,10 +955,9 @@
           </a:lstStyle>
           <a:p>
             <a:r>
-              <a:rPr lang="en-US" smtClean="0"/>
+              <a:rPr lang="en-US"/>
               <a:t>Click to edit Master title style</a:t>
             </a:r>
-            <a:endParaRPr lang="en-US"/>
           </a:p>
         </p:txBody>
       </p:sp>
@@ -1067,7 +1074,7 @@
           <a:p>
             <a:pPr lvl="0"/>
             <a:r>
-              <a:rPr lang="en-US" smtClean="0"/>
+              <a:rPr lang="en-US"/>
               <a:t>Click to edit Master text styles</a:t>
             </a:r>
           </a:p>
@@ -1090,7 +1097,7 @@
           <a:p>
             <a:fld id="{5BCAD085-E8A6-8845-BD4E-CB4CCA059FC4}" type="datetimeFigureOut">
               <a:rPr lang="en-US" smtClean="0"/>
-              <a:t>1/27/13</a:t>
+              <a:t>9/1/2026</a:t>
             </a:fld>
             <a:endParaRPr lang="en-US"/>
           </a:p>
@@ -1184,10 +1191,9 @@
           <a:lstStyle/>
           <a:p>
             <a:r>
-              <a:rPr lang="en-US" smtClean="0"/>
+              <a:rPr lang="en-US"/>
               <a:t>Click to edit Master title style</a:t>
             </a:r>
-            <a:endParaRPr lang="en-US"/>
           </a:p>
         </p:txBody>
       </p:sp>
@@ -1241,38 +1247,37 @@
           <a:p>
             <a:pPr lvl="0"/>
             <a:r>
-              <a:rPr lang="en-US" smtClean="0"/>
+              <a:rPr lang="en-US"/>
               <a:t>Click to edit Master text styles</a:t>
             </a:r>
           </a:p>
           <a:p>
             <a:pPr lvl="1"/>
             <a:r>
-              <a:rPr lang="en-US" smtClean="0"/>
+              <a:rPr lang="en-US"/>
               <a:t>Second level</a:t>
             </a:r>
           </a:p>
           <a:p>
             <a:pPr lvl="2"/>
             <a:r>
-              <a:rPr lang="en-US" smtClean="0"/>
+              <a:rPr lang="en-US"/>
               <a:t>Third level</a:t>
             </a:r>
           </a:p>
           <a:p>
             <a:pPr lvl="3"/>
             <a:r>
-              <a:rPr lang="en-US" smtClean="0"/>
+              <a:rPr lang="en-US"/>
               <a:t>Fourth level</a:t>
             </a:r>
           </a:p>
           <a:p>
             <a:pPr lvl="4"/>
             <a:r>
-              <a:rPr lang="en-US" smtClean="0"/>
+              <a:rPr lang="en-US"/>
               <a:t>Fifth level</a:t>
             </a:r>
-            <a:endParaRPr lang="en-US"/>
           </a:p>
         </p:txBody>
       </p:sp>
@@ -1326,38 +1331,37 @@
           <a:p>
             <a:pPr lvl="0"/>
             <a:r>
-              <a:rPr lang="en-US" smtClean="0"/>
+              <a:rPr lang="en-US"/>
               <a:t>Click to edit Master text styles</a:t>
             </a:r>
           </a:p>
           <a:p>
             <a:pPr lvl="1"/>
             <a:r>
-              <a:rPr lang="en-US" smtClean="0"/>
+              <a:rPr lang="en-US"/>
               <a:t>Second level</a:t>
             </a:r>
           </a:p>
           <a:p>
             <a:pPr lvl="2"/>
             <a:r>
-              <a:rPr lang="en-US" smtClean="0"/>
+              <a:rPr lang="en-US"/>
               <a:t>Third level</a:t>
             </a:r>
           </a:p>
           <a:p>
             <a:pPr lvl="3"/>
             <a:r>
-              <a:rPr lang="en-US" smtClean="0"/>
+              <a:rPr lang="en-US"/>
               <a:t>Fourth level</a:t>
             </a:r>
           </a:p>
           <a:p>
             <a:pPr lvl="4"/>
             <a:r>
-              <a:rPr lang="en-US" smtClean="0"/>
+              <a:rPr lang="en-US"/>
               <a:t>Fifth level</a:t>
             </a:r>
-            <a:endParaRPr lang="en-US"/>
           </a:p>
         </p:txBody>
       </p:sp>
@@ -1378,7 +1382,7 @@
           <a:p>
             <a:fld id="{5BCAD085-E8A6-8845-BD4E-CB4CCA059FC4}" type="datetimeFigureOut">
               <a:rPr lang="en-US" smtClean="0"/>
-              <a:t>1/27/13</a:t>
+              <a:t>9/1/2026</a:t>
             </a:fld>
             <a:endParaRPr lang="en-US"/>
           </a:p>
@@ -1476,10 +1480,9 @@
           </a:lstStyle>
           <a:p>
             <a:r>
-              <a:rPr lang="en-US" smtClean="0"/>
+              <a:rPr lang="en-US"/>
               <a:t>Click to edit Master title style</a:t>
             </a:r>
-            <a:endParaRPr lang="en-US"/>
           </a:p>
         </p:txBody>
       </p:sp>
@@ -1542,7 +1545,7 @@
           <a:p>
             <a:pPr lvl="0"/>
             <a:r>
-              <a:rPr lang="en-US" smtClean="0"/>
+              <a:rPr lang="en-US"/>
               <a:t>Click to edit Master text styles</a:t>
             </a:r>
           </a:p>
@@ -1598,38 +1601,37 @@
           <a:p>
             <a:pPr lvl="0"/>
             <a:r>
-              <a:rPr lang="en-US" smtClean="0"/>
+              <a:rPr lang="en-US"/>
               <a:t>Click to edit Master text styles</a:t>
             </a:r>
           </a:p>
           <a:p>
             <a:pPr lvl="1"/>
             <a:r>
-              <a:rPr lang="en-US" smtClean="0"/>
+              <a:rPr lang="en-US"/>
               <a:t>Second level</a:t>
             </a:r>
           </a:p>
           <a:p>
             <a:pPr lvl="2"/>
             <a:r>
-              <a:rPr lang="en-US" smtClean="0"/>
+              <a:rPr lang="en-US"/>
               <a:t>Third level</a:t>
             </a:r>
           </a:p>
           <a:p>
             <a:pPr lvl="3"/>
             <a:r>
-              <a:rPr lang="en-US" smtClean="0"/>
+              <a:rPr lang="en-US"/>
               <a:t>Fourth level</a:t>
             </a:r>
           </a:p>
           <a:p>
             <a:pPr lvl="4"/>
             <a:r>
-              <a:rPr lang="en-US" smtClean="0"/>
+              <a:rPr lang="en-US"/>
               <a:t>Fifth level</a:t>
             </a:r>
-            <a:endParaRPr lang="en-US"/>
           </a:p>
         </p:txBody>
       </p:sp>
@@ -1692,7 +1694,7 @@
           <a:p>
             <a:pPr lvl="0"/>
             <a:r>
-              <a:rPr lang="en-US" smtClean="0"/>
+              <a:rPr lang="en-US"/>
               <a:t>Click to edit Master text styles</a:t>
             </a:r>
           </a:p>
@@ -1748,38 +1750,37 @@
           <a:p>
             <a:pPr lvl="0"/>
             <a:r>
-              <a:rPr lang="en-US" smtClean="0"/>
+              <a:rPr lang="en-US"/>
               <a:t>Click to edit Master text styles</a:t>
             </a:r>
           </a:p>
           <a:p>
             <a:pPr lvl="1"/>
             <a:r>
-              <a:rPr lang="en-US" smtClean="0"/>
+              <a:rPr lang="en-US"/>
               <a:t>Second level</a:t>
             </a:r>
           </a:p>
           <a:p>
             <a:pPr lvl="2"/>
             <a:r>
-              <a:rPr lang="en-US" smtClean="0"/>
+              <a:rPr lang="en-US"/>
               <a:t>Third level</a:t>
             </a:r>
           </a:p>
           <a:p>
             <a:pPr lvl="3"/>
             <a:r>
-              <a:rPr lang="en-US" smtClean="0"/>
+              <a:rPr lang="en-US"/>
               <a:t>Fourth level</a:t>
             </a:r>
           </a:p>
           <a:p>
             <a:pPr lvl="4"/>
             <a:r>
-              <a:rPr lang="en-US" smtClean="0"/>
+              <a:rPr lang="en-US"/>
               <a:t>Fifth level</a:t>
             </a:r>
-            <a:endParaRPr lang="en-US"/>
           </a:p>
         </p:txBody>
       </p:sp>
@@ -1800,7 +1801,7 @@
           <a:p>
             <a:fld id="{5BCAD085-E8A6-8845-BD4E-CB4CCA059FC4}" type="datetimeFigureOut">
               <a:rPr lang="en-US" smtClean="0"/>
-              <a:t>1/27/13</a:t>
+              <a:t>9/1/2026</a:t>
             </a:fld>
             <a:endParaRPr lang="en-US"/>
           </a:p>
@@ -1894,10 +1895,9 @@
           <a:lstStyle/>
           <a:p>
             <a:r>
-              <a:rPr lang="en-US" smtClean="0"/>
+              <a:rPr lang="en-US"/>
               <a:t>Click to edit Master title style</a:t>
             </a:r>
-            <a:endParaRPr lang="en-US"/>
           </a:p>
         </p:txBody>
       </p:sp>
@@ -1918,7 +1918,7 @@
           <a:p>
             <a:fld id="{5BCAD085-E8A6-8845-BD4E-CB4CCA059FC4}" type="datetimeFigureOut">
               <a:rPr lang="en-US" smtClean="0"/>
-              <a:t>1/27/13</a:t>
+              <a:t>9/1/2026</a:t>
             </a:fld>
             <a:endParaRPr lang="en-US"/>
           </a:p>
@@ -2013,7 +2013,7 @@
           <a:p>
             <a:fld id="{5BCAD085-E8A6-8845-BD4E-CB4CCA059FC4}" type="datetimeFigureOut">
               <a:rPr lang="en-US" smtClean="0"/>
-              <a:t>1/27/13</a:t>
+              <a:t>9/1/2026</a:t>
             </a:fld>
             <a:endParaRPr lang="en-US"/>
           </a:p>
@@ -2116,10 +2116,9 @@
           </a:lstStyle>
           <a:p>
             <a:r>
-              <a:rPr lang="en-US" smtClean="0"/>
+              <a:rPr lang="en-US"/>
               <a:t>Click to edit Master title style</a:t>
             </a:r>
-            <a:endParaRPr lang="en-US"/>
           </a:p>
         </p:txBody>
       </p:sp>
@@ -2173,38 +2172,37 @@
           <a:p>
             <a:pPr lvl="0"/>
             <a:r>
-              <a:rPr lang="en-US" smtClean="0"/>
+              <a:rPr lang="en-US"/>
               <a:t>Click to edit Master text styles</a:t>
             </a:r>
           </a:p>
           <a:p>
             <a:pPr lvl="1"/>
             <a:r>
-              <a:rPr lang="en-US" smtClean="0"/>
+              <a:rPr lang="en-US"/>
               <a:t>Second level</a:t>
             </a:r>
           </a:p>
           <a:p>
             <a:pPr lvl="2"/>
             <a:r>
-              <a:rPr lang="en-US" smtClean="0"/>
+              <a:rPr lang="en-US"/>
               <a:t>Third level</a:t>
             </a:r>
           </a:p>
           <a:p>
             <a:pPr lvl="3"/>
             <a:r>
-              <a:rPr lang="en-US" smtClean="0"/>
+              <a:rPr lang="en-US"/>
               <a:t>Fourth level</a:t>
             </a:r>
           </a:p>
           <a:p>
             <a:pPr lvl="4"/>
             <a:r>
-              <a:rPr lang="en-US" smtClean="0"/>
+              <a:rPr lang="en-US"/>
               <a:t>Fifth level</a:t>
             </a:r>
-            <a:endParaRPr lang="en-US"/>
           </a:p>
         </p:txBody>
       </p:sp>
@@ -2267,7 +2265,7 @@
           <a:p>
             <a:pPr lvl="0"/>
             <a:r>
-              <a:rPr lang="en-US" smtClean="0"/>
+              <a:rPr lang="en-US"/>
               <a:t>Click to edit Master text styles</a:t>
             </a:r>
           </a:p>
@@ -2290,7 +2288,7 @@
           <a:p>
             <a:fld id="{5BCAD085-E8A6-8845-BD4E-CB4CCA059FC4}" type="datetimeFigureOut">
               <a:rPr lang="en-US" smtClean="0"/>
-              <a:t>1/27/13</a:t>
+              <a:t>9/1/2026</a:t>
             </a:fld>
             <a:endParaRPr lang="en-US"/>
           </a:p>
@@ -2393,10 +2391,9 @@
           </a:lstStyle>
           <a:p>
             <a:r>
-              <a:rPr lang="en-US" smtClean="0"/>
+              <a:rPr lang="en-US"/>
               <a:t>Click to edit Master title style</a:t>
             </a:r>
-            <a:endParaRPr lang="en-US"/>
           </a:p>
         </p:txBody>
       </p:sp>
@@ -2520,7 +2517,7 @@
           <a:p>
             <a:pPr lvl="0"/>
             <a:r>
-              <a:rPr lang="en-US" smtClean="0"/>
+              <a:rPr lang="en-US"/>
               <a:t>Click to edit Master text styles</a:t>
             </a:r>
           </a:p>
@@ -2543,7 +2540,7 @@
           <a:p>
             <a:fld id="{5BCAD085-E8A6-8845-BD4E-CB4CCA059FC4}" type="datetimeFigureOut">
               <a:rPr lang="en-US" smtClean="0"/>
-              <a:t>1/27/13</a:t>
+              <a:t>9/1/2026</a:t>
             </a:fld>
             <a:endParaRPr lang="en-US"/>
           </a:p>
@@ -2652,10 +2649,9 @@
           <a:lstStyle/>
           <a:p>
             <a:r>
-              <a:rPr lang="en-US" smtClean="0"/>
+              <a:rPr lang="en-US"/>
               <a:t>Click to edit Master title style</a:t>
             </a:r>
-            <a:endParaRPr lang="en-US"/>
           </a:p>
         </p:txBody>
       </p:sp>
@@ -2686,38 +2682,37 @@
           <a:p>
             <a:pPr lvl="0"/>
             <a:r>
-              <a:rPr lang="en-US" smtClean="0"/>
+              <a:rPr lang="en-US"/>
               <a:t>Click to edit Master text styles</a:t>
             </a:r>
           </a:p>
           <a:p>
             <a:pPr lvl="1"/>
             <a:r>
-              <a:rPr lang="en-US" smtClean="0"/>
+              <a:rPr lang="en-US"/>
               <a:t>Second level</a:t>
             </a:r>
           </a:p>
           <a:p>
             <a:pPr lvl="2"/>
             <a:r>
-              <a:rPr lang="en-US" smtClean="0"/>
+              <a:rPr lang="en-US"/>
               <a:t>Third level</a:t>
             </a:r>
           </a:p>
           <a:p>
             <a:pPr lvl="3"/>
             <a:r>
-              <a:rPr lang="en-US" smtClean="0"/>
+              <a:rPr lang="en-US"/>
               <a:t>Fourth level</a:t>
             </a:r>
           </a:p>
           <a:p>
             <a:pPr lvl="4"/>
             <a:r>
-              <a:rPr lang="en-US" smtClean="0"/>
+              <a:rPr lang="en-US"/>
               <a:t>Fifth level</a:t>
             </a:r>
-            <a:endParaRPr lang="en-US"/>
           </a:p>
         </p:txBody>
       </p:sp>
@@ -2756,7 +2751,7 @@
           <a:p>
             <a:fld id="{5BCAD085-E8A6-8845-BD4E-CB4CCA059FC4}" type="datetimeFigureOut">
               <a:rPr lang="en-US" smtClean="0"/>
-              <a:t>1/27/13</a:t>
+              <a:t>9/1/2026</a:t>
             </a:fld>
             <a:endParaRPr lang="en-US"/>
           </a:p>
@@ -3115,7 +3110,7 @@
 </file>
 
 <file path=ppt/slides/slide1.xml><?xml version="1.0" encoding="utf-8"?>
-<p:sld xmlns:a="http://schemas.openxmlformats.org/drawingml/2006/main" xmlns:p="http://schemas.openxmlformats.org/presentationml/2006/main" xmlns:r="http://schemas.openxmlformats.org/officeDocument/2006/relationships">
+<p:sld xmlns:a="http://schemas.openxmlformats.org/drawingml/2006/main" xmlns:r="http://schemas.openxmlformats.org/officeDocument/2006/relationships" xmlns:p="http://schemas.openxmlformats.org/presentationml/2006/main">
   <p:cSld>
     <p:bg>
       <p:bgPr>
@@ -3131,7 +3126,14 @@
         <p:cNvGrpSpPr/>
         <p:nvPr/>
       </p:nvGrpSpPr>
-      <p:grpSpPr/>
+      <p:grpSpPr>
+        <a:xfrm>
+          <a:off x="0" y="0"/>
+          <a:ext cx="0" cy="0"/>
+          <a:chOff x="0" y="0"/>
+          <a:chExt cx="0" cy="0"/>
+        </a:xfrm>
+      </p:grpSpPr>
       <p:sp>
         <p:nvSpPr>
           <p:cNvPr id="2" name="TextBox 1"/>
@@ -3149,7 +3151,7 @@
           <a:noFill/>
         </p:spPr>
         <p:txBody>
-          <a:bodyPr wrap="square" lIns="36576" rIns="36576" tIns="36576" bIns="36576" anchor="t">
+          <a:bodyPr wrap="square" lIns="36576" tIns="36576" rIns="36576" bIns="36576" anchor="t">
             <a:spAutoFit/>
           </a:bodyPr>
           <a:lstStyle/>
@@ -3184,7 +3186,7 @@
           <a:noFill/>
         </p:spPr>
         <p:txBody>
-          <a:bodyPr wrap="square" lIns="36576" rIns="36576" tIns="36576" bIns="36576" anchor="t">
+          <a:bodyPr wrap="square" lIns="36576" tIns="36576" rIns="36576" bIns="36576" anchor="t">
             <a:spAutoFit/>
           </a:bodyPr>
           <a:lstStyle/>
@@ -3220,7 +3222,7 @@
           <a:noFill/>
         </p:spPr>
         <p:txBody>
-          <a:bodyPr wrap="square" lIns="36576" rIns="36576" tIns="36576" bIns="36576" anchor="t">
+          <a:bodyPr wrap="square" lIns="36576" tIns="36576" rIns="36576" bIns="36576" anchor="t">
             <a:spAutoFit/>
           </a:bodyPr>
           <a:lstStyle/>
@@ -3280,6 +3282,7 @@
           <a:lstStyle/>
           <a:p>
             <a:pPr algn="ctr"/>
+            <a:endParaRPr/>
           </a:p>
         </p:txBody>
       </p:sp>
@@ -3300,7 +3303,7 @@
           <a:noFill/>
         </p:spPr>
         <p:txBody>
-          <a:bodyPr wrap="square" lIns="36576" rIns="36576" tIns="36576" bIns="36576" anchor="t">
+          <a:bodyPr wrap="square" lIns="36576" tIns="36576" rIns="36576" bIns="36576" anchor="t">
             <a:spAutoFit/>
           </a:bodyPr>
           <a:lstStyle/>
@@ -3335,7 +3338,7 @@
           <a:noFill/>
         </p:spPr>
         <p:txBody>
-          <a:bodyPr wrap="square" lIns="36576" rIns="36576" tIns="36576" bIns="36576" anchor="t">
+          <a:bodyPr wrap="square" lIns="36576" tIns="36576" rIns="36576" bIns="36576" anchor="t">
             <a:spAutoFit/>
           </a:bodyPr>
           <a:lstStyle/>
@@ -3395,6 +3398,7 @@
           <a:lstStyle/>
           <a:p>
             <a:pPr algn="ctr"/>
+            <a:endParaRPr/>
           </a:p>
         </p:txBody>
       </p:sp>
@@ -3415,7 +3419,7 @@
           <a:noFill/>
         </p:spPr>
         <p:txBody>
-          <a:bodyPr wrap="square" lIns="36576" rIns="36576" tIns="36576" bIns="36576" anchor="t">
+          <a:bodyPr wrap="square" lIns="36576" tIns="36576" rIns="36576" bIns="36576" anchor="t">
             <a:spAutoFit/>
           </a:bodyPr>
           <a:lstStyle/>
@@ -3450,7 +3454,7 @@
           <a:noFill/>
         </p:spPr>
         <p:txBody>
-          <a:bodyPr wrap="square" lIns="36576" rIns="36576" tIns="36576" bIns="36576" anchor="t">
+          <a:bodyPr wrap="square" lIns="36576" tIns="36576" rIns="36576" bIns="36576" anchor="t">
             <a:spAutoFit/>
           </a:bodyPr>
           <a:lstStyle/>
@@ -3510,6 +3514,7 @@
           <a:lstStyle/>
           <a:p>
             <a:pPr algn="ctr"/>
+            <a:endParaRPr/>
           </a:p>
         </p:txBody>
       </p:sp>
@@ -3530,7 +3535,7 @@
           <a:noFill/>
         </p:spPr>
         <p:txBody>
-          <a:bodyPr wrap="square" lIns="36576" rIns="36576" tIns="36576" bIns="36576" anchor="t">
+          <a:bodyPr wrap="square" lIns="36576" tIns="36576" rIns="36576" bIns="36576" anchor="t">
             <a:spAutoFit/>
           </a:bodyPr>
           <a:lstStyle/>
@@ -3565,7 +3570,7 @@
           <a:noFill/>
         </p:spPr>
         <p:txBody>
-          <a:bodyPr wrap="square" lIns="36576" rIns="36576" tIns="36576" bIns="36576" anchor="t">
+          <a:bodyPr wrap="square" lIns="36576" tIns="36576" rIns="36576" bIns="36576" anchor="t">
             <a:spAutoFit/>
           </a:bodyPr>
           <a:lstStyle/>
@@ -3625,6 +3630,7 @@
           <a:lstStyle/>
           <a:p>
             <a:pPr algn="ctr"/>
+            <a:endParaRPr/>
           </a:p>
         </p:txBody>
       </p:sp>
@@ -3645,7 +3651,7 @@
           <a:noFill/>
         </p:spPr>
         <p:txBody>
-          <a:bodyPr wrap="square" lIns="36576" rIns="36576" tIns="36576" bIns="36576" anchor="t">
+          <a:bodyPr wrap="square" lIns="36576" tIns="36576" rIns="36576" bIns="36576" anchor="t">
             <a:spAutoFit/>
           </a:bodyPr>
           <a:lstStyle/>
@@ -3680,7 +3686,7 @@
           <a:noFill/>
         </p:spPr>
         <p:txBody>
-          <a:bodyPr wrap="square" lIns="36576" rIns="36576" tIns="36576" bIns="36576" anchor="t">
+          <a:bodyPr wrap="square" lIns="36576" tIns="36576" rIns="36576" bIns="36576" anchor="t">
             <a:spAutoFit/>
           </a:bodyPr>
           <a:lstStyle/>
@@ -3715,7 +3721,7 @@
           <a:noFill/>
         </p:spPr>
         <p:txBody>
-          <a:bodyPr wrap="square" lIns="36576" rIns="36576" tIns="36576" bIns="36576" anchor="t">
+          <a:bodyPr wrap="square" lIns="36576" tIns="36576" rIns="36576" bIns="36576" anchor="t">
             <a:spAutoFit/>
           </a:bodyPr>
           <a:lstStyle/>
@@ -3742,7 +3748,7 @@
 </file>
 
 <file path=ppt/slides/slide10.xml><?xml version="1.0" encoding="utf-8"?>
-<p:sld xmlns:a="http://schemas.openxmlformats.org/drawingml/2006/main" xmlns:p="http://schemas.openxmlformats.org/presentationml/2006/main" xmlns:r="http://schemas.openxmlformats.org/officeDocument/2006/relationships">
+<p:sld xmlns:a="http://schemas.openxmlformats.org/drawingml/2006/main" xmlns:r="http://schemas.openxmlformats.org/officeDocument/2006/relationships" xmlns:p="http://schemas.openxmlformats.org/presentationml/2006/main">
   <p:cSld>
     <p:bg>
       <p:bgPr>
@@ -3758,7 +3764,14 @@
         <p:cNvGrpSpPr/>
         <p:nvPr/>
       </p:nvGrpSpPr>
-      <p:grpSpPr/>
+      <p:grpSpPr>
+        <a:xfrm>
+          <a:off x="0" y="0"/>
+          <a:ext cx="0" cy="0"/>
+          <a:chOff x="0" y="0"/>
+          <a:chExt cx="0" cy="0"/>
+        </a:xfrm>
+      </p:grpSpPr>
       <p:sp>
         <p:nvSpPr>
           <p:cNvPr id="2" name="TextBox 1"/>
@@ -3776,7 +3789,7 @@
           <a:noFill/>
         </p:spPr>
         <p:txBody>
-          <a:bodyPr wrap="square" lIns="36576" rIns="36576" tIns="36576" bIns="36576" anchor="t">
+          <a:bodyPr wrap="square" lIns="36576" tIns="36576" rIns="36576" bIns="36576" anchor="t">
             <a:spAutoFit/>
           </a:bodyPr>
           <a:lstStyle/>
@@ -3811,7 +3824,7 @@
           <a:noFill/>
         </p:spPr>
         <p:txBody>
-          <a:bodyPr wrap="square" lIns="36576" rIns="36576" tIns="36576" bIns="36576" anchor="t">
+          <a:bodyPr wrap="square" lIns="36576" tIns="36576" rIns="36576" bIns="36576" anchor="t">
             <a:spAutoFit/>
           </a:bodyPr>
           <a:lstStyle/>
@@ -3881,7 +3894,7 @@
           <a:noFill/>
         </p:spPr>
         <p:txBody>
-          <a:bodyPr wrap="square" lIns="36576" rIns="36576" tIns="36576" bIns="36576" anchor="t">
+          <a:bodyPr wrap="square" lIns="36576" tIns="36576" rIns="36576" bIns="36576" anchor="t">
             <a:spAutoFit/>
           </a:bodyPr>
           <a:lstStyle/>
@@ -3989,6 +4002,7 @@
           <a:lstStyle/>
           <a:p>
             <a:pPr algn="ctr"/>
+            <a:endParaRPr/>
           </a:p>
         </p:txBody>
       </p:sp>
@@ -4032,6 +4046,7 @@
           <a:lstStyle/>
           <a:p>
             <a:pPr algn="ctr"/>
+            <a:endParaRPr/>
           </a:p>
         </p:txBody>
       </p:sp>
@@ -4052,7 +4067,7 @@
           <a:noFill/>
         </p:spPr>
         <p:txBody>
-          <a:bodyPr wrap="square" lIns="36576" rIns="36576" tIns="36576" bIns="36576" anchor="t">
+          <a:bodyPr wrap="square" lIns="36576" tIns="36576" rIns="36576" bIns="36576" anchor="t">
             <a:spAutoFit/>
           </a:bodyPr>
           <a:lstStyle/>
@@ -4087,7 +4102,7 @@
           <a:noFill/>
         </p:spPr>
         <p:txBody>
-          <a:bodyPr wrap="square" lIns="36576" rIns="36576" tIns="36576" bIns="36576" anchor="t">
+          <a:bodyPr wrap="square" lIns="36576" tIns="36576" rIns="36576" bIns="36576" anchor="t">
             <a:spAutoFit/>
           </a:bodyPr>
           <a:lstStyle/>
@@ -4147,6 +4162,7 @@
           <a:lstStyle/>
           <a:p>
             <a:pPr algn="ctr"/>
+            <a:endParaRPr/>
           </a:p>
         </p:txBody>
       </p:sp>
@@ -4190,6 +4206,7 @@
           <a:lstStyle/>
           <a:p>
             <a:pPr algn="ctr"/>
+            <a:endParaRPr/>
           </a:p>
         </p:txBody>
       </p:sp>
@@ -4210,7 +4227,7 @@
           <a:noFill/>
         </p:spPr>
         <p:txBody>
-          <a:bodyPr wrap="square" lIns="36576" rIns="36576" tIns="36576" bIns="36576" anchor="t">
+          <a:bodyPr wrap="square" lIns="36576" tIns="36576" rIns="36576" bIns="36576" anchor="t">
             <a:spAutoFit/>
           </a:bodyPr>
           <a:lstStyle/>
@@ -4245,7 +4262,7 @@
           <a:noFill/>
         </p:spPr>
         <p:txBody>
-          <a:bodyPr wrap="square" lIns="36576" rIns="36576" tIns="36576" bIns="36576" anchor="t">
+          <a:bodyPr wrap="square" lIns="36576" tIns="36576" rIns="36576" bIns="36576" anchor="t">
             <a:spAutoFit/>
           </a:bodyPr>
           <a:lstStyle/>
@@ -4280,7 +4297,7 @@
           <a:noFill/>
         </p:spPr>
         <p:txBody>
-          <a:bodyPr wrap="square" lIns="36576" rIns="36576" tIns="36576" bIns="36576" anchor="t">
+          <a:bodyPr wrap="square" lIns="36576" tIns="36576" rIns="36576" bIns="36576" anchor="t">
             <a:spAutoFit/>
           </a:bodyPr>
           <a:lstStyle/>
@@ -4315,7 +4332,7 @@
           <a:noFill/>
         </p:spPr>
         <p:txBody>
-          <a:bodyPr wrap="square" lIns="36576" rIns="36576" tIns="36576" bIns="36576" anchor="t">
+          <a:bodyPr wrap="square" lIns="36576" tIns="36576" rIns="36576" bIns="36576" anchor="t">
             <a:spAutoFit/>
           </a:bodyPr>
           <a:lstStyle/>
@@ -4342,7 +4359,7 @@
 </file>
 
 <file path=ppt/slides/slide11.xml><?xml version="1.0" encoding="utf-8"?>
-<p:sld xmlns:a="http://schemas.openxmlformats.org/drawingml/2006/main" xmlns:p="http://schemas.openxmlformats.org/presentationml/2006/main" xmlns:r="http://schemas.openxmlformats.org/officeDocument/2006/relationships">
+<p:sld xmlns:a="http://schemas.openxmlformats.org/drawingml/2006/main" xmlns:r="http://schemas.openxmlformats.org/officeDocument/2006/relationships" xmlns:p="http://schemas.openxmlformats.org/presentationml/2006/main">
   <p:cSld>
     <p:bg>
       <p:bgPr>
@@ -4358,7 +4375,14 @@
         <p:cNvGrpSpPr/>
         <p:nvPr/>
       </p:nvGrpSpPr>
-      <p:grpSpPr/>
+      <p:grpSpPr>
+        <a:xfrm>
+          <a:off x="0" y="0"/>
+          <a:ext cx="0" cy="0"/>
+          <a:chOff x="0" y="0"/>
+          <a:chExt cx="0" cy="0"/>
+        </a:xfrm>
+      </p:grpSpPr>
       <p:sp>
         <p:nvSpPr>
           <p:cNvPr id="2" name="TextBox 1"/>
@@ -4376,7 +4400,7 @@
           <a:noFill/>
         </p:spPr>
         <p:txBody>
-          <a:bodyPr wrap="square" lIns="36576" rIns="36576" tIns="36576" bIns="36576" anchor="t">
+          <a:bodyPr wrap="square" lIns="36576" tIns="36576" rIns="36576" bIns="36576" anchor="t">
             <a:spAutoFit/>
           </a:bodyPr>
           <a:lstStyle/>
@@ -4411,7 +4435,7 @@
           <a:noFill/>
         </p:spPr>
         <p:txBody>
-          <a:bodyPr wrap="square" lIns="36576" rIns="36576" tIns="36576" bIns="36576" anchor="t">
+          <a:bodyPr wrap="square" lIns="36576" tIns="36576" rIns="36576" bIns="36576" anchor="t">
             <a:spAutoFit/>
           </a:bodyPr>
           <a:lstStyle/>
@@ -4481,7 +4505,7 @@
           <a:noFill/>
         </p:spPr>
         <p:txBody>
-          <a:bodyPr wrap="square" lIns="36576" rIns="36576" tIns="36576" bIns="36576" anchor="t">
+          <a:bodyPr wrap="square" lIns="36576" tIns="36576" rIns="36576" bIns="36576" anchor="t">
             <a:spAutoFit/>
           </a:bodyPr>
           <a:lstStyle/>
@@ -4539,8 +4563,8 @@
         </p:blipFill>
         <p:spPr>
           <a:xfrm>
-            <a:off x="777240" y="2423160"/>
-            <a:ext cx="6583680" cy="822960"/>
+            <a:off x="569905" y="2427413"/>
+            <a:ext cx="6516695" cy="822960"/>
           </a:xfrm>
           <a:prstGeom prst="rect">
             <a:avLst/>
@@ -4579,7 +4603,7 @@
         </p:nvSpPr>
         <p:spPr>
           <a:xfrm>
-            <a:off x="6949440" y="1554480"/>
+            <a:off x="7498080" y="1472184"/>
             <a:ext cx="4297680" cy="1645920"/>
           </a:xfrm>
           <a:prstGeom prst="roundRect">
@@ -4613,6 +4637,7 @@
           <a:lstStyle/>
           <a:p>
             <a:pPr algn="ctr"/>
+            <a:endParaRPr/>
           </a:p>
         </p:txBody>
       </p:sp>
@@ -4624,7 +4649,7 @@
         </p:nvSpPr>
         <p:spPr>
           <a:xfrm>
-            <a:off x="6949440" y="1554480"/>
+            <a:off x="7498080" y="1472184"/>
             <a:ext cx="50292" cy="1645920"/>
           </a:xfrm>
           <a:prstGeom prst="rect">
@@ -4656,6 +4681,7 @@
           <a:lstStyle/>
           <a:p>
             <a:pPr algn="ctr"/>
+            <a:endParaRPr/>
           </a:p>
         </p:txBody>
       </p:sp>
@@ -4667,7 +4693,7 @@
         </p:nvSpPr>
         <p:spPr>
           <a:xfrm>
-            <a:off x="7095744" y="1664208"/>
+            <a:off x="7644384" y="1581912"/>
             <a:ext cx="4069080" cy="292608"/>
           </a:xfrm>
           <a:prstGeom prst="rect">
@@ -4676,7 +4702,7 @@
           <a:noFill/>
         </p:spPr>
         <p:txBody>
-          <a:bodyPr wrap="square" lIns="36576" rIns="36576" tIns="36576" bIns="36576" anchor="t">
+          <a:bodyPr wrap="square" lIns="36576" tIns="36576" rIns="36576" bIns="36576" anchor="t">
             <a:spAutoFit/>
           </a:bodyPr>
           <a:lstStyle/>
@@ -4702,7 +4728,7 @@
         </p:nvSpPr>
         <p:spPr>
           <a:xfrm>
-            <a:off x="7095744" y="2039112"/>
+            <a:off x="7644384" y="1956816"/>
             <a:ext cx="4069080" cy="1078992"/>
           </a:xfrm>
           <a:prstGeom prst="rect">
@@ -4711,7 +4737,7 @@
           <a:noFill/>
         </p:spPr>
         <p:txBody>
-          <a:bodyPr wrap="square" lIns="36576" rIns="36576" tIns="36576" bIns="36576" anchor="t">
+          <a:bodyPr wrap="square" lIns="36576" tIns="36576" rIns="36576" bIns="36576" anchor="t">
             <a:spAutoFit/>
           </a:bodyPr>
           <a:lstStyle/>
@@ -4737,7 +4763,7 @@
         </p:nvSpPr>
         <p:spPr>
           <a:xfrm>
-            <a:off x="6949440" y="3566160"/>
+            <a:off x="7498080" y="3483864"/>
             <a:ext cx="4297680" cy="1188720"/>
           </a:xfrm>
           <a:prstGeom prst="roundRect">
@@ -4771,6 +4797,7 @@
           <a:lstStyle/>
           <a:p>
             <a:pPr algn="ctr"/>
+            <a:endParaRPr/>
           </a:p>
         </p:txBody>
       </p:sp>
@@ -4782,7 +4809,7 @@
         </p:nvSpPr>
         <p:spPr>
           <a:xfrm>
-            <a:off x="6949440" y="3566160"/>
+            <a:off x="7498080" y="3483864"/>
             <a:ext cx="50292" cy="1188720"/>
           </a:xfrm>
           <a:prstGeom prst="rect">
@@ -4814,6 +4841,7 @@
           <a:lstStyle/>
           <a:p>
             <a:pPr algn="ctr"/>
+            <a:endParaRPr/>
           </a:p>
         </p:txBody>
       </p:sp>
@@ -4825,7 +4853,7 @@
         </p:nvSpPr>
         <p:spPr>
           <a:xfrm>
-            <a:off x="7095744" y="3675888"/>
+            <a:off x="7644384" y="3593592"/>
             <a:ext cx="4069080" cy="292608"/>
           </a:xfrm>
           <a:prstGeom prst="rect">
@@ -4834,7 +4862,7 @@
           <a:noFill/>
         </p:spPr>
         <p:txBody>
-          <a:bodyPr wrap="square" lIns="36576" rIns="36576" tIns="36576" bIns="36576" anchor="t">
+          <a:bodyPr wrap="square" lIns="36576" tIns="36576" rIns="36576" bIns="36576" anchor="t">
             <a:spAutoFit/>
           </a:bodyPr>
           <a:lstStyle/>
@@ -4860,7 +4888,7 @@
         </p:nvSpPr>
         <p:spPr>
           <a:xfrm>
-            <a:off x="7095744" y="4050792"/>
+            <a:off x="7644384" y="3968496"/>
             <a:ext cx="4069080" cy="621792"/>
           </a:xfrm>
           <a:prstGeom prst="rect">
@@ -4869,7 +4897,7 @@
           <a:noFill/>
         </p:spPr>
         <p:txBody>
-          <a:bodyPr wrap="square" lIns="36576" rIns="36576" tIns="36576" bIns="36576" anchor="t">
+          <a:bodyPr wrap="square" lIns="36576" tIns="36576" rIns="36576" bIns="36576" anchor="t">
             <a:spAutoFit/>
           </a:bodyPr>
           <a:lstStyle/>
@@ -4904,7 +4932,7 @@
           <a:noFill/>
         </p:spPr>
         <p:txBody>
-          <a:bodyPr wrap="square" lIns="36576" rIns="36576" tIns="36576" bIns="36576" anchor="t">
+          <a:bodyPr wrap="square" lIns="36576" tIns="36576" rIns="36576" bIns="36576" anchor="t">
             <a:spAutoFit/>
           </a:bodyPr>
           <a:lstStyle/>
@@ -4939,7 +4967,7 @@
           <a:noFill/>
         </p:spPr>
         <p:txBody>
-          <a:bodyPr wrap="square" lIns="36576" rIns="36576" tIns="36576" bIns="36576" anchor="t">
+          <a:bodyPr wrap="square" lIns="36576" tIns="36576" rIns="36576" bIns="36576" anchor="t">
             <a:spAutoFit/>
           </a:bodyPr>
           <a:lstStyle/>
@@ -4966,7 +4994,7 @@
 </file>
 
 <file path=ppt/slides/slide12.xml><?xml version="1.0" encoding="utf-8"?>
-<p:sld xmlns:a="http://schemas.openxmlformats.org/drawingml/2006/main" xmlns:p="http://schemas.openxmlformats.org/presentationml/2006/main" xmlns:r="http://schemas.openxmlformats.org/officeDocument/2006/relationships">
+<p:sld xmlns:a="http://schemas.openxmlformats.org/drawingml/2006/main" xmlns:r="http://schemas.openxmlformats.org/officeDocument/2006/relationships" xmlns:p="http://schemas.openxmlformats.org/presentationml/2006/main">
   <p:cSld>
     <p:bg>
       <p:bgPr>
@@ -4982,7 +5010,14 @@
         <p:cNvGrpSpPr/>
         <p:nvPr/>
       </p:nvGrpSpPr>
-      <p:grpSpPr/>
+      <p:grpSpPr>
+        <a:xfrm>
+          <a:off x="0" y="0"/>
+          <a:ext cx="0" cy="0"/>
+          <a:chOff x="0" y="0"/>
+          <a:chExt cx="0" cy="0"/>
+        </a:xfrm>
+      </p:grpSpPr>
       <p:sp>
         <p:nvSpPr>
           <p:cNvPr id="2" name="TextBox 1"/>
@@ -5000,7 +5035,7 @@
           <a:noFill/>
         </p:spPr>
         <p:txBody>
-          <a:bodyPr wrap="square" lIns="36576" rIns="36576" tIns="36576" bIns="36576" anchor="t">
+          <a:bodyPr wrap="square" lIns="36576" tIns="36576" rIns="36576" bIns="36576" anchor="t">
             <a:spAutoFit/>
           </a:bodyPr>
           <a:lstStyle/>
@@ -5035,7 +5070,7 @@
           <a:noFill/>
         </p:spPr>
         <p:txBody>
-          <a:bodyPr wrap="square" lIns="36576" rIns="36576" tIns="36576" bIns="36576" anchor="t">
+          <a:bodyPr wrap="square" lIns="36576" tIns="36576" rIns="36576" bIns="36576" anchor="t">
             <a:spAutoFit/>
           </a:bodyPr>
           <a:lstStyle/>
@@ -5105,7 +5140,7 @@
           <a:noFill/>
         </p:spPr>
         <p:txBody>
-          <a:bodyPr wrap="square" lIns="36576" rIns="36576" tIns="36576" bIns="36576" anchor="t">
+          <a:bodyPr wrap="square" lIns="36576" tIns="36576" rIns="36576" bIns="36576" anchor="t">
             <a:spAutoFit/>
           </a:bodyPr>
           <a:lstStyle/>
@@ -5189,6 +5224,7 @@
           <a:lstStyle/>
           <a:p>
             <a:pPr algn="ctr"/>
+            <a:endParaRPr/>
           </a:p>
         </p:txBody>
       </p:sp>
@@ -5232,6 +5268,7 @@
           <a:lstStyle/>
           <a:p>
             <a:pPr algn="ctr"/>
+            <a:endParaRPr/>
           </a:p>
         </p:txBody>
       </p:sp>
@@ -5252,7 +5289,7 @@
           <a:noFill/>
         </p:spPr>
         <p:txBody>
-          <a:bodyPr wrap="square" lIns="36576" rIns="36576" tIns="36576" bIns="36576" anchor="t">
+          <a:bodyPr wrap="square" lIns="36576" tIns="36576" rIns="36576" bIns="36576" anchor="t">
             <a:spAutoFit/>
           </a:bodyPr>
           <a:lstStyle/>
@@ -5287,7 +5324,7 @@
           <a:noFill/>
         </p:spPr>
         <p:txBody>
-          <a:bodyPr wrap="square" lIns="36576" rIns="36576" tIns="36576" bIns="36576" anchor="t">
+          <a:bodyPr wrap="square" lIns="36576" tIns="36576" rIns="36576" bIns="36576" anchor="t">
             <a:spAutoFit/>
           </a:bodyPr>
           <a:lstStyle/>
@@ -5347,6 +5384,7 @@
           <a:lstStyle/>
           <a:p>
             <a:pPr algn="ctr"/>
+            <a:endParaRPr/>
           </a:p>
         </p:txBody>
       </p:sp>
@@ -5390,6 +5428,7 @@
           <a:lstStyle/>
           <a:p>
             <a:pPr algn="ctr"/>
+            <a:endParaRPr/>
           </a:p>
         </p:txBody>
       </p:sp>
@@ -5410,7 +5449,7 @@
           <a:noFill/>
         </p:spPr>
         <p:txBody>
-          <a:bodyPr wrap="square" lIns="36576" rIns="36576" tIns="36576" bIns="36576" anchor="t">
+          <a:bodyPr wrap="square" lIns="36576" tIns="36576" rIns="36576" bIns="36576" anchor="t">
             <a:spAutoFit/>
           </a:bodyPr>
           <a:lstStyle/>
@@ -5445,7 +5484,7 @@
           <a:noFill/>
         </p:spPr>
         <p:txBody>
-          <a:bodyPr wrap="square" lIns="36576" rIns="36576" tIns="36576" bIns="36576" anchor="t">
+          <a:bodyPr wrap="square" lIns="36576" tIns="36576" rIns="36576" bIns="36576" anchor="t">
             <a:spAutoFit/>
           </a:bodyPr>
           <a:lstStyle/>
@@ -5480,7 +5519,7 @@
           <a:noFill/>
         </p:spPr>
         <p:txBody>
-          <a:bodyPr wrap="square" lIns="36576" rIns="36576" tIns="36576" bIns="36576" anchor="t">
+          <a:bodyPr wrap="square" lIns="36576" tIns="36576" rIns="36576" bIns="36576" anchor="t">
             <a:spAutoFit/>
           </a:bodyPr>
           <a:lstStyle/>
@@ -5515,7 +5554,7 @@
           <a:noFill/>
         </p:spPr>
         <p:txBody>
-          <a:bodyPr wrap="square" lIns="36576" rIns="36576" tIns="36576" bIns="36576" anchor="t">
+          <a:bodyPr wrap="square" lIns="36576" tIns="36576" rIns="36576" bIns="36576" anchor="t">
             <a:spAutoFit/>
           </a:bodyPr>
           <a:lstStyle/>
@@ -5542,7 +5581,7 @@
 </file>
 
 <file path=ppt/slides/slide13.xml><?xml version="1.0" encoding="utf-8"?>
-<p:sld xmlns:a="http://schemas.openxmlformats.org/drawingml/2006/main" xmlns:p="http://schemas.openxmlformats.org/presentationml/2006/main" xmlns:r="http://schemas.openxmlformats.org/officeDocument/2006/relationships">
+<p:sld xmlns:a="http://schemas.openxmlformats.org/drawingml/2006/main" xmlns:r="http://schemas.openxmlformats.org/officeDocument/2006/relationships" xmlns:p="http://schemas.openxmlformats.org/presentationml/2006/main">
   <p:cSld>
     <p:bg>
       <p:bgPr>
@@ -5558,7 +5597,14 @@
         <p:cNvGrpSpPr/>
         <p:nvPr/>
       </p:nvGrpSpPr>
-      <p:grpSpPr/>
+      <p:grpSpPr>
+        <a:xfrm>
+          <a:off x="0" y="0"/>
+          <a:ext cx="0" cy="0"/>
+          <a:chOff x="0" y="0"/>
+          <a:chExt cx="0" cy="0"/>
+        </a:xfrm>
+      </p:grpSpPr>
       <p:sp>
         <p:nvSpPr>
           <p:cNvPr id="2" name="TextBox 1"/>
@@ -5576,7 +5622,7 @@
           <a:noFill/>
         </p:spPr>
         <p:txBody>
-          <a:bodyPr wrap="square" lIns="36576" rIns="36576" tIns="36576" bIns="36576" anchor="t">
+          <a:bodyPr wrap="square" lIns="36576" tIns="36576" rIns="36576" bIns="36576" anchor="t">
             <a:spAutoFit/>
           </a:bodyPr>
           <a:lstStyle/>
@@ -5611,7 +5657,7 @@
           <a:noFill/>
         </p:spPr>
         <p:txBody>
-          <a:bodyPr wrap="square" lIns="36576" rIns="36576" tIns="36576" bIns="36576" anchor="t">
+          <a:bodyPr wrap="square" lIns="36576" tIns="36576" rIns="36576" bIns="36576" anchor="t">
             <a:spAutoFit/>
           </a:bodyPr>
           <a:lstStyle/>
@@ -5681,7 +5727,7 @@
           <a:noFill/>
         </p:spPr>
         <p:txBody>
-          <a:bodyPr wrap="square" lIns="36576" rIns="36576" tIns="36576" bIns="36576" anchor="t">
+          <a:bodyPr wrap="square" lIns="36576" tIns="36576" rIns="36576" bIns="36576" anchor="t">
             <a:spAutoFit/>
           </a:bodyPr>
           <a:lstStyle/>
@@ -5813,6 +5859,7 @@
           <a:lstStyle/>
           <a:p>
             <a:pPr algn="ctr"/>
+            <a:endParaRPr/>
           </a:p>
         </p:txBody>
       </p:sp>
@@ -5856,6 +5903,7 @@
           <a:lstStyle/>
           <a:p>
             <a:pPr algn="ctr"/>
+            <a:endParaRPr/>
           </a:p>
         </p:txBody>
       </p:sp>
@@ -5876,7 +5924,7 @@
           <a:noFill/>
         </p:spPr>
         <p:txBody>
-          <a:bodyPr wrap="square" lIns="36576" rIns="36576" tIns="36576" bIns="36576" anchor="t">
+          <a:bodyPr wrap="square" lIns="36576" tIns="36576" rIns="36576" bIns="36576" anchor="t">
             <a:spAutoFit/>
           </a:bodyPr>
           <a:lstStyle/>
@@ -5911,7 +5959,7 @@
           <a:noFill/>
         </p:spPr>
         <p:txBody>
-          <a:bodyPr wrap="square" lIns="36576" rIns="36576" tIns="36576" bIns="36576" anchor="t">
+          <a:bodyPr wrap="square" lIns="36576" tIns="36576" rIns="36576" bIns="36576" anchor="t">
             <a:spAutoFit/>
           </a:bodyPr>
           <a:lstStyle/>
@@ -5971,6 +6019,7 @@
           <a:lstStyle/>
           <a:p>
             <a:pPr algn="ctr"/>
+            <a:endParaRPr/>
           </a:p>
         </p:txBody>
       </p:sp>
@@ -6014,6 +6063,7 @@
           <a:lstStyle/>
           <a:p>
             <a:pPr algn="ctr"/>
+            <a:endParaRPr/>
           </a:p>
         </p:txBody>
       </p:sp>
@@ -6034,7 +6084,7 @@
           <a:noFill/>
         </p:spPr>
         <p:txBody>
-          <a:bodyPr wrap="square" lIns="36576" rIns="36576" tIns="36576" bIns="36576" anchor="t">
+          <a:bodyPr wrap="square" lIns="36576" tIns="36576" rIns="36576" bIns="36576" anchor="t">
             <a:spAutoFit/>
           </a:bodyPr>
           <a:lstStyle/>
@@ -6069,7 +6119,7 @@
           <a:noFill/>
         </p:spPr>
         <p:txBody>
-          <a:bodyPr wrap="square" lIns="36576" rIns="36576" tIns="36576" bIns="36576" anchor="t">
+          <a:bodyPr wrap="square" lIns="36576" tIns="36576" rIns="36576" bIns="36576" anchor="t">
             <a:spAutoFit/>
           </a:bodyPr>
           <a:lstStyle/>
@@ -6104,7 +6154,7 @@
           <a:noFill/>
         </p:spPr>
         <p:txBody>
-          <a:bodyPr wrap="square" lIns="36576" rIns="36576" tIns="36576" bIns="36576" anchor="t">
+          <a:bodyPr wrap="square" lIns="36576" tIns="36576" rIns="36576" bIns="36576" anchor="t">
             <a:spAutoFit/>
           </a:bodyPr>
           <a:lstStyle/>
@@ -6139,7 +6189,7 @@
           <a:noFill/>
         </p:spPr>
         <p:txBody>
-          <a:bodyPr wrap="square" lIns="36576" rIns="36576" tIns="36576" bIns="36576" anchor="t">
+          <a:bodyPr wrap="square" lIns="36576" tIns="36576" rIns="36576" bIns="36576" anchor="t">
             <a:spAutoFit/>
           </a:bodyPr>
           <a:lstStyle/>
@@ -6166,7 +6216,7 @@
 </file>
 
 <file path=ppt/slides/slide14.xml><?xml version="1.0" encoding="utf-8"?>
-<p:sld xmlns:a="http://schemas.openxmlformats.org/drawingml/2006/main" xmlns:p="http://schemas.openxmlformats.org/presentationml/2006/main" xmlns:r="http://schemas.openxmlformats.org/officeDocument/2006/relationships">
+<p:sld xmlns:a="http://schemas.openxmlformats.org/drawingml/2006/main" xmlns:r="http://schemas.openxmlformats.org/officeDocument/2006/relationships" xmlns:p="http://schemas.openxmlformats.org/presentationml/2006/main">
   <p:cSld>
     <p:bg>
       <p:bgPr>
@@ -6182,7 +6232,14 @@
         <p:cNvGrpSpPr/>
         <p:nvPr/>
       </p:nvGrpSpPr>
-      <p:grpSpPr/>
+      <p:grpSpPr>
+        <a:xfrm>
+          <a:off x="0" y="0"/>
+          <a:ext cx="0" cy="0"/>
+          <a:chOff x="0" y="0"/>
+          <a:chExt cx="0" cy="0"/>
+        </a:xfrm>
+      </p:grpSpPr>
       <p:sp>
         <p:nvSpPr>
           <p:cNvPr id="2" name="TextBox 1"/>
@@ -6200,7 +6257,7 @@
           <a:noFill/>
         </p:spPr>
         <p:txBody>
-          <a:bodyPr wrap="square" lIns="36576" rIns="36576" tIns="36576" bIns="36576" anchor="t">
+          <a:bodyPr wrap="square" lIns="36576" tIns="36576" rIns="36576" bIns="36576" anchor="t">
             <a:spAutoFit/>
           </a:bodyPr>
           <a:lstStyle/>
@@ -6235,7 +6292,7 @@
           <a:noFill/>
         </p:spPr>
         <p:txBody>
-          <a:bodyPr wrap="square" lIns="36576" rIns="36576" tIns="36576" bIns="36576" anchor="t">
+          <a:bodyPr wrap="square" lIns="36576" tIns="36576" rIns="36576" bIns="36576" anchor="t">
             <a:spAutoFit/>
           </a:bodyPr>
           <a:lstStyle/>
@@ -6305,7 +6362,7 @@
           <a:noFill/>
         </p:spPr>
         <p:txBody>
-          <a:bodyPr wrap="square" lIns="36576" rIns="36576" tIns="36576" bIns="36576" anchor="t">
+          <a:bodyPr wrap="square" lIns="36576" tIns="36576" rIns="36576" bIns="36576" anchor="t">
             <a:spAutoFit/>
           </a:bodyPr>
           <a:lstStyle/>
@@ -6413,6 +6470,7 @@
           <a:lstStyle/>
           <a:p>
             <a:pPr algn="ctr"/>
+            <a:endParaRPr/>
           </a:p>
         </p:txBody>
       </p:sp>
@@ -6456,6 +6514,7 @@
           <a:lstStyle/>
           <a:p>
             <a:pPr algn="ctr"/>
+            <a:endParaRPr/>
           </a:p>
         </p:txBody>
       </p:sp>
@@ -6476,7 +6535,7 @@
           <a:noFill/>
         </p:spPr>
         <p:txBody>
-          <a:bodyPr wrap="square" lIns="36576" rIns="36576" tIns="36576" bIns="36576" anchor="t">
+          <a:bodyPr wrap="square" lIns="36576" tIns="36576" rIns="36576" bIns="36576" anchor="t">
             <a:spAutoFit/>
           </a:bodyPr>
           <a:lstStyle/>
@@ -6511,7 +6570,7 @@
           <a:noFill/>
         </p:spPr>
         <p:txBody>
-          <a:bodyPr wrap="square" lIns="36576" rIns="36576" tIns="36576" bIns="36576" anchor="t">
+          <a:bodyPr wrap="square" lIns="36576" tIns="36576" rIns="36576" bIns="36576" anchor="t">
             <a:spAutoFit/>
           </a:bodyPr>
           <a:lstStyle/>
@@ -6571,6 +6630,7 @@
           <a:lstStyle/>
           <a:p>
             <a:pPr algn="ctr"/>
+            <a:endParaRPr/>
           </a:p>
         </p:txBody>
       </p:sp>
@@ -6614,6 +6674,7 @@
           <a:lstStyle/>
           <a:p>
             <a:pPr algn="ctr"/>
+            <a:endParaRPr/>
           </a:p>
         </p:txBody>
       </p:sp>
@@ -6634,7 +6695,7 @@
           <a:noFill/>
         </p:spPr>
         <p:txBody>
-          <a:bodyPr wrap="square" lIns="36576" rIns="36576" tIns="36576" bIns="36576" anchor="t">
+          <a:bodyPr wrap="square" lIns="36576" tIns="36576" rIns="36576" bIns="36576" anchor="t">
             <a:spAutoFit/>
           </a:bodyPr>
           <a:lstStyle/>
@@ -6669,7 +6730,7 @@
           <a:noFill/>
         </p:spPr>
         <p:txBody>
-          <a:bodyPr wrap="square" lIns="36576" rIns="36576" tIns="36576" bIns="36576" anchor="t">
+          <a:bodyPr wrap="square" lIns="36576" tIns="36576" rIns="36576" bIns="36576" anchor="t">
             <a:spAutoFit/>
           </a:bodyPr>
           <a:lstStyle/>
@@ -6704,7 +6765,7 @@
           <a:noFill/>
         </p:spPr>
         <p:txBody>
-          <a:bodyPr wrap="square" lIns="36576" rIns="36576" tIns="36576" bIns="36576" anchor="t">
+          <a:bodyPr wrap="square" lIns="36576" tIns="36576" rIns="36576" bIns="36576" anchor="t">
             <a:spAutoFit/>
           </a:bodyPr>
           <a:lstStyle/>
@@ -6739,7 +6800,7 @@
           <a:noFill/>
         </p:spPr>
         <p:txBody>
-          <a:bodyPr wrap="square" lIns="36576" rIns="36576" tIns="36576" bIns="36576" anchor="t">
+          <a:bodyPr wrap="square" lIns="36576" tIns="36576" rIns="36576" bIns="36576" anchor="t">
             <a:spAutoFit/>
           </a:bodyPr>
           <a:lstStyle/>
@@ -6766,7 +6827,7 @@
 </file>
 
 <file path=ppt/slides/slide15.xml><?xml version="1.0" encoding="utf-8"?>
-<p:sld xmlns:a="http://schemas.openxmlformats.org/drawingml/2006/main" xmlns:p="http://schemas.openxmlformats.org/presentationml/2006/main" xmlns:r="http://schemas.openxmlformats.org/officeDocument/2006/relationships">
+<p:sld xmlns:a="http://schemas.openxmlformats.org/drawingml/2006/main" xmlns:r="http://schemas.openxmlformats.org/officeDocument/2006/relationships" xmlns:p="http://schemas.openxmlformats.org/presentationml/2006/main">
   <p:cSld>
     <p:bg>
       <p:bgPr>
@@ -6782,7 +6843,14 @@
         <p:cNvGrpSpPr/>
         <p:nvPr/>
       </p:nvGrpSpPr>
-      <p:grpSpPr/>
+      <p:grpSpPr>
+        <a:xfrm>
+          <a:off x="0" y="0"/>
+          <a:ext cx="0" cy="0"/>
+          <a:chOff x="0" y="0"/>
+          <a:chExt cx="0" cy="0"/>
+        </a:xfrm>
+      </p:grpSpPr>
       <p:sp>
         <p:nvSpPr>
           <p:cNvPr id="2" name="TextBox 1"/>
@@ -6800,7 +6868,7 @@
           <a:noFill/>
         </p:spPr>
         <p:txBody>
-          <a:bodyPr wrap="square" lIns="36576" rIns="36576" tIns="36576" bIns="36576" anchor="t">
+          <a:bodyPr wrap="square" lIns="36576" tIns="36576" rIns="36576" bIns="36576" anchor="t">
             <a:spAutoFit/>
           </a:bodyPr>
           <a:lstStyle/>
@@ -6835,7 +6903,7 @@
           <a:noFill/>
         </p:spPr>
         <p:txBody>
-          <a:bodyPr wrap="square" lIns="36576" rIns="36576" tIns="36576" bIns="36576" anchor="t">
+          <a:bodyPr wrap="square" lIns="36576" tIns="36576" rIns="36576" bIns="36576" anchor="t">
             <a:spAutoFit/>
           </a:bodyPr>
           <a:lstStyle/>
@@ -6905,7 +6973,7 @@
           <a:noFill/>
         </p:spPr>
         <p:txBody>
-          <a:bodyPr wrap="square" lIns="36576" rIns="36576" tIns="36576" bIns="36576" anchor="t">
+          <a:bodyPr wrap="square" lIns="36576" tIns="36576" rIns="36576" bIns="36576" anchor="t">
             <a:spAutoFit/>
           </a:bodyPr>
           <a:lstStyle/>
@@ -6989,6 +7057,7 @@
           <a:lstStyle/>
           <a:p>
             <a:pPr algn="ctr"/>
+            <a:endParaRPr/>
           </a:p>
         </p:txBody>
       </p:sp>
@@ -7032,6 +7101,7 @@
           <a:lstStyle/>
           <a:p>
             <a:pPr algn="ctr"/>
+            <a:endParaRPr/>
           </a:p>
         </p:txBody>
       </p:sp>
@@ -7052,7 +7122,7 @@
           <a:noFill/>
         </p:spPr>
         <p:txBody>
-          <a:bodyPr wrap="square" lIns="36576" rIns="36576" tIns="36576" bIns="36576" anchor="t">
+          <a:bodyPr wrap="square" lIns="36576" tIns="36576" rIns="36576" bIns="36576" anchor="t">
             <a:spAutoFit/>
           </a:bodyPr>
           <a:lstStyle/>
@@ -7087,7 +7157,7 @@
           <a:noFill/>
         </p:spPr>
         <p:txBody>
-          <a:bodyPr wrap="square" lIns="36576" rIns="36576" tIns="36576" bIns="36576" anchor="t">
+          <a:bodyPr wrap="square" lIns="36576" tIns="36576" rIns="36576" bIns="36576" anchor="t">
             <a:spAutoFit/>
           </a:bodyPr>
           <a:lstStyle/>
@@ -7147,6 +7217,7 @@
           <a:lstStyle/>
           <a:p>
             <a:pPr algn="ctr"/>
+            <a:endParaRPr/>
           </a:p>
         </p:txBody>
       </p:sp>
@@ -7190,6 +7261,7 @@
           <a:lstStyle/>
           <a:p>
             <a:pPr algn="ctr"/>
+            <a:endParaRPr/>
           </a:p>
         </p:txBody>
       </p:sp>
@@ -7210,7 +7282,7 @@
           <a:noFill/>
         </p:spPr>
         <p:txBody>
-          <a:bodyPr wrap="square" lIns="36576" rIns="36576" tIns="36576" bIns="36576" anchor="t">
+          <a:bodyPr wrap="square" lIns="36576" tIns="36576" rIns="36576" bIns="36576" anchor="t">
             <a:spAutoFit/>
           </a:bodyPr>
           <a:lstStyle/>
@@ -7245,7 +7317,7 @@
           <a:noFill/>
         </p:spPr>
         <p:txBody>
-          <a:bodyPr wrap="square" lIns="36576" rIns="36576" tIns="36576" bIns="36576" anchor="t">
+          <a:bodyPr wrap="square" lIns="36576" tIns="36576" rIns="36576" bIns="36576" anchor="t">
             <a:spAutoFit/>
           </a:bodyPr>
           <a:lstStyle/>
@@ -7280,7 +7352,7 @@
           <a:noFill/>
         </p:spPr>
         <p:txBody>
-          <a:bodyPr wrap="square" lIns="36576" rIns="36576" tIns="36576" bIns="36576" anchor="t">
+          <a:bodyPr wrap="square" lIns="36576" tIns="36576" rIns="36576" bIns="36576" anchor="t">
             <a:spAutoFit/>
           </a:bodyPr>
           <a:lstStyle/>
@@ -7315,7 +7387,7 @@
           <a:noFill/>
         </p:spPr>
         <p:txBody>
-          <a:bodyPr wrap="square" lIns="36576" rIns="36576" tIns="36576" bIns="36576" anchor="t">
+          <a:bodyPr wrap="square" lIns="36576" tIns="36576" rIns="36576" bIns="36576" anchor="t">
             <a:spAutoFit/>
           </a:bodyPr>
           <a:lstStyle/>
@@ -7342,7 +7414,7 @@
 </file>
 
 <file path=ppt/slides/slide16.xml><?xml version="1.0" encoding="utf-8"?>
-<p:sld xmlns:a="http://schemas.openxmlformats.org/drawingml/2006/main" xmlns:p="http://schemas.openxmlformats.org/presentationml/2006/main" xmlns:r="http://schemas.openxmlformats.org/officeDocument/2006/relationships">
+<p:sld xmlns:a="http://schemas.openxmlformats.org/drawingml/2006/main" xmlns:r="http://schemas.openxmlformats.org/officeDocument/2006/relationships" xmlns:p="http://schemas.openxmlformats.org/presentationml/2006/main">
   <p:cSld>
     <p:bg>
       <p:bgPr>
@@ -7358,7 +7430,14 @@
         <p:cNvGrpSpPr/>
         <p:nvPr/>
       </p:nvGrpSpPr>
-      <p:grpSpPr/>
+      <p:grpSpPr>
+        <a:xfrm>
+          <a:off x="0" y="0"/>
+          <a:ext cx="0" cy="0"/>
+          <a:chOff x="0" y="0"/>
+          <a:chExt cx="0" cy="0"/>
+        </a:xfrm>
+      </p:grpSpPr>
       <p:sp>
         <p:nvSpPr>
           <p:cNvPr id="2" name="TextBox 1"/>
@@ -7376,7 +7455,7 @@
           <a:noFill/>
         </p:spPr>
         <p:txBody>
-          <a:bodyPr wrap="square" lIns="36576" rIns="36576" tIns="36576" bIns="36576" anchor="t">
+          <a:bodyPr wrap="square" lIns="36576" tIns="36576" rIns="36576" bIns="36576" anchor="t">
             <a:spAutoFit/>
           </a:bodyPr>
           <a:lstStyle/>
@@ -7411,14 +7490,14 @@
           <a:noFill/>
         </p:spPr>
         <p:txBody>
-          <a:bodyPr wrap="square" lIns="36576" rIns="36576" tIns="36576" bIns="36576" anchor="t">
+          <a:bodyPr wrap="square" lIns="36576" tIns="36576" rIns="36576" bIns="36576" anchor="t">
             <a:spAutoFit/>
           </a:bodyPr>
           <a:lstStyle/>
           <a:p>
             <a:pPr algn="l"/>
             <a:r>
-              <a:rPr sz="2400" b="1" i="0">
+              <a:rPr sz="2400" b="1" i="0" dirty="0">
                 <a:solidFill>
                   <a:srgbClr val="122B4A"/>
                 </a:solidFill>
@@ -7437,7 +7516,7 @@
         </p:nvCxnSpPr>
         <p:spPr>
           <a:xfrm>
-            <a:off x="502920" y="1069848"/>
+            <a:off x="504444" y="1378192"/>
             <a:ext cx="11183112" cy="0"/>
           </a:xfrm>
           <a:prstGeom prst="line">
@@ -7481,7 +7560,7 @@
           <a:noFill/>
         </p:spPr>
         <p:txBody>
-          <a:bodyPr wrap="square" lIns="36576" rIns="36576" tIns="36576" bIns="36576" anchor="t">
+          <a:bodyPr wrap="square" lIns="36576" tIns="36576" rIns="36576" bIns="36576" anchor="t">
             <a:spAutoFit/>
           </a:bodyPr>
           <a:lstStyle/>
@@ -7515,7 +7594,7 @@
         </p:blipFill>
         <p:spPr>
           <a:xfrm>
-            <a:off x="777240" y="1417320"/>
+            <a:off x="777240" y="1980846"/>
             <a:ext cx="5212080" cy="842554"/>
           </a:xfrm>
           <a:prstGeom prst="rect">
@@ -7531,7 +7610,7 @@
         </p:nvSpPr>
         <p:spPr>
           <a:xfrm>
-            <a:off x="777240" y="2606040"/>
+            <a:off x="777240" y="3169566"/>
             <a:ext cx="1828800" cy="274320"/>
           </a:xfrm>
           <a:prstGeom prst="rect">
@@ -7540,7 +7619,7 @@
           <a:noFill/>
         </p:spPr>
         <p:txBody>
-          <a:bodyPr wrap="square" lIns="36576" rIns="36576" tIns="36576" bIns="36576" anchor="t">
+          <a:bodyPr wrap="square" lIns="36576" tIns="36576" rIns="36576" bIns="36576" anchor="t">
             <a:spAutoFit/>
           </a:bodyPr>
           <a:lstStyle/>
@@ -7566,7 +7645,7 @@
         </p:nvSpPr>
         <p:spPr>
           <a:xfrm>
-            <a:off x="685800" y="3017520"/>
+            <a:off x="685800" y="3581046"/>
             <a:ext cx="2560320" cy="1554480"/>
           </a:xfrm>
           <a:prstGeom prst="roundRect">
@@ -7600,6 +7679,7 @@
           <a:lstStyle/>
           <a:p>
             <a:pPr algn="ctr"/>
+            <a:endParaRPr/>
           </a:p>
         </p:txBody>
       </p:sp>
@@ -7611,7 +7691,7 @@
         </p:nvSpPr>
         <p:spPr>
           <a:xfrm>
-            <a:off x="685800" y="3017520"/>
+            <a:off x="685800" y="3581046"/>
             <a:ext cx="50292" cy="1554480"/>
           </a:xfrm>
           <a:prstGeom prst="rect">
@@ -7643,6 +7723,7 @@
           <a:lstStyle/>
           <a:p>
             <a:pPr algn="ctr"/>
+            <a:endParaRPr/>
           </a:p>
         </p:txBody>
       </p:sp>
@@ -7654,7 +7735,7 @@
         </p:nvSpPr>
         <p:spPr>
           <a:xfrm>
-            <a:off x="832104" y="3127248"/>
+            <a:off x="832104" y="3690774"/>
             <a:ext cx="2331720" cy="292608"/>
           </a:xfrm>
           <a:prstGeom prst="rect">
@@ -7663,7 +7744,7 @@
           <a:noFill/>
         </p:spPr>
         <p:txBody>
-          <a:bodyPr wrap="square" lIns="36576" rIns="36576" tIns="36576" bIns="36576" anchor="t">
+          <a:bodyPr wrap="square" lIns="36576" tIns="36576" rIns="36576" bIns="36576" anchor="t">
             <a:spAutoFit/>
           </a:bodyPr>
           <a:lstStyle/>
@@ -7689,7 +7770,7 @@
         </p:nvSpPr>
         <p:spPr>
           <a:xfrm>
-            <a:off x="832104" y="3502152"/>
+            <a:off x="832104" y="4065678"/>
             <a:ext cx="2331720" cy="987552"/>
           </a:xfrm>
           <a:prstGeom prst="rect">
@@ -7698,7 +7779,7 @@
           <a:noFill/>
         </p:spPr>
         <p:txBody>
-          <a:bodyPr wrap="square" lIns="36576" rIns="36576" tIns="36576" bIns="36576" anchor="t">
+          <a:bodyPr wrap="square" lIns="36576" tIns="36576" rIns="36576" bIns="36576" anchor="t">
             <a:spAutoFit/>
           </a:bodyPr>
           <a:lstStyle/>
@@ -7724,7 +7805,7 @@
         </p:nvSpPr>
         <p:spPr>
           <a:xfrm>
-            <a:off x="3520440" y="3017520"/>
+            <a:off x="3520440" y="3581046"/>
             <a:ext cx="2560320" cy="1554480"/>
           </a:xfrm>
           <a:prstGeom prst="roundRect">
@@ -7758,6 +7839,7 @@
           <a:lstStyle/>
           <a:p>
             <a:pPr algn="ctr"/>
+            <a:endParaRPr/>
           </a:p>
         </p:txBody>
       </p:sp>
@@ -7769,7 +7851,7 @@
         </p:nvSpPr>
         <p:spPr>
           <a:xfrm>
-            <a:off x="3520440" y="3017520"/>
+            <a:off x="3520440" y="3581046"/>
             <a:ext cx="50292" cy="1554480"/>
           </a:xfrm>
           <a:prstGeom prst="rect">
@@ -7801,6 +7883,7 @@
           <a:lstStyle/>
           <a:p>
             <a:pPr algn="ctr"/>
+            <a:endParaRPr/>
           </a:p>
         </p:txBody>
       </p:sp>
@@ -7812,7 +7895,7 @@
         </p:nvSpPr>
         <p:spPr>
           <a:xfrm>
-            <a:off x="3666744" y="3127248"/>
+            <a:off x="3666744" y="3690774"/>
             <a:ext cx="2331720" cy="292608"/>
           </a:xfrm>
           <a:prstGeom prst="rect">
@@ -7821,7 +7904,7 @@
           <a:noFill/>
         </p:spPr>
         <p:txBody>
-          <a:bodyPr wrap="square" lIns="36576" rIns="36576" tIns="36576" bIns="36576" anchor="t">
+          <a:bodyPr wrap="square" lIns="36576" tIns="36576" rIns="36576" bIns="36576" anchor="t">
             <a:spAutoFit/>
           </a:bodyPr>
           <a:lstStyle/>
@@ -7847,7 +7930,7 @@
         </p:nvSpPr>
         <p:spPr>
           <a:xfrm>
-            <a:off x="3666744" y="3502152"/>
+            <a:off x="3666744" y="4065678"/>
             <a:ext cx="2331720" cy="987552"/>
           </a:xfrm>
           <a:prstGeom prst="rect">
@@ -7856,7 +7939,7 @@
           <a:noFill/>
         </p:spPr>
         <p:txBody>
-          <a:bodyPr wrap="square" lIns="36576" rIns="36576" tIns="36576" bIns="36576" anchor="t">
+          <a:bodyPr wrap="square" lIns="36576" tIns="36576" rIns="36576" bIns="36576" anchor="t">
             <a:spAutoFit/>
           </a:bodyPr>
           <a:lstStyle/>
@@ -7882,7 +7965,7 @@
         </p:nvSpPr>
         <p:spPr>
           <a:xfrm>
-            <a:off x="6355080" y="3017520"/>
+            <a:off x="6355080" y="3581046"/>
             <a:ext cx="2560320" cy="1554480"/>
           </a:xfrm>
           <a:prstGeom prst="roundRect">
@@ -7916,6 +7999,7 @@
           <a:lstStyle/>
           <a:p>
             <a:pPr algn="ctr"/>
+            <a:endParaRPr/>
           </a:p>
         </p:txBody>
       </p:sp>
@@ -7927,7 +8011,7 @@
         </p:nvSpPr>
         <p:spPr>
           <a:xfrm>
-            <a:off x="6355080" y="3017520"/>
+            <a:off x="6355080" y="3581046"/>
             <a:ext cx="50292" cy="1554480"/>
           </a:xfrm>
           <a:prstGeom prst="rect">
@@ -7959,6 +8043,7 @@
           <a:lstStyle/>
           <a:p>
             <a:pPr algn="ctr"/>
+            <a:endParaRPr/>
           </a:p>
         </p:txBody>
       </p:sp>
@@ -7970,7 +8055,7 @@
         </p:nvSpPr>
         <p:spPr>
           <a:xfrm>
-            <a:off x="6501384" y="3127248"/>
+            <a:off x="6501384" y="3690774"/>
             <a:ext cx="2331720" cy="292608"/>
           </a:xfrm>
           <a:prstGeom prst="rect">
@@ -7979,7 +8064,7 @@
           <a:noFill/>
         </p:spPr>
         <p:txBody>
-          <a:bodyPr wrap="square" lIns="36576" rIns="36576" tIns="36576" bIns="36576" anchor="t">
+          <a:bodyPr wrap="square" lIns="36576" tIns="36576" rIns="36576" bIns="36576" anchor="t">
             <a:spAutoFit/>
           </a:bodyPr>
           <a:lstStyle/>
@@ -8005,7 +8090,7 @@
         </p:nvSpPr>
         <p:spPr>
           <a:xfrm>
-            <a:off x="6501384" y="3502152"/>
+            <a:off x="6501384" y="4065678"/>
             <a:ext cx="2331720" cy="987552"/>
           </a:xfrm>
           <a:prstGeom prst="rect">
@@ -8014,7 +8099,7 @@
           <a:noFill/>
         </p:spPr>
         <p:txBody>
-          <a:bodyPr wrap="square" lIns="36576" rIns="36576" tIns="36576" bIns="36576" anchor="t">
+          <a:bodyPr wrap="square" lIns="36576" tIns="36576" rIns="36576" bIns="36576" anchor="t">
             <a:spAutoFit/>
           </a:bodyPr>
           <a:lstStyle/>
@@ -8040,7 +8125,7 @@
         </p:nvSpPr>
         <p:spPr>
           <a:xfrm>
-            <a:off x="9189720" y="3017520"/>
+            <a:off x="9189720" y="3581046"/>
             <a:ext cx="2560320" cy="1554480"/>
           </a:xfrm>
           <a:prstGeom prst="roundRect">
@@ -8074,6 +8159,7 @@
           <a:lstStyle/>
           <a:p>
             <a:pPr algn="ctr"/>
+            <a:endParaRPr/>
           </a:p>
         </p:txBody>
       </p:sp>
@@ -8085,7 +8171,7 @@
         </p:nvSpPr>
         <p:spPr>
           <a:xfrm>
-            <a:off x="9189720" y="3017520"/>
+            <a:off x="9189720" y="3581046"/>
             <a:ext cx="50292" cy="1554480"/>
           </a:xfrm>
           <a:prstGeom prst="rect">
@@ -8117,6 +8203,7 @@
           <a:lstStyle/>
           <a:p>
             <a:pPr algn="ctr"/>
+            <a:endParaRPr/>
           </a:p>
         </p:txBody>
       </p:sp>
@@ -8128,7 +8215,7 @@
         </p:nvSpPr>
         <p:spPr>
           <a:xfrm>
-            <a:off x="9336024" y="3127248"/>
+            <a:off x="9336024" y="3690774"/>
             <a:ext cx="2331720" cy="292608"/>
           </a:xfrm>
           <a:prstGeom prst="rect">
@@ -8137,7 +8224,7 @@
           <a:noFill/>
         </p:spPr>
         <p:txBody>
-          <a:bodyPr wrap="square" lIns="36576" rIns="36576" tIns="36576" bIns="36576" anchor="t">
+          <a:bodyPr wrap="square" lIns="36576" tIns="36576" rIns="36576" bIns="36576" anchor="t">
             <a:spAutoFit/>
           </a:bodyPr>
           <a:lstStyle/>
@@ -8163,7 +8250,7 @@
         </p:nvSpPr>
         <p:spPr>
           <a:xfrm>
-            <a:off x="9336024" y="3502152"/>
+            <a:off x="9336024" y="4065678"/>
             <a:ext cx="2331720" cy="987552"/>
           </a:xfrm>
           <a:prstGeom prst="rect">
@@ -8172,7 +8259,7 @@
           <a:noFill/>
         </p:spPr>
         <p:txBody>
-          <a:bodyPr wrap="square" lIns="36576" rIns="36576" tIns="36576" bIns="36576" anchor="t">
+          <a:bodyPr wrap="square" lIns="36576" tIns="36576" rIns="36576" bIns="36576" anchor="t">
             <a:spAutoFit/>
           </a:bodyPr>
           <a:lstStyle/>
@@ -8207,7 +8294,7 @@
           <a:noFill/>
         </p:spPr>
         <p:txBody>
-          <a:bodyPr wrap="square" lIns="36576" rIns="36576" tIns="36576" bIns="36576" anchor="t">
+          <a:bodyPr wrap="square" lIns="36576" tIns="36576" rIns="36576" bIns="36576" anchor="t">
             <a:spAutoFit/>
           </a:bodyPr>
           <a:lstStyle/>
@@ -8242,7 +8329,7 @@
           <a:noFill/>
         </p:spPr>
         <p:txBody>
-          <a:bodyPr wrap="square" lIns="36576" rIns="36576" tIns="36576" bIns="36576" anchor="t">
+          <a:bodyPr wrap="square" lIns="36576" tIns="36576" rIns="36576" bIns="36576" anchor="t">
             <a:spAutoFit/>
           </a:bodyPr>
           <a:lstStyle/>
@@ -8269,7 +8356,7 @@
 </file>
 
 <file path=ppt/slides/slide17.xml><?xml version="1.0" encoding="utf-8"?>
-<p:sld xmlns:a="http://schemas.openxmlformats.org/drawingml/2006/main" xmlns:p="http://schemas.openxmlformats.org/presentationml/2006/main" xmlns:r="http://schemas.openxmlformats.org/officeDocument/2006/relationships">
+<p:sld xmlns:a="http://schemas.openxmlformats.org/drawingml/2006/main" xmlns:r="http://schemas.openxmlformats.org/officeDocument/2006/relationships" xmlns:p="http://schemas.openxmlformats.org/presentationml/2006/main">
   <p:cSld>
     <p:bg>
       <p:bgPr>
@@ -8285,7 +8372,14 @@
         <p:cNvGrpSpPr/>
         <p:nvPr/>
       </p:nvGrpSpPr>
-      <p:grpSpPr/>
+      <p:grpSpPr>
+        <a:xfrm>
+          <a:off x="0" y="0"/>
+          <a:ext cx="0" cy="0"/>
+          <a:chOff x="0" y="0"/>
+          <a:chExt cx="0" cy="0"/>
+        </a:xfrm>
+      </p:grpSpPr>
       <p:sp>
         <p:nvSpPr>
           <p:cNvPr id="2" name="TextBox 1"/>
@@ -8303,7 +8397,7 @@
           <a:noFill/>
         </p:spPr>
         <p:txBody>
-          <a:bodyPr wrap="square" lIns="36576" rIns="36576" tIns="36576" bIns="36576" anchor="t">
+          <a:bodyPr wrap="square" lIns="36576" tIns="36576" rIns="36576" bIns="36576" anchor="t">
             <a:spAutoFit/>
           </a:bodyPr>
           <a:lstStyle/>
@@ -8338,7 +8432,7 @@
           <a:noFill/>
         </p:spPr>
         <p:txBody>
-          <a:bodyPr wrap="square" lIns="36576" rIns="36576" tIns="36576" bIns="36576" anchor="t">
+          <a:bodyPr wrap="square" lIns="36576" tIns="36576" rIns="36576" bIns="36576" anchor="t">
             <a:spAutoFit/>
           </a:bodyPr>
           <a:lstStyle/>
@@ -8408,7 +8502,7 @@
           <a:noFill/>
         </p:spPr>
         <p:txBody>
-          <a:bodyPr wrap="square" lIns="36576" rIns="36576" tIns="36576" bIns="36576" anchor="t">
+          <a:bodyPr wrap="square" lIns="36576" tIns="36576" rIns="36576" bIns="36576" anchor="t">
             <a:spAutoFit/>
           </a:bodyPr>
           <a:lstStyle/>
@@ -8516,6 +8610,7 @@
           <a:lstStyle/>
           <a:p>
             <a:pPr algn="ctr"/>
+            <a:endParaRPr/>
           </a:p>
         </p:txBody>
       </p:sp>
@@ -8559,6 +8654,7 @@
           <a:lstStyle/>
           <a:p>
             <a:pPr algn="ctr"/>
+            <a:endParaRPr/>
           </a:p>
         </p:txBody>
       </p:sp>
@@ -8579,7 +8675,7 @@
           <a:noFill/>
         </p:spPr>
         <p:txBody>
-          <a:bodyPr wrap="square" lIns="36576" rIns="36576" tIns="36576" bIns="36576" anchor="t">
+          <a:bodyPr wrap="square" lIns="36576" tIns="36576" rIns="36576" bIns="36576" anchor="t">
             <a:spAutoFit/>
           </a:bodyPr>
           <a:lstStyle/>
@@ -8614,7 +8710,7 @@
           <a:noFill/>
         </p:spPr>
         <p:txBody>
-          <a:bodyPr wrap="square" lIns="36576" rIns="36576" tIns="36576" bIns="36576" anchor="t">
+          <a:bodyPr wrap="square" lIns="36576" tIns="36576" rIns="36576" bIns="36576" anchor="t">
             <a:spAutoFit/>
           </a:bodyPr>
           <a:lstStyle/>
@@ -8674,6 +8770,7 @@
           <a:lstStyle/>
           <a:p>
             <a:pPr algn="ctr"/>
+            <a:endParaRPr/>
           </a:p>
         </p:txBody>
       </p:sp>
@@ -8717,6 +8814,7 @@
           <a:lstStyle/>
           <a:p>
             <a:pPr algn="ctr"/>
+            <a:endParaRPr/>
           </a:p>
         </p:txBody>
       </p:sp>
@@ -8737,7 +8835,7 @@
           <a:noFill/>
         </p:spPr>
         <p:txBody>
-          <a:bodyPr wrap="square" lIns="36576" rIns="36576" tIns="36576" bIns="36576" anchor="t">
+          <a:bodyPr wrap="square" lIns="36576" tIns="36576" rIns="36576" bIns="36576" anchor="t">
             <a:spAutoFit/>
           </a:bodyPr>
           <a:lstStyle/>
@@ -8772,7 +8870,7 @@
           <a:noFill/>
         </p:spPr>
         <p:txBody>
-          <a:bodyPr wrap="square" lIns="36576" rIns="36576" tIns="36576" bIns="36576" anchor="t">
+          <a:bodyPr wrap="square" lIns="36576" tIns="36576" rIns="36576" bIns="36576" anchor="t">
             <a:spAutoFit/>
           </a:bodyPr>
           <a:lstStyle/>
@@ -8807,7 +8905,7 @@
           <a:noFill/>
         </p:spPr>
         <p:txBody>
-          <a:bodyPr wrap="square" lIns="36576" rIns="36576" tIns="36576" bIns="36576" anchor="t">
+          <a:bodyPr wrap="square" lIns="36576" tIns="36576" rIns="36576" bIns="36576" anchor="t">
             <a:spAutoFit/>
           </a:bodyPr>
           <a:lstStyle/>
@@ -8842,7 +8940,7 @@
           <a:noFill/>
         </p:spPr>
         <p:txBody>
-          <a:bodyPr wrap="square" lIns="36576" rIns="36576" tIns="36576" bIns="36576" anchor="t">
+          <a:bodyPr wrap="square" lIns="36576" tIns="36576" rIns="36576" bIns="36576" anchor="t">
             <a:spAutoFit/>
           </a:bodyPr>
           <a:lstStyle/>
@@ -8869,7 +8967,7 @@
 </file>
 
 <file path=ppt/slides/slide18.xml><?xml version="1.0" encoding="utf-8"?>
-<p:sld xmlns:a="http://schemas.openxmlformats.org/drawingml/2006/main" xmlns:p="http://schemas.openxmlformats.org/presentationml/2006/main" xmlns:r="http://schemas.openxmlformats.org/officeDocument/2006/relationships">
+<p:sld xmlns:a="http://schemas.openxmlformats.org/drawingml/2006/main" xmlns:r="http://schemas.openxmlformats.org/officeDocument/2006/relationships" xmlns:p="http://schemas.openxmlformats.org/presentationml/2006/main">
   <p:cSld>
     <p:bg>
       <p:bgPr>
@@ -8885,7 +8983,14 @@
         <p:cNvGrpSpPr/>
         <p:nvPr/>
       </p:nvGrpSpPr>
-      <p:grpSpPr/>
+      <p:grpSpPr>
+        <a:xfrm>
+          <a:off x="0" y="0"/>
+          <a:ext cx="0" cy="0"/>
+          <a:chOff x="0" y="0"/>
+          <a:chExt cx="0" cy="0"/>
+        </a:xfrm>
+      </p:grpSpPr>
       <p:sp>
         <p:nvSpPr>
           <p:cNvPr id="2" name="TextBox 1"/>
@@ -8903,7 +9008,7 @@
           <a:noFill/>
         </p:spPr>
         <p:txBody>
-          <a:bodyPr wrap="square" lIns="36576" rIns="36576" tIns="36576" bIns="36576" anchor="t">
+          <a:bodyPr wrap="square" lIns="36576" tIns="36576" rIns="36576" bIns="36576" anchor="t">
             <a:spAutoFit/>
           </a:bodyPr>
           <a:lstStyle/>
@@ -8938,7 +9043,7 @@
           <a:noFill/>
         </p:spPr>
         <p:txBody>
-          <a:bodyPr wrap="square" lIns="36576" rIns="36576" tIns="36576" bIns="36576" anchor="t">
+          <a:bodyPr wrap="square" lIns="36576" tIns="36576" rIns="36576" bIns="36576" anchor="t">
             <a:spAutoFit/>
           </a:bodyPr>
           <a:lstStyle/>
@@ -9008,7 +9113,7 @@
           <a:noFill/>
         </p:spPr>
         <p:txBody>
-          <a:bodyPr wrap="square" lIns="36576" rIns="36576" tIns="36576" bIns="36576" anchor="t">
+          <a:bodyPr wrap="square" lIns="36576" tIns="36576" rIns="36576" bIns="36576" anchor="t">
             <a:spAutoFit/>
           </a:bodyPr>
           <a:lstStyle/>
@@ -9068,6 +9173,7 @@
           <a:lstStyle/>
           <a:p>
             <a:pPr algn="ctr"/>
+            <a:endParaRPr/>
           </a:p>
         </p:txBody>
       </p:sp>
@@ -9111,6 +9217,7 @@
           <a:lstStyle/>
           <a:p>
             <a:pPr algn="ctr"/>
+            <a:endParaRPr/>
           </a:p>
         </p:txBody>
       </p:sp>
@@ -9131,7 +9238,7 @@
           <a:noFill/>
         </p:spPr>
         <p:txBody>
-          <a:bodyPr wrap="square" lIns="36576" rIns="36576" tIns="36576" bIns="36576" anchor="t">
+          <a:bodyPr wrap="square" lIns="36576" tIns="36576" rIns="36576" bIns="36576" anchor="t">
             <a:spAutoFit/>
           </a:bodyPr>
           <a:lstStyle/>
@@ -9166,7 +9273,7 @@
           <a:noFill/>
         </p:spPr>
         <p:txBody>
-          <a:bodyPr wrap="square" lIns="36576" rIns="36576" tIns="36576" bIns="36576" anchor="t">
+          <a:bodyPr wrap="square" lIns="36576" tIns="36576" rIns="36576" bIns="36576" anchor="t">
             <a:spAutoFit/>
           </a:bodyPr>
           <a:lstStyle/>
@@ -9201,7 +9308,7 @@
           <a:noFill/>
         </p:spPr>
         <p:txBody>
-          <a:bodyPr wrap="square" lIns="36576" rIns="36576" tIns="36576" bIns="36576" anchor="t">
+          <a:bodyPr wrap="square" lIns="36576" tIns="36576" rIns="36576" bIns="36576" anchor="t">
             <a:spAutoFit/>
           </a:bodyPr>
           <a:lstStyle/>
@@ -9261,6 +9368,7 @@
           <a:lstStyle/>
           <a:p>
             <a:pPr algn="ctr"/>
+            <a:endParaRPr/>
           </a:p>
         </p:txBody>
       </p:sp>
@@ -9304,6 +9412,7 @@
           <a:lstStyle/>
           <a:p>
             <a:pPr algn="ctr"/>
+            <a:endParaRPr/>
           </a:p>
         </p:txBody>
       </p:sp>
@@ -9324,7 +9433,7 @@
           <a:noFill/>
         </p:spPr>
         <p:txBody>
-          <a:bodyPr wrap="square" lIns="36576" rIns="36576" tIns="36576" bIns="36576" anchor="t">
+          <a:bodyPr wrap="square" lIns="36576" tIns="36576" rIns="36576" bIns="36576" anchor="t">
             <a:spAutoFit/>
           </a:bodyPr>
           <a:lstStyle/>
@@ -9359,7 +9468,7 @@
           <a:noFill/>
         </p:spPr>
         <p:txBody>
-          <a:bodyPr wrap="square" lIns="36576" rIns="36576" tIns="36576" bIns="36576" anchor="t">
+          <a:bodyPr wrap="square" lIns="36576" tIns="36576" rIns="36576" bIns="36576" anchor="t">
             <a:spAutoFit/>
           </a:bodyPr>
           <a:lstStyle/>
@@ -9394,7 +9503,7 @@
           <a:noFill/>
         </p:spPr>
         <p:txBody>
-          <a:bodyPr wrap="square" lIns="36576" rIns="36576" tIns="36576" bIns="36576" anchor="t">
+          <a:bodyPr wrap="square" lIns="36576" tIns="36576" rIns="36576" bIns="36576" anchor="t">
             <a:spAutoFit/>
           </a:bodyPr>
           <a:lstStyle/>
@@ -9454,6 +9563,7 @@
           <a:lstStyle/>
           <a:p>
             <a:pPr algn="ctr"/>
+            <a:endParaRPr/>
           </a:p>
         </p:txBody>
       </p:sp>
@@ -9497,6 +9607,7 @@
           <a:lstStyle/>
           <a:p>
             <a:pPr algn="ctr"/>
+            <a:endParaRPr/>
           </a:p>
         </p:txBody>
       </p:sp>
@@ -9517,7 +9628,7 @@
           <a:noFill/>
         </p:spPr>
         <p:txBody>
-          <a:bodyPr wrap="square" lIns="36576" rIns="36576" tIns="36576" bIns="36576" anchor="t">
+          <a:bodyPr wrap="square" lIns="36576" tIns="36576" rIns="36576" bIns="36576" anchor="t">
             <a:spAutoFit/>
           </a:bodyPr>
           <a:lstStyle/>
@@ -9552,7 +9663,7 @@
           <a:noFill/>
         </p:spPr>
         <p:txBody>
-          <a:bodyPr wrap="square" lIns="36576" rIns="36576" tIns="36576" bIns="36576" anchor="t">
+          <a:bodyPr wrap="square" lIns="36576" tIns="36576" rIns="36576" bIns="36576" anchor="t">
             <a:spAutoFit/>
           </a:bodyPr>
           <a:lstStyle/>
@@ -9587,7 +9698,7 @@
           <a:noFill/>
         </p:spPr>
         <p:txBody>
-          <a:bodyPr wrap="square" lIns="36576" rIns="36576" tIns="36576" bIns="36576" anchor="t">
+          <a:bodyPr wrap="square" lIns="36576" tIns="36576" rIns="36576" bIns="36576" anchor="t">
             <a:spAutoFit/>
           </a:bodyPr>
           <a:lstStyle/>
@@ -9647,6 +9758,7 @@
           <a:lstStyle/>
           <a:p>
             <a:pPr algn="ctr"/>
+            <a:endParaRPr/>
           </a:p>
         </p:txBody>
       </p:sp>
@@ -9690,6 +9802,7 @@
           <a:lstStyle/>
           <a:p>
             <a:pPr algn="ctr"/>
+            <a:endParaRPr/>
           </a:p>
         </p:txBody>
       </p:sp>
@@ -9710,7 +9823,7 @@
           <a:noFill/>
         </p:spPr>
         <p:txBody>
-          <a:bodyPr wrap="square" lIns="36576" rIns="36576" tIns="36576" bIns="36576" anchor="t">
+          <a:bodyPr wrap="square" lIns="36576" tIns="36576" rIns="36576" bIns="36576" anchor="t">
             <a:spAutoFit/>
           </a:bodyPr>
           <a:lstStyle/>
@@ -9745,7 +9858,7 @@
           <a:noFill/>
         </p:spPr>
         <p:txBody>
-          <a:bodyPr wrap="square" lIns="36576" rIns="36576" tIns="36576" bIns="36576" anchor="t">
+          <a:bodyPr wrap="square" lIns="36576" tIns="36576" rIns="36576" bIns="36576" anchor="t">
             <a:spAutoFit/>
           </a:bodyPr>
           <a:lstStyle/>
@@ -9780,7 +9893,7 @@
           <a:noFill/>
         </p:spPr>
         <p:txBody>
-          <a:bodyPr wrap="square" lIns="36576" rIns="36576" tIns="36576" bIns="36576" anchor="t">
+          <a:bodyPr wrap="square" lIns="36576" tIns="36576" rIns="36576" bIns="36576" anchor="t">
             <a:spAutoFit/>
           </a:bodyPr>
           <a:lstStyle/>
@@ -9840,6 +9953,7 @@
           <a:lstStyle/>
           <a:p>
             <a:pPr algn="ctr"/>
+            <a:endParaRPr/>
           </a:p>
         </p:txBody>
       </p:sp>
@@ -9883,6 +9997,7 @@
           <a:lstStyle/>
           <a:p>
             <a:pPr algn="ctr"/>
+            <a:endParaRPr/>
           </a:p>
         </p:txBody>
       </p:sp>
@@ -9903,7 +10018,7 @@
           <a:noFill/>
         </p:spPr>
         <p:txBody>
-          <a:bodyPr wrap="square" lIns="36576" rIns="36576" tIns="36576" bIns="36576" anchor="t">
+          <a:bodyPr wrap="square" lIns="36576" tIns="36576" rIns="36576" bIns="36576" anchor="t">
             <a:spAutoFit/>
           </a:bodyPr>
           <a:lstStyle/>
@@ -9938,7 +10053,7 @@
           <a:noFill/>
         </p:spPr>
         <p:txBody>
-          <a:bodyPr wrap="square" lIns="36576" rIns="36576" tIns="36576" bIns="36576" anchor="t">
+          <a:bodyPr wrap="square" lIns="36576" tIns="36576" rIns="36576" bIns="36576" anchor="t">
             <a:spAutoFit/>
           </a:bodyPr>
           <a:lstStyle/>
@@ -9973,7 +10088,7 @@
           <a:noFill/>
         </p:spPr>
         <p:txBody>
-          <a:bodyPr wrap="square" lIns="36576" rIns="36576" tIns="36576" bIns="36576" anchor="t">
+          <a:bodyPr wrap="square" lIns="36576" tIns="36576" rIns="36576" bIns="36576" anchor="t">
             <a:spAutoFit/>
           </a:bodyPr>
           <a:lstStyle/>
@@ -10008,7 +10123,7 @@
           <a:noFill/>
         </p:spPr>
         <p:txBody>
-          <a:bodyPr wrap="square" lIns="36576" rIns="36576" tIns="36576" bIns="36576" anchor="t">
+          <a:bodyPr wrap="square" lIns="36576" tIns="36576" rIns="36576" bIns="36576" anchor="t">
             <a:spAutoFit/>
           </a:bodyPr>
           <a:lstStyle/>
@@ -10043,7 +10158,7 @@
           <a:noFill/>
         </p:spPr>
         <p:txBody>
-          <a:bodyPr wrap="square" lIns="36576" rIns="36576" tIns="36576" bIns="36576" anchor="t">
+          <a:bodyPr wrap="square" lIns="36576" tIns="36576" rIns="36576" bIns="36576" anchor="t">
             <a:spAutoFit/>
           </a:bodyPr>
           <a:lstStyle/>
@@ -10070,7 +10185,7 @@
 </file>
 
 <file path=ppt/slides/slide19.xml><?xml version="1.0" encoding="utf-8"?>
-<p:sld xmlns:a="http://schemas.openxmlformats.org/drawingml/2006/main" xmlns:p="http://schemas.openxmlformats.org/presentationml/2006/main" xmlns:r="http://schemas.openxmlformats.org/officeDocument/2006/relationships">
+<p:sld xmlns:a="http://schemas.openxmlformats.org/drawingml/2006/main" xmlns:r="http://schemas.openxmlformats.org/officeDocument/2006/relationships" xmlns:p="http://schemas.openxmlformats.org/presentationml/2006/main">
   <p:cSld>
     <p:bg>
       <p:bgPr>
@@ -10086,7 +10201,14 @@
         <p:cNvGrpSpPr/>
         <p:nvPr/>
       </p:nvGrpSpPr>
-      <p:grpSpPr/>
+      <p:grpSpPr>
+        <a:xfrm>
+          <a:off x="0" y="0"/>
+          <a:ext cx="0" cy="0"/>
+          <a:chOff x="0" y="0"/>
+          <a:chExt cx="0" cy="0"/>
+        </a:xfrm>
+      </p:grpSpPr>
       <p:sp>
         <p:nvSpPr>
           <p:cNvPr id="2" name="TextBox 1"/>
@@ -10104,7 +10226,7 @@
           <a:noFill/>
         </p:spPr>
         <p:txBody>
-          <a:bodyPr wrap="square" lIns="36576" rIns="36576" tIns="36576" bIns="36576" anchor="t">
+          <a:bodyPr wrap="square" lIns="36576" tIns="36576" rIns="36576" bIns="36576" anchor="t">
             <a:spAutoFit/>
           </a:bodyPr>
           <a:lstStyle/>
@@ -10139,7 +10261,7 @@
           <a:noFill/>
         </p:spPr>
         <p:txBody>
-          <a:bodyPr wrap="square" lIns="36576" rIns="36576" tIns="36576" bIns="36576" anchor="t">
+          <a:bodyPr wrap="square" lIns="36576" tIns="36576" rIns="36576" bIns="36576" anchor="t">
             <a:spAutoFit/>
           </a:bodyPr>
           <a:lstStyle/>
@@ -10209,7 +10331,7 @@
           <a:noFill/>
         </p:spPr>
         <p:txBody>
-          <a:bodyPr wrap="square" lIns="36576" rIns="36576" tIns="36576" bIns="36576" anchor="t">
+          <a:bodyPr wrap="square" lIns="36576" tIns="36576" rIns="36576" bIns="36576" anchor="t">
             <a:spAutoFit/>
           </a:bodyPr>
           <a:lstStyle/>
@@ -10269,6 +10391,7 @@
           <a:lstStyle/>
           <a:p>
             <a:pPr algn="ctr"/>
+            <a:endParaRPr/>
           </a:p>
         </p:txBody>
       </p:sp>
@@ -10353,6 +10476,7 @@
           <a:lstStyle/>
           <a:p>
             <a:pPr algn="ctr"/>
+            <a:endParaRPr/>
           </a:p>
         </p:txBody>
       </p:sp>
@@ -10396,6 +10520,7 @@
           <a:lstStyle/>
           <a:p>
             <a:pPr algn="ctr"/>
+            <a:endParaRPr/>
           </a:p>
         </p:txBody>
       </p:sp>
@@ -10416,7 +10541,7 @@
           <a:noFill/>
         </p:spPr>
         <p:txBody>
-          <a:bodyPr wrap="square" lIns="36576" rIns="36576" tIns="36576" bIns="36576" anchor="t">
+          <a:bodyPr wrap="square" lIns="36576" tIns="36576" rIns="36576" bIns="36576" anchor="t">
             <a:spAutoFit/>
           </a:bodyPr>
           <a:lstStyle/>
@@ -10451,7 +10576,7 @@
           <a:noFill/>
         </p:spPr>
         <p:txBody>
-          <a:bodyPr wrap="square" lIns="36576" rIns="36576" tIns="36576" bIns="36576" anchor="t">
+          <a:bodyPr wrap="square" lIns="36576" tIns="36576" rIns="36576" bIns="36576" anchor="t">
             <a:spAutoFit/>
           </a:bodyPr>
           <a:lstStyle/>
@@ -10511,6 +10636,7 @@
           <a:lstStyle/>
           <a:p>
             <a:pPr algn="ctr"/>
+            <a:endParaRPr/>
           </a:p>
         </p:txBody>
       </p:sp>
@@ -10554,6 +10680,7 @@
           <a:lstStyle/>
           <a:p>
             <a:pPr algn="ctr"/>
+            <a:endParaRPr/>
           </a:p>
         </p:txBody>
       </p:sp>
@@ -10574,7 +10701,7 @@
           <a:noFill/>
         </p:spPr>
         <p:txBody>
-          <a:bodyPr wrap="square" lIns="36576" rIns="36576" tIns="36576" bIns="36576" anchor="t">
+          <a:bodyPr wrap="square" lIns="36576" tIns="36576" rIns="36576" bIns="36576" anchor="t">
             <a:spAutoFit/>
           </a:bodyPr>
           <a:lstStyle/>
@@ -10609,7 +10736,7 @@
           <a:noFill/>
         </p:spPr>
         <p:txBody>
-          <a:bodyPr wrap="square" lIns="36576" rIns="36576" tIns="36576" bIns="36576" anchor="t">
+          <a:bodyPr wrap="square" lIns="36576" tIns="36576" rIns="36576" bIns="36576" anchor="t">
             <a:spAutoFit/>
           </a:bodyPr>
           <a:lstStyle/>
@@ -10644,7 +10771,7 @@
           <a:noFill/>
         </p:spPr>
         <p:txBody>
-          <a:bodyPr wrap="square" lIns="36576" rIns="36576" tIns="36576" bIns="36576" anchor="t">
+          <a:bodyPr wrap="square" lIns="36576" tIns="36576" rIns="36576" bIns="36576" anchor="t">
             <a:spAutoFit/>
           </a:bodyPr>
           <a:lstStyle/>
@@ -10679,7 +10806,7 @@
           <a:noFill/>
         </p:spPr>
         <p:txBody>
-          <a:bodyPr wrap="square" lIns="36576" rIns="36576" tIns="36576" bIns="36576" anchor="t">
+          <a:bodyPr wrap="square" lIns="36576" tIns="36576" rIns="36576" bIns="36576" anchor="t">
             <a:spAutoFit/>
           </a:bodyPr>
           <a:lstStyle/>
@@ -10706,7 +10833,7 @@
 </file>
 
 <file path=ppt/slides/slide2.xml><?xml version="1.0" encoding="utf-8"?>
-<p:sld xmlns:a="http://schemas.openxmlformats.org/drawingml/2006/main" xmlns:p="http://schemas.openxmlformats.org/presentationml/2006/main" xmlns:r="http://schemas.openxmlformats.org/officeDocument/2006/relationships">
+<p:sld xmlns:a="http://schemas.openxmlformats.org/drawingml/2006/main" xmlns:r="http://schemas.openxmlformats.org/officeDocument/2006/relationships" xmlns:p="http://schemas.openxmlformats.org/presentationml/2006/main">
   <p:cSld>
     <p:bg>
       <p:bgPr>
@@ -10722,7 +10849,14 @@
         <p:cNvGrpSpPr/>
         <p:nvPr/>
       </p:nvGrpSpPr>
-      <p:grpSpPr/>
+      <p:grpSpPr>
+        <a:xfrm>
+          <a:off x="0" y="0"/>
+          <a:ext cx="0" cy="0"/>
+          <a:chOff x="0" y="0"/>
+          <a:chExt cx="0" cy="0"/>
+        </a:xfrm>
+      </p:grpSpPr>
       <p:sp>
         <p:nvSpPr>
           <p:cNvPr id="2" name="TextBox 1"/>
@@ -10740,7 +10874,7 @@
           <a:noFill/>
         </p:spPr>
         <p:txBody>
-          <a:bodyPr wrap="square" lIns="36576" rIns="36576" tIns="36576" bIns="36576" anchor="t">
+          <a:bodyPr wrap="square" lIns="36576" tIns="36576" rIns="36576" bIns="36576" anchor="t">
             <a:spAutoFit/>
           </a:bodyPr>
           <a:lstStyle/>
@@ -10775,7 +10909,7 @@
           <a:noFill/>
         </p:spPr>
         <p:txBody>
-          <a:bodyPr wrap="square" lIns="36576" rIns="36576" tIns="36576" bIns="36576" anchor="t">
+          <a:bodyPr wrap="square" lIns="36576" tIns="36576" rIns="36576" bIns="36576" anchor="t">
             <a:spAutoFit/>
           </a:bodyPr>
           <a:lstStyle/>
@@ -10845,7 +10979,7 @@
           <a:noFill/>
         </p:spPr>
         <p:txBody>
-          <a:bodyPr wrap="square" lIns="36576" rIns="36576" tIns="36576" bIns="36576" anchor="t">
+          <a:bodyPr wrap="square" lIns="36576" tIns="36576" rIns="36576" bIns="36576" anchor="t">
             <a:spAutoFit/>
           </a:bodyPr>
           <a:lstStyle/>
@@ -10905,6 +11039,7 @@
           <a:lstStyle/>
           <a:p>
             <a:pPr algn="ctr"/>
+            <a:endParaRPr/>
           </a:p>
         </p:txBody>
       </p:sp>
@@ -10948,6 +11083,7 @@
           <a:lstStyle/>
           <a:p>
             <a:pPr algn="ctr"/>
+            <a:endParaRPr/>
           </a:p>
         </p:txBody>
       </p:sp>
@@ -10968,7 +11104,7 @@
           <a:noFill/>
         </p:spPr>
         <p:txBody>
-          <a:bodyPr wrap="square" lIns="36576" rIns="36576" tIns="36576" bIns="36576" anchor="t">
+          <a:bodyPr wrap="square" lIns="36576" tIns="36576" rIns="36576" bIns="36576" anchor="t">
             <a:spAutoFit/>
           </a:bodyPr>
           <a:lstStyle/>
@@ -11003,7 +11139,7 @@
           <a:noFill/>
         </p:spPr>
         <p:txBody>
-          <a:bodyPr wrap="square" lIns="36576" rIns="36576" tIns="36576" bIns="36576" anchor="t">
+          <a:bodyPr wrap="square" lIns="36576" tIns="36576" rIns="36576" bIns="36576" anchor="t">
             <a:spAutoFit/>
           </a:bodyPr>
           <a:lstStyle/>
@@ -11063,6 +11199,7 @@
           <a:lstStyle/>
           <a:p>
             <a:pPr algn="ctr"/>
+            <a:endParaRPr/>
           </a:p>
         </p:txBody>
       </p:sp>
@@ -11106,6 +11243,7 @@
           <a:lstStyle/>
           <a:p>
             <a:pPr algn="ctr"/>
+            <a:endParaRPr/>
           </a:p>
         </p:txBody>
       </p:sp>
@@ -11126,7 +11264,7 @@
           <a:noFill/>
         </p:spPr>
         <p:txBody>
-          <a:bodyPr wrap="square" lIns="36576" rIns="36576" tIns="36576" bIns="36576" anchor="t">
+          <a:bodyPr wrap="square" lIns="36576" tIns="36576" rIns="36576" bIns="36576" anchor="t">
             <a:spAutoFit/>
           </a:bodyPr>
           <a:lstStyle/>
@@ -11161,7 +11299,7 @@
           <a:noFill/>
         </p:spPr>
         <p:txBody>
-          <a:bodyPr wrap="square" lIns="36576" rIns="36576" tIns="36576" bIns="36576" anchor="t">
+          <a:bodyPr wrap="square" lIns="36576" tIns="36576" rIns="36576" bIns="36576" anchor="t">
             <a:spAutoFit/>
           </a:bodyPr>
           <a:lstStyle/>
@@ -11221,6 +11359,7 @@
           <a:lstStyle/>
           <a:p>
             <a:pPr algn="ctr"/>
+            <a:endParaRPr/>
           </a:p>
         </p:txBody>
       </p:sp>
@@ -11264,6 +11403,7 @@
           <a:lstStyle/>
           <a:p>
             <a:pPr algn="ctr"/>
+            <a:endParaRPr/>
           </a:p>
         </p:txBody>
       </p:sp>
@@ -11284,7 +11424,7 @@
           <a:noFill/>
         </p:spPr>
         <p:txBody>
-          <a:bodyPr wrap="square" lIns="36576" rIns="36576" tIns="36576" bIns="36576" anchor="t">
+          <a:bodyPr wrap="square" lIns="36576" tIns="36576" rIns="36576" bIns="36576" anchor="t">
             <a:spAutoFit/>
           </a:bodyPr>
           <a:lstStyle/>
@@ -11319,7 +11459,7 @@
           <a:noFill/>
         </p:spPr>
         <p:txBody>
-          <a:bodyPr wrap="square" lIns="36576" rIns="36576" tIns="36576" bIns="36576" anchor="t">
+          <a:bodyPr wrap="square" lIns="36576" tIns="36576" rIns="36576" bIns="36576" anchor="t">
             <a:spAutoFit/>
           </a:bodyPr>
           <a:lstStyle/>
@@ -11379,6 +11519,7 @@
           <a:lstStyle/>
           <a:p>
             <a:pPr algn="ctr"/>
+            <a:endParaRPr/>
           </a:p>
         </p:txBody>
       </p:sp>
@@ -11422,6 +11563,7 @@
           <a:lstStyle/>
           <a:p>
             <a:pPr algn="ctr"/>
+            <a:endParaRPr/>
           </a:p>
         </p:txBody>
       </p:sp>
@@ -11442,7 +11584,7 @@
           <a:noFill/>
         </p:spPr>
         <p:txBody>
-          <a:bodyPr wrap="square" lIns="36576" rIns="36576" tIns="36576" bIns="36576" anchor="t">
+          <a:bodyPr wrap="square" lIns="36576" tIns="36576" rIns="36576" bIns="36576" anchor="t">
             <a:spAutoFit/>
           </a:bodyPr>
           <a:lstStyle/>
@@ -11477,7 +11619,7 @@
           <a:noFill/>
         </p:spPr>
         <p:txBody>
-          <a:bodyPr wrap="square" lIns="36576" rIns="36576" tIns="36576" bIns="36576" anchor="t">
+          <a:bodyPr wrap="square" lIns="36576" tIns="36576" rIns="36576" bIns="36576" anchor="t">
             <a:spAutoFit/>
           </a:bodyPr>
           <a:lstStyle/>
@@ -11512,7 +11654,7 @@
           <a:noFill/>
         </p:spPr>
         <p:txBody>
-          <a:bodyPr wrap="square" lIns="36576" rIns="36576" tIns="36576" bIns="36576" anchor="t">
+          <a:bodyPr wrap="square" lIns="36576" tIns="36576" rIns="36576" bIns="36576" anchor="t">
             <a:spAutoFit/>
           </a:bodyPr>
           <a:lstStyle/>
@@ -11547,7 +11689,7 @@
           <a:noFill/>
         </p:spPr>
         <p:txBody>
-          <a:bodyPr wrap="square" lIns="36576" rIns="36576" tIns="36576" bIns="36576" anchor="t">
+          <a:bodyPr wrap="square" lIns="36576" tIns="36576" rIns="36576" bIns="36576" anchor="t">
             <a:spAutoFit/>
           </a:bodyPr>
           <a:lstStyle/>
@@ -11582,7 +11724,7 @@
           <a:noFill/>
         </p:spPr>
         <p:txBody>
-          <a:bodyPr wrap="square" lIns="36576" rIns="36576" tIns="36576" bIns="36576" anchor="t">
+          <a:bodyPr wrap="square" lIns="36576" tIns="36576" rIns="36576" bIns="36576" anchor="t">
             <a:spAutoFit/>
           </a:bodyPr>
           <a:lstStyle/>
@@ -11617,7 +11759,7 @@
           <a:noFill/>
         </p:spPr>
         <p:txBody>
-          <a:bodyPr wrap="square" lIns="36576" rIns="36576" tIns="36576" bIns="36576" anchor="t">
+          <a:bodyPr wrap="square" lIns="36576" tIns="36576" rIns="36576" bIns="36576" anchor="t">
             <a:spAutoFit/>
           </a:bodyPr>
           <a:lstStyle/>
@@ -11644,7 +11786,7 @@
 </file>
 
 <file path=ppt/slides/slide20.xml><?xml version="1.0" encoding="utf-8"?>
-<p:sld xmlns:a="http://schemas.openxmlformats.org/drawingml/2006/main" xmlns:p="http://schemas.openxmlformats.org/presentationml/2006/main" xmlns:r="http://schemas.openxmlformats.org/officeDocument/2006/relationships">
+<p:sld xmlns:a="http://schemas.openxmlformats.org/drawingml/2006/main" xmlns:r="http://schemas.openxmlformats.org/officeDocument/2006/relationships" xmlns:p="http://schemas.openxmlformats.org/presentationml/2006/main">
   <p:cSld>
     <p:bg>
       <p:bgPr>
@@ -11660,7 +11802,14 @@
         <p:cNvGrpSpPr/>
         <p:nvPr/>
       </p:nvGrpSpPr>
-      <p:grpSpPr/>
+      <p:grpSpPr>
+        <a:xfrm>
+          <a:off x="0" y="0"/>
+          <a:ext cx="0" cy="0"/>
+          <a:chOff x="0" y="0"/>
+          <a:chExt cx="0" cy="0"/>
+        </a:xfrm>
+      </p:grpSpPr>
       <p:sp>
         <p:nvSpPr>
           <p:cNvPr id="2" name="TextBox 1"/>
@@ -11678,7 +11827,7 @@
           <a:noFill/>
         </p:spPr>
         <p:txBody>
-          <a:bodyPr wrap="square" lIns="36576" rIns="36576" tIns="36576" bIns="36576" anchor="t">
+          <a:bodyPr wrap="square" lIns="36576" tIns="36576" rIns="36576" bIns="36576" anchor="t">
             <a:spAutoFit/>
           </a:bodyPr>
           <a:lstStyle/>
@@ -11713,7 +11862,7 @@
           <a:noFill/>
         </p:spPr>
         <p:txBody>
-          <a:bodyPr wrap="square" lIns="36576" rIns="36576" tIns="36576" bIns="36576" anchor="t">
+          <a:bodyPr wrap="square" lIns="36576" tIns="36576" rIns="36576" bIns="36576" anchor="t">
             <a:spAutoFit/>
           </a:bodyPr>
           <a:lstStyle/>
@@ -11783,7 +11932,7 @@
           <a:noFill/>
         </p:spPr>
         <p:txBody>
-          <a:bodyPr wrap="square" lIns="36576" rIns="36576" tIns="36576" bIns="36576" anchor="t">
+          <a:bodyPr wrap="square" lIns="36576" tIns="36576" rIns="36576" bIns="36576" anchor="t">
             <a:spAutoFit/>
           </a:bodyPr>
           <a:lstStyle/>
@@ -11867,6 +12016,7 @@
           <a:lstStyle/>
           <a:p>
             <a:pPr algn="ctr"/>
+            <a:endParaRPr/>
           </a:p>
         </p:txBody>
       </p:sp>
@@ -11910,6 +12060,7 @@
           <a:lstStyle/>
           <a:p>
             <a:pPr algn="ctr"/>
+            <a:endParaRPr/>
           </a:p>
         </p:txBody>
       </p:sp>
@@ -11930,7 +12081,7 @@
           <a:noFill/>
         </p:spPr>
         <p:txBody>
-          <a:bodyPr wrap="square" lIns="36576" rIns="36576" tIns="36576" bIns="36576" anchor="t">
+          <a:bodyPr wrap="square" lIns="36576" tIns="36576" rIns="36576" bIns="36576" anchor="t">
             <a:spAutoFit/>
           </a:bodyPr>
           <a:lstStyle/>
@@ -11965,7 +12116,7 @@
           <a:noFill/>
         </p:spPr>
         <p:txBody>
-          <a:bodyPr wrap="square" lIns="36576" rIns="36576" tIns="36576" bIns="36576" anchor="t">
+          <a:bodyPr wrap="square" lIns="36576" tIns="36576" rIns="36576" bIns="36576" anchor="t">
             <a:spAutoFit/>
           </a:bodyPr>
           <a:lstStyle/>
@@ -12025,6 +12176,7 @@
           <a:lstStyle/>
           <a:p>
             <a:pPr algn="ctr"/>
+            <a:endParaRPr/>
           </a:p>
         </p:txBody>
       </p:sp>
@@ -12068,6 +12220,7 @@
           <a:lstStyle/>
           <a:p>
             <a:pPr algn="ctr"/>
+            <a:endParaRPr/>
           </a:p>
         </p:txBody>
       </p:sp>
@@ -12088,7 +12241,7 @@
           <a:noFill/>
         </p:spPr>
         <p:txBody>
-          <a:bodyPr wrap="square" lIns="36576" rIns="36576" tIns="36576" bIns="36576" anchor="t">
+          <a:bodyPr wrap="square" lIns="36576" tIns="36576" rIns="36576" bIns="36576" anchor="t">
             <a:spAutoFit/>
           </a:bodyPr>
           <a:lstStyle/>
@@ -12123,7 +12276,7 @@
           <a:noFill/>
         </p:spPr>
         <p:txBody>
-          <a:bodyPr wrap="square" lIns="36576" rIns="36576" tIns="36576" bIns="36576" anchor="t">
+          <a:bodyPr wrap="square" lIns="36576" tIns="36576" rIns="36576" bIns="36576" anchor="t">
             <a:spAutoFit/>
           </a:bodyPr>
           <a:lstStyle/>
@@ -12183,6 +12336,7 @@
           <a:lstStyle/>
           <a:p>
             <a:pPr algn="ctr"/>
+            <a:endParaRPr/>
           </a:p>
         </p:txBody>
       </p:sp>
@@ -12226,6 +12380,7 @@
           <a:lstStyle/>
           <a:p>
             <a:pPr algn="ctr"/>
+            <a:endParaRPr/>
           </a:p>
         </p:txBody>
       </p:sp>
@@ -12246,7 +12401,7 @@
           <a:noFill/>
         </p:spPr>
         <p:txBody>
-          <a:bodyPr wrap="square" lIns="36576" rIns="36576" tIns="36576" bIns="36576" anchor="t">
+          <a:bodyPr wrap="square" lIns="36576" tIns="36576" rIns="36576" bIns="36576" anchor="t">
             <a:spAutoFit/>
           </a:bodyPr>
           <a:lstStyle/>
@@ -12281,7 +12436,7 @@
           <a:noFill/>
         </p:spPr>
         <p:txBody>
-          <a:bodyPr wrap="square" lIns="36576" rIns="36576" tIns="36576" bIns="36576" anchor="t">
+          <a:bodyPr wrap="square" lIns="36576" tIns="36576" rIns="36576" bIns="36576" anchor="t">
             <a:spAutoFit/>
           </a:bodyPr>
           <a:lstStyle/>
@@ -12316,7 +12471,7 @@
           <a:noFill/>
         </p:spPr>
         <p:txBody>
-          <a:bodyPr wrap="square" lIns="36576" rIns="36576" tIns="36576" bIns="36576" anchor="t">
+          <a:bodyPr wrap="square" lIns="36576" tIns="36576" rIns="36576" bIns="36576" anchor="t">
             <a:spAutoFit/>
           </a:bodyPr>
           <a:lstStyle/>
@@ -12351,7 +12506,7 @@
           <a:noFill/>
         </p:spPr>
         <p:txBody>
-          <a:bodyPr wrap="square" lIns="36576" rIns="36576" tIns="36576" bIns="36576" anchor="t">
+          <a:bodyPr wrap="square" lIns="36576" tIns="36576" rIns="36576" bIns="36576" anchor="t">
             <a:spAutoFit/>
           </a:bodyPr>
           <a:lstStyle/>
@@ -12378,7 +12533,7 @@
 </file>
 
 <file path=ppt/slides/slide21.xml><?xml version="1.0" encoding="utf-8"?>
-<p:sld xmlns:a="http://schemas.openxmlformats.org/drawingml/2006/main" xmlns:p="http://schemas.openxmlformats.org/presentationml/2006/main" xmlns:r="http://schemas.openxmlformats.org/officeDocument/2006/relationships">
+<p:sld xmlns:a="http://schemas.openxmlformats.org/drawingml/2006/main" xmlns:r="http://schemas.openxmlformats.org/officeDocument/2006/relationships" xmlns:p="http://schemas.openxmlformats.org/presentationml/2006/main">
   <p:cSld>
     <p:bg>
       <p:bgPr>
@@ -12394,7 +12549,14 @@
         <p:cNvGrpSpPr/>
         <p:nvPr/>
       </p:nvGrpSpPr>
-      <p:grpSpPr/>
+      <p:grpSpPr>
+        <a:xfrm>
+          <a:off x="0" y="0"/>
+          <a:ext cx="0" cy="0"/>
+          <a:chOff x="0" y="0"/>
+          <a:chExt cx="0" cy="0"/>
+        </a:xfrm>
+      </p:grpSpPr>
       <p:sp>
         <p:nvSpPr>
           <p:cNvPr id="2" name="TextBox 1"/>
@@ -12412,7 +12574,7 @@
           <a:noFill/>
         </p:spPr>
         <p:txBody>
-          <a:bodyPr wrap="square" lIns="36576" rIns="36576" tIns="36576" bIns="36576" anchor="t">
+          <a:bodyPr wrap="square" lIns="36576" tIns="36576" rIns="36576" bIns="36576" anchor="t">
             <a:spAutoFit/>
           </a:bodyPr>
           <a:lstStyle/>
@@ -12447,7 +12609,7 @@
           <a:noFill/>
         </p:spPr>
         <p:txBody>
-          <a:bodyPr wrap="square" lIns="36576" rIns="36576" tIns="36576" bIns="36576" anchor="t">
+          <a:bodyPr wrap="square" lIns="36576" tIns="36576" rIns="36576" bIns="36576" anchor="t">
             <a:spAutoFit/>
           </a:bodyPr>
           <a:lstStyle/>
@@ -12517,7 +12679,7 @@
           <a:noFill/>
         </p:spPr>
         <p:txBody>
-          <a:bodyPr wrap="square" lIns="36576" rIns="36576" tIns="36576" bIns="36576" anchor="t">
+          <a:bodyPr wrap="square" lIns="36576" tIns="36576" rIns="36576" bIns="36576" anchor="t">
             <a:spAutoFit/>
           </a:bodyPr>
           <a:lstStyle/>
@@ -12601,6 +12763,7 @@
           <a:lstStyle/>
           <a:p>
             <a:pPr algn="ctr"/>
+            <a:endParaRPr/>
           </a:p>
         </p:txBody>
       </p:sp>
@@ -12644,6 +12807,7 @@
           <a:lstStyle/>
           <a:p>
             <a:pPr algn="ctr"/>
+            <a:endParaRPr/>
           </a:p>
         </p:txBody>
       </p:sp>
@@ -12664,7 +12828,7 @@
           <a:noFill/>
         </p:spPr>
         <p:txBody>
-          <a:bodyPr wrap="square" lIns="36576" rIns="36576" tIns="36576" bIns="36576" anchor="t">
+          <a:bodyPr wrap="square" lIns="36576" tIns="36576" rIns="36576" bIns="36576" anchor="t">
             <a:spAutoFit/>
           </a:bodyPr>
           <a:lstStyle/>
@@ -12699,7 +12863,7 @@
           <a:noFill/>
         </p:spPr>
         <p:txBody>
-          <a:bodyPr wrap="square" lIns="36576" rIns="36576" tIns="36576" bIns="36576" anchor="t">
+          <a:bodyPr wrap="square" lIns="36576" tIns="36576" rIns="36576" bIns="36576" anchor="t">
             <a:spAutoFit/>
           </a:bodyPr>
           <a:lstStyle/>
@@ -12759,6 +12923,7 @@
           <a:lstStyle/>
           <a:p>
             <a:pPr algn="ctr"/>
+            <a:endParaRPr/>
           </a:p>
         </p:txBody>
       </p:sp>
@@ -12802,6 +12967,7 @@
           <a:lstStyle/>
           <a:p>
             <a:pPr algn="ctr"/>
+            <a:endParaRPr/>
           </a:p>
         </p:txBody>
       </p:sp>
@@ -12822,7 +12988,7 @@
           <a:noFill/>
         </p:spPr>
         <p:txBody>
-          <a:bodyPr wrap="square" lIns="36576" rIns="36576" tIns="36576" bIns="36576" anchor="t">
+          <a:bodyPr wrap="square" lIns="36576" tIns="36576" rIns="36576" bIns="36576" anchor="t">
             <a:spAutoFit/>
           </a:bodyPr>
           <a:lstStyle/>
@@ -12857,7 +13023,7 @@
           <a:noFill/>
         </p:spPr>
         <p:txBody>
-          <a:bodyPr wrap="square" lIns="36576" rIns="36576" tIns="36576" bIns="36576" anchor="t">
+          <a:bodyPr wrap="square" lIns="36576" tIns="36576" rIns="36576" bIns="36576" anchor="t">
             <a:spAutoFit/>
           </a:bodyPr>
           <a:lstStyle/>
@@ -12892,7 +13058,7 @@
           <a:noFill/>
         </p:spPr>
         <p:txBody>
-          <a:bodyPr wrap="square" lIns="36576" rIns="36576" tIns="36576" bIns="36576" anchor="t">
+          <a:bodyPr wrap="square" lIns="36576" tIns="36576" rIns="36576" bIns="36576" anchor="t">
             <a:spAutoFit/>
           </a:bodyPr>
           <a:lstStyle/>
@@ -12927,7 +13093,7 @@
           <a:noFill/>
         </p:spPr>
         <p:txBody>
-          <a:bodyPr wrap="square" lIns="36576" rIns="36576" tIns="36576" bIns="36576" anchor="t">
+          <a:bodyPr wrap="square" lIns="36576" tIns="36576" rIns="36576" bIns="36576" anchor="t">
             <a:spAutoFit/>
           </a:bodyPr>
           <a:lstStyle/>
@@ -12954,7 +13120,7 @@
 </file>
 
 <file path=ppt/slides/slide22.xml><?xml version="1.0" encoding="utf-8"?>
-<p:sld xmlns:a="http://schemas.openxmlformats.org/drawingml/2006/main" xmlns:p="http://schemas.openxmlformats.org/presentationml/2006/main" xmlns:r="http://schemas.openxmlformats.org/officeDocument/2006/relationships">
+<p:sld xmlns:a="http://schemas.openxmlformats.org/drawingml/2006/main" xmlns:r="http://schemas.openxmlformats.org/officeDocument/2006/relationships" xmlns:p="http://schemas.openxmlformats.org/presentationml/2006/main">
   <p:cSld>
     <p:bg>
       <p:bgPr>
@@ -12970,7 +13136,14 @@
         <p:cNvGrpSpPr/>
         <p:nvPr/>
       </p:nvGrpSpPr>
-      <p:grpSpPr/>
+      <p:grpSpPr>
+        <a:xfrm>
+          <a:off x="0" y="0"/>
+          <a:ext cx="0" cy="0"/>
+          <a:chOff x="0" y="0"/>
+          <a:chExt cx="0" cy="0"/>
+        </a:xfrm>
+      </p:grpSpPr>
       <p:sp>
         <p:nvSpPr>
           <p:cNvPr id="2" name="TextBox 1"/>
@@ -12988,7 +13161,7 @@
           <a:noFill/>
         </p:spPr>
         <p:txBody>
-          <a:bodyPr wrap="square" lIns="36576" rIns="36576" tIns="36576" bIns="36576" anchor="t">
+          <a:bodyPr wrap="square" lIns="36576" tIns="36576" rIns="36576" bIns="36576" anchor="t">
             <a:spAutoFit/>
           </a:bodyPr>
           <a:lstStyle/>
@@ -13023,7 +13196,7 @@
           <a:noFill/>
         </p:spPr>
         <p:txBody>
-          <a:bodyPr wrap="square" lIns="36576" rIns="36576" tIns="36576" bIns="36576" anchor="t">
+          <a:bodyPr wrap="square" lIns="36576" tIns="36576" rIns="36576" bIns="36576" anchor="t">
             <a:spAutoFit/>
           </a:bodyPr>
           <a:lstStyle/>
@@ -13093,7 +13266,7 @@
           <a:noFill/>
         </p:spPr>
         <p:txBody>
-          <a:bodyPr wrap="square" lIns="36576" rIns="36576" tIns="36576" bIns="36576" anchor="t">
+          <a:bodyPr wrap="square" lIns="36576" tIns="36576" rIns="36576" bIns="36576" anchor="t">
             <a:spAutoFit/>
           </a:bodyPr>
           <a:lstStyle/>
@@ -13177,6 +13350,7 @@
           <a:lstStyle/>
           <a:p>
             <a:pPr algn="ctr"/>
+            <a:endParaRPr/>
           </a:p>
         </p:txBody>
       </p:sp>
@@ -13220,6 +13394,7 @@
           <a:lstStyle/>
           <a:p>
             <a:pPr algn="ctr"/>
+            <a:endParaRPr/>
           </a:p>
         </p:txBody>
       </p:sp>
@@ -13240,7 +13415,7 @@
           <a:noFill/>
         </p:spPr>
         <p:txBody>
-          <a:bodyPr wrap="square" lIns="36576" rIns="36576" tIns="36576" bIns="36576" anchor="t">
+          <a:bodyPr wrap="square" lIns="36576" tIns="36576" rIns="36576" bIns="36576" anchor="t">
             <a:spAutoFit/>
           </a:bodyPr>
           <a:lstStyle/>
@@ -13275,7 +13450,7 @@
           <a:noFill/>
         </p:spPr>
         <p:txBody>
-          <a:bodyPr wrap="square" lIns="36576" rIns="36576" tIns="36576" bIns="36576" anchor="t">
+          <a:bodyPr wrap="square" lIns="36576" tIns="36576" rIns="36576" bIns="36576" anchor="t">
             <a:spAutoFit/>
           </a:bodyPr>
           <a:lstStyle/>
@@ -13335,6 +13510,7 @@
           <a:lstStyle/>
           <a:p>
             <a:pPr algn="ctr"/>
+            <a:endParaRPr/>
           </a:p>
         </p:txBody>
       </p:sp>
@@ -13378,6 +13554,7 @@
           <a:lstStyle/>
           <a:p>
             <a:pPr algn="ctr"/>
+            <a:endParaRPr/>
           </a:p>
         </p:txBody>
       </p:sp>
@@ -13398,7 +13575,7 @@
           <a:noFill/>
         </p:spPr>
         <p:txBody>
-          <a:bodyPr wrap="square" lIns="36576" rIns="36576" tIns="36576" bIns="36576" anchor="t">
+          <a:bodyPr wrap="square" lIns="36576" tIns="36576" rIns="36576" bIns="36576" anchor="t">
             <a:spAutoFit/>
           </a:bodyPr>
           <a:lstStyle/>
@@ -13433,7 +13610,7 @@
           <a:noFill/>
         </p:spPr>
         <p:txBody>
-          <a:bodyPr wrap="square" lIns="36576" rIns="36576" tIns="36576" bIns="36576" anchor="t">
+          <a:bodyPr wrap="square" lIns="36576" tIns="36576" rIns="36576" bIns="36576" anchor="t">
             <a:spAutoFit/>
           </a:bodyPr>
           <a:lstStyle/>
@@ -13468,7 +13645,7 @@
           <a:noFill/>
         </p:spPr>
         <p:txBody>
-          <a:bodyPr wrap="square" lIns="36576" rIns="36576" tIns="36576" bIns="36576" anchor="t">
+          <a:bodyPr wrap="square" lIns="36576" tIns="36576" rIns="36576" bIns="36576" anchor="t">
             <a:spAutoFit/>
           </a:bodyPr>
           <a:lstStyle/>
@@ -13503,7 +13680,7 @@
           <a:noFill/>
         </p:spPr>
         <p:txBody>
-          <a:bodyPr wrap="square" lIns="36576" rIns="36576" tIns="36576" bIns="36576" anchor="t">
+          <a:bodyPr wrap="square" lIns="36576" tIns="36576" rIns="36576" bIns="36576" anchor="t">
             <a:spAutoFit/>
           </a:bodyPr>
           <a:lstStyle/>
@@ -13530,7 +13707,7 @@
 </file>
 
 <file path=ppt/slides/slide23.xml><?xml version="1.0" encoding="utf-8"?>
-<p:sld xmlns:a="http://schemas.openxmlformats.org/drawingml/2006/main" xmlns:p="http://schemas.openxmlformats.org/presentationml/2006/main" xmlns:r="http://schemas.openxmlformats.org/officeDocument/2006/relationships">
+<p:sld xmlns:a="http://schemas.openxmlformats.org/drawingml/2006/main" xmlns:r="http://schemas.openxmlformats.org/officeDocument/2006/relationships" xmlns:p="http://schemas.openxmlformats.org/presentationml/2006/main">
   <p:cSld>
     <p:bg>
       <p:bgPr>
@@ -13546,7 +13723,14 @@
         <p:cNvGrpSpPr/>
         <p:nvPr/>
       </p:nvGrpSpPr>
-      <p:grpSpPr/>
+      <p:grpSpPr>
+        <a:xfrm>
+          <a:off x="0" y="0"/>
+          <a:ext cx="0" cy="0"/>
+          <a:chOff x="0" y="0"/>
+          <a:chExt cx="0" cy="0"/>
+        </a:xfrm>
+      </p:grpSpPr>
       <p:sp>
         <p:nvSpPr>
           <p:cNvPr id="2" name="TextBox 1"/>
@@ -13564,7 +13748,7 @@
           <a:noFill/>
         </p:spPr>
         <p:txBody>
-          <a:bodyPr wrap="square" lIns="36576" rIns="36576" tIns="36576" bIns="36576" anchor="t">
+          <a:bodyPr wrap="square" lIns="36576" tIns="36576" rIns="36576" bIns="36576" anchor="t">
             <a:spAutoFit/>
           </a:bodyPr>
           <a:lstStyle/>
@@ -13599,7 +13783,7 @@
           <a:noFill/>
         </p:spPr>
         <p:txBody>
-          <a:bodyPr wrap="square" lIns="36576" rIns="36576" tIns="36576" bIns="36576" anchor="t">
+          <a:bodyPr wrap="square" lIns="36576" tIns="36576" rIns="36576" bIns="36576" anchor="t">
             <a:spAutoFit/>
           </a:bodyPr>
           <a:lstStyle/>
@@ -13669,7 +13853,7 @@
           <a:noFill/>
         </p:spPr>
         <p:txBody>
-          <a:bodyPr wrap="square" lIns="36576" rIns="36576" tIns="36576" bIns="36576" anchor="t">
+          <a:bodyPr wrap="square" lIns="36576" tIns="36576" rIns="36576" bIns="36576" anchor="t">
             <a:spAutoFit/>
           </a:bodyPr>
           <a:lstStyle/>
@@ -13777,6 +13961,7 @@
           <a:lstStyle/>
           <a:p>
             <a:pPr algn="ctr"/>
+            <a:endParaRPr/>
           </a:p>
         </p:txBody>
       </p:sp>
@@ -13820,6 +14005,7 @@
           <a:lstStyle/>
           <a:p>
             <a:pPr algn="ctr"/>
+            <a:endParaRPr/>
           </a:p>
         </p:txBody>
       </p:sp>
@@ -13840,7 +14026,7 @@
           <a:noFill/>
         </p:spPr>
         <p:txBody>
-          <a:bodyPr wrap="square" lIns="36576" rIns="36576" tIns="36576" bIns="36576" anchor="t">
+          <a:bodyPr wrap="square" lIns="36576" tIns="36576" rIns="36576" bIns="36576" anchor="t">
             <a:spAutoFit/>
           </a:bodyPr>
           <a:lstStyle/>
@@ -13875,7 +14061,7 @@
           <a:noFill/>
         </p:spPr>
         <p:txBody>
-          <a:bodyPr wrap="square" lIns="36576" rIns="36576" tIns="36576" bIns="36576" anchor="t">
+          <a:bodyPr wrap="square" lIns="36576" tIns="36576" rIns="36576" bIns="36576" anchor="t">
             <a:spAutoFit/>
           </a:bodyPr>
           <a:lstStyle/>
@@ -13935,6 +14121,7 @@
           <a:lstStyle/>
           <a:p>
             <a:pPr algn="ctr"/>
+            <a:endParaRPr/>
           </a:p>
         </p:txBody>
       </p:sp>
@@ -13978,6 +14165,7 @@
           <a:lstStyle/>
           <a:p>
             <a:pPr algn="ctr"/>
+            <a:endParaRPr/>
           </a:p>
         </p:txBody>
       </p:sp>
@@ -13998,7 +14186,7 @@
           <a:noFill/>
         </p:spPr>
         <p:txBody>
-          <a:bodyPr wrap="square" lIns="36576" rIns="36576" tIns="36576" bIns="36576" anchor="t">
+          <a:bodyPr wrap="square" lIns="36576" tIns="36576" rIns="36576" bIns="36576" anchor="t">
             <a:spAutoFit/>
           </a:bodyPr>
           <a:lstStyle/>
@@ -14033,7 +14221,7 @@
           <a:noFill/>
         </p:spPr>
         <p:txBody>
-          <a:bodyPr wrap="square" lIns="36576" rIns="36576" tIns="36576" bIns="36576" anchor="t">
+          <a:bodyPr wrap="square" lIns="36576" tIns="36576" rIns="36576" bIns="36576" anchor="t">
             <a:spAutoFit/>
           </a:bodyPr>
           <a:lstStyle/>
@@ -14093,6 +14281,7 @@
           <a:lstStyle/>
           <a:p>
             <a:pPr algn="ctr"/>
+            <a:endParaRPr/>
           </a:p>
         </p:txBody>
       </p:sp>
@@ -14136,6 +14325,7 @@
           <a:lstStyle/>
           <a:p>
             <a:pPr algn="ctr"/>
+            <a:endParaRPr/>
           </a:p>
         </p:txBody>
       </p:sp>
@@ -14156,7 +14346,7 @@
           <a:noFill/>
         </p:spPr>
         <p:txBody>
-          <a:bodyPr wrap="square" lIns="36576" rIns="36576" tIns="36576" bIns="36576" anchor="t">
+          <a:bodyPr wrap="square" lIns="36576" tIns="36576" rIns="36576" bIns="36576" anchor="t">
             <a:spAutoFit/>
           </a:bodyPr>
           <a:lstStyle/>
@@ -14191,7 +14381,7 @@
           <a:noFill/>
         </p:spPr>
         <p:txBody>
-          <a:bodyPr wrap="square" lIns="36576" rIns="36576" tIns="36576" bIns="36576" anchor="t">
+          <a:bodyPr wrap="square" lIns="36576" tIns="36576" rIns="36576" bIns="36576" anchor="t">
             <a:spAutoFit/>
           </a:bodyPr>
           <a:lstStyle/>
@@ -14226,7 +14416,7 @@
           <a:noFill/>
         </p:spPr>
         <p:txBody>
-          <a:bodyPr wrap="square" lIns="36576" rIns="36576" tIns="36576" bIns="36576" anchor="t">
+          <a:bodyPr wrap="square" lIns="36576" tIns="36576" rIns="36576" bIns="36576" anchor="t">
             <a:spAutoFit/>
           </a:bodyPr>
           <a:lstStyle/>
@@ -14261,7 +14451,7 @@
           <a:noFill/>
         </p:spPr>
         <p:txBody>
-          <a:bodyPr wrap="square" lIns="36576" rIns="36576" tIns="36576" bIns="36576" anchor="t">
+          <a:bodyPr wrap="square" lIns="36576" tIns="36576" rIns="36576" bIns="36576" anchor="t">
             <a:spAutoFit/>
           </a:bodyPr>
           <a:lstStyle/>
@@ -14288,7 +14478,7 @@
 </file>
 
 <file path=ppt/slides/slide24.xml><?xml version="1.0" encoding="utf-8"?>
-<p:sld xmlns:a="http://schemas.openxmlformats.org/drawingml/2006/main" xmlns:p="http://schemas.openxmlformats.org/presentationml/2006/main" xmlns:r="http://schemas.openxmlformats.org/officeDocument/2006/relationships">
+<p:sld xmlns:a="http://schemas.openxmlformats.org/drawingml/2006/main" xmlns:r="http://schemas.openxmlformats.org/officeDocument/2006/relationships" xmlns:p="http://schemas.openxmlformats.org/presentationml/2006/main">
   <p:cSld>
     <p:bg>
       <p:bgPr>
@@ -14304,7 +14494,14 @@
         <p:cNvGrpSpPr/>
         <p:nvPr/>
       </p:nvGrpSpPr>
-      <p:grpSpPr/>
+      <p:grpSpPr>
+        <a:xfrm>
+          <a:off x="0" y="0"/>
+          <a:ext cx="0" cy="0"/>
+          <a:chOff x="0" y="0"/>
+          <a:chExt cx="0" cy="0"/>
+        </a:xfrm>
+      </p:grpSpPr>
       <p:sp>
         <p:nvSpPr>
           <p:cNvPr id="2" name="TextBox 1"/>
@@ -14322,7 +14519,7 @@
           <a:noFill/>
         </p:spPr>
         <p:txBody>
-          <a:bodyPr wrap="square" lIns="36576" rIns="36576" tIns="36576" bIns="36576" anchor="t">
+          <a:bodyPr wrap="square" lIns="36576" tIns="36576" rIns="36576" bIns="36576" anchor="t">
             <a:spAutoFit/>
           </a:bodyPr>
           <a:lstStyle/>
@@ -14357,7 +14554,7 @@
           <a:noFill/>
         </p:spPr>
         <p:txBody>
-          <a:bodyPr wrap="square" lIns="36576" rIns="36576" tIns="36576" bIns="36576" anchor="t">
+          <a:bodyPr wrap="square" lIns="36576" tIns="36576" rIns="36576" bIns="36576" anchor="t">
             <a:spAutoFit/>
           </a:bodyPr>
           <a:lstStyle/>
@@ -14427,7 +14624,7 @@
           <a:noFill/>
         </p:spPr>
         <p:txBody>
-          <a:bodyPr wrap="square" lIns="36576" rIns="36576" tIns="36576" bIns="36576" anchor="t">
+          <a:bodyPr wrap="square" lIns="36576" tIns="36576" rIns="36576" bIns="36576" anchor="t">
             <a:spAutoFit/>
           </a:bodyPr>
           <a:lstStyle/>
@@ -14511,6 +14708,7 @@
           <a:lstStyle/>
           <a:p>
             <a:pPr algn="ctr"/>
+            <a:endParaRPr/>
           </a:p>
         </p:txBody>
       </p:sp>
@@ -14554,6 +14752,7 @@
           <a:lstStyle/>
           <a:p>
             <a:pPr algn="ctr"/>
+            <a:endParaRPr/>
           </a:p>
         </p:txBody>
       </p:sp>
@@ -14574,7 +14773,7 @@
           <a:noFill/>
         </p:spPr>
         <p:txBody>
-          <a:bodyPr wrap="square" lIns="36576" rIns="36576" tIns="36576" bIns="36576" anchor="t">
+          <a:bodyPr wrap="square" lIns="36576" tIns="36576" rIns="36576" bIns="36576" anchor="t">
             <a:spAutoFit/>
           </a:bodyPr>
           <a:lstStyle/>
@@ -14609,7 +14808,7 @@
           <a:noFill/>
         </p:spPr>
         <p:txBody>
-          <a:bodyPr wrap="square" lIns="36576" rIns="36576" tIns="36576" bIns="36576" anchor="t">
+          <a:bodyPr wrap="square" lIns="36576" tIns="36576" rIns="36576" bIns="36576" anchor="t">
             <a:spAutoFit/>
           </a:bodyPr>
           <a:lstStyle/>
@@ -14669,6 +14868,7 @@
           <a:lstStyle/>
           <a:p>
             <a:pPr algn="ctr"/>
+            <a:endParaRPr/>
           </a:p>
         </p:txBody>
       </p:sp>
@@ -14712,6 +14912,7 @@
           <a:lstStyle/>
           <a:p>
             <a:pPr algn="ctr"/>
+            <a:endParaRPr/>
           </a:p>
         </p:txBody>
       </p:sp>
@@ -14732,7 +14933,7 @@
           <a:noFill/>
         </p:spPr>
         <p:txBody>
-          <a:bodyPr wrap="square" lIns="36576" rIns="36576" tIns="36576" bIns="36576" anchor="t">
+          <a:bodyPr wrap="square" lIns="36576" tIns="36576" rIns="36576" bIns="36576" anchor="t">
             <a:spAutoFit/>
           </a:bodyPr>
           <a:lstStyle/>
@@ -14767,7 +14968,7 @@
           <a:noFill/>
         </p:spPr>
         <p:txBody>
-          <a:bodyPr wrap="square" lIns="36576" rIns="36576" tIns="36576" bIns="36576" anchor="t">
+          <a:bodyPr wrap="square" lIns="36576" tIns="36576" rIns="36576" bIns="36576" anchor="t">
             <a:spAutoFit/>
           </a:bodyPr>
           <a:lstStyle/>
@@ -14802,7 +15003,7 @@
           <a:noFill/>
         </p:spPr>
         <p:txBody>
-          <a:bodyPr wrap="square" lIns="36576" rIns="36576" tIns="36576" bIns="36576" anchor="t">
+          <a:bodyPr wrap="square" lIns="36576" tIns="36576" rIns="36576" bIns="36576" anchor="t">
             <a:spAutoFit/>
           </a:bodyPr>
           <a:lstStyle/>
@@ -14837,7 +15038,7 @@
           <a:noFill/>
         </p:spPr>
         <p:txBody>
-          <a:bodyPr wrap="square" lIns="36576" rIns="36576" tIns="36576" bIns="36576" anchor="t">
+          <a:bodyPr wrap="square" lIns="36576" tIns="36576" rIns="36576" bIns="36576" anchor="t">
             <a:spAutoFit/>
           </a:bodyPr>
           <a:lstStyle/>
@@ -14864,7 +15065,7 @@
 </file>
 
 <file path=ppt/slides/slide25.xml><?xml version="1.0" encoding="utf-8"?>
-<p:sld xmlns:a="http://schemas.openxmlformats.org/drawingml/2006/main" xmlns:p="http://schemas.openxmlformats.org/presentationml/2006/main" xmlns:r="http://schemas.openxmlformats.org/officeDocument/2006/relationships">
+<p:sld xmlns:a="http://schemas.openxmlformats.org/drawingml/2006/main" xmlns:r="http://schemas.openxmlformats.org/officeDocument/2006/relationships" xmlns:p="http://schemas.openxmlformats.org/presentationml/2006/main">
   <p:cSld>
     <p:bg>
       <p:bgPr>
@@ -14880,7 +15081,14 @@
         <p:cNvGrpSpPr/>
         <p:nvPr/>
       </p:nvGrpSpPr>
-      <p:grpSpPr/>
+      <p:grpSpPr>
+        <a:xfrm>
+          <a:off x="0" y="0"/>
+          <a:ext cx="0" cy="0"/>
+          <a:chOff x="0" y="0"/>
+          <a:chExt cx="0" cy="0"/>
+        </a:xfrm>
+      </p:grpSpPr>
       <p:sp>
         <p:nvSpPr>
           <p:cNvPr id="2" name="TextBox 1"/>
@@ -14898,7 +15106,7 @@
           <a:noFill/>
         </p:spPr>
         <p:txBody>
-          <a:bodyPr wrap="square" lIns="36576" rIns="36576" tIns="36576" bIns="36576" anchor="t">
+          <a:bodyPr wrap="square" lIns="36576" tIns="36576" rIns="36576" bIns="36576" anchor="t">
             <a:spAutoFit/>
           </a:bodyPr>
           <a:lstStyle/>
@@ -14933,7 +15141,7 @@
           <a:noFill/>
         </p:spPr>
         <p:txBody>
-          <a:bodyPr wrap="square" lIns="36576" rIns="36576" tIns="36576" bIns="36576" anchor="t">
+          <a:bodyPr wrap="square" lIns="36576" tIns="36576" rIns="36576" bIns="36576" anchor="t">
             <a:spAutoFit/>
           </a:bodyPr>
           <a:lstStyle/>
@@ -15003,7 +15211,7 @@
           <a:noFill/>
         </p:spPr>
         <p:txBody>
-          <a:bodyPr wrap="square" lIns="36576" rIns="36576" tIns="36576" bIns="36576" anchor="t">
+          <a:bodyPr wrap="square" lIns="36576" tIns="36576" rIns="36576" bIns="36576" anchor="t">
             <a:spAutoFit/>
           </a:bodyPr>
           <a:lstStyle/>
@@ -15087,6 +15295,7 @@
           <a:lstStyle/>
           <a:p>
             <a:pPr algn="ctr"/>
+            <a:endParaRPr/>
           </a:p>
         </p:txBody>
       </p:sp>
@@ -15130,6 +15339,7 @@
           <a:lstStyle/>
           <a:p>
             <a:pPr algn="ctr"/>
+            <a:endParaRPr/>
           </a:p>
         </p:txBody>
       </p:sp>
@@ -15150,7 +15360,7 @@
           <a:noFill/>
         </p:spPr>
         <p:txBody>
-          <a:bodyPr wrap="square" lIns="36576" rIns="36576" tIns="36576" bIns="36576" anchor="t">
+          <a:bodyPr wrap="square" lIns="36576" tIns="36576" rIns="36576" bIns="36576" anchor="t">
             <a:spAutoFit/>
           </a:bodyPr>
           <a:lstStyle/>
@@ -15185,7 +15395,7 @@
           <a:noFill/>
         </p:spPr>
         <p:txBody>
-          <a:bodyPr wrap="square" lIns="36576" rIns="36576" tIns="36576" bIns="36576" anchor="t">
+          <a:bodyPr wrap="square" lIns="36576" tIns="36576" rIns="36576" bIns="36576" anchor="t">
             <a:spAutoFit/>
           </a:bodyPr>
           <a:lstStyle/>
@@ -15245,6 +15455,7 @@
           <a:lstStyle/>
           <a:p>
             <a:pPr algn="ctr"/>
+            <a:endParaRPr/>
           </a:p>
         </p:txBody>
       </p:sp>
@@ -15288,6 +15499,7 @@
           <a:lstStyle/>
           <a:p>
             <a:pPr algn="ctr"/>
+            <a:endParaRPr/>
           </a:p>
         </p:txBody>
       </p:sp>
@@ -15308,7 +15520,7 @@
           <a:noFill/>
         </p:spPr>
         <p:txBody>
-          <a:bodyPr wrap="square" lIns="36576" rIns="36576" tIns="36576" bIns="36576" anchor="t">
+          <a:bodyPr wrap="square" lIns="36576" tIns="36576" rIns="36576" bIns="36576" anchor="t">
             <a:spAutoFit/>
           </a:bodyPr>
           <a:lstStyle/>
@@ -15343,7 +15555,7 @@
           <a:noFill/>
         </p:spPr>
         <p:txBody>
-          <a:bodyPr wrap="square" lIns="36576" rIns="36576" tIns="36576" bIns="36576" anchor="t">
+          <a:bodyPr wrap="square" lIns="36576" tIns="36576" rIns="36576" bIns="36576" anchor="t">
             <a:spAutoFit/>
           </a:bodyPr>
           <a:lstStyle/>
@@ -15403,6 +15615,7 @@
           <a:lstStyle/>
           <a:p>
             <a:pPr algn="ctr"/>
+            <a:endParaRPr/>
           </a:p>
         </p:txBody>
       </p:sp>
@@ -15446,6 +15659,7 @@
           <a:lstStyle/>
           <a:p>
             <a:pPr algn="ctr"/>
+            <a:endParaRPr/>
           </a:p>
         </p:txBody>
       </p:sp>
@@ -15466,7 +15680,7 @@
           <a:noFill/>
         </p:spPr>
         <p:txBody>
-          <a:bodyPr wrap="square" lIns="36576" rIns="36576" tIns="36576" bIns="36576" anchor="t">
+          <a:bodyPr wrap="square" lIns="36576" tIns="36576" rIns="36576" bIns="36576" anchor="t">
             <a:spAutoFit/>
           </a:bodyPr>
           <a:lstStyle/>
@@ -15501,7 +15715,7 @@
           <a:noFill/>
         </p:spPr>
         <p:txBody>
-          <a:bodyPr wrap="square" lIns="36576" rIns="36576" tIns="36576" bIns="36576" anchor="t">
+          <a:bodyPr wrap="square" lIns="36576" tIns="36576" rIns="36576" bIns="36576" anchor="t">
             <a:spAutoFit/>
           </a:bodyPr>
           <a:lstStyle/>
@@ -15536,7 +15750,7 @@
           <a:noFill/>
         </p:spPr>
         <p:txBody>
-          <a:bodyPr wrap="square" lIns="36576" rIns="36576" tIns="36576" bIns="36576" anchor="t">
+          <a:bodyPr wrap="square" lIns="36576" tIns="36576" rIns="36576" bIns="36576" anchor="t">
             <a:spAutoFit/>
           </a:bodyPr>
           <a:lstStyle/>
@@ -15571,7 +15785,7 @@
           <a:noFill/>
         </p:spPr>
         <p:txBody>
-          <a:bodyPr wrap="square" lIns="36576" rIns="36576" tIns="36576" bIns="36576" anchor="t">
+          <a:bodyPr wrap="square" lIns="36576" tIns="36576" rIns="36576" bIns="36576" anchor="t">
             <a:spAutoFit/>
           </a:bodyPr>
           <a:lstStyle/>
@@ -15598,7 +15812,7 @@
 </file>
 
 <file path=ppt/slides/slide26.xml><?xml version="1.0" encoding="utf-8"?>
-<p:sld xmlns:a="http://schemas.openxmlformats.org/drawingml/2006/main" xmlns:p="http://schemas.openxmlformats.org/presentationml/2006/main" xmlns:r="http://schemas.openxmlformats.org/officeDocument/2006/relationships">
+<p:sld xmlns:a="http://schemas.openxmlformats.org/drawingml/2006/main" xmlns:r="http://schemas.openxmlformats.org/officeDocument/2006/relationships" xmlns:p="http://schemas.openxmlformats.org/presentationml/2006/main">
   <p:cSld>
     <p:bg>
       <p:bgPr>
@@ -15614,7 +15828,14 @@
         <p:cNvGrpSpPr/>
         <p:nvPr/>
       </p:nvGrpSpPr>
-      <p:grpSpPr/>
+      <p:grpSpPr>
+        <a:xfrm>
+          <a:off x="0" y="0"/>
+          <a:ext cx="0" cy="0"/>
+          <a:chOff x="0" y="0"/>
+          <a:chExt cx="0" cy="0"/>
+        </a:xfrm>
+      </p:grpSpPr>
       <p:sp>
         <p:nvSpPr>
           <p:cNvPr id="2" name="TextBox 1"/>
@@ -15632,7 +15853,7 @@
           <a:noFill/>
         </p:spPr>
         <p:txBody>
-          <a:bodyPr wrap="square" lIns="36576" rIns="36576" tIns="36576" bIns="36576" anchor="t">
+          <a:bodyPr wrap="square" lIns="36576" tIns="36576" rIns="36576" bIns="36576" anchor="t">
             <a:spAutoFit/>
           </a:bodyPr>
           <a:lstStyle/>
@@ -15667,7 +15888,7 @@
           <a:noFill/>
         </p:spPr>
         <p:txBody>
-          <a:bodyPr wrap="square" lIns="36576" rIns="36576" tIns="36576" bIns="36576" anchor="t">
+          <a:bodyPr wrap="square" lIns="36576" tIns="36576" rIns="36576" bIns="36576" anchor="t">
             <a:spAutoFit/>
           </a:bodyPr>
           <a:lstStyle/>
@@ -15737,7 +15958,7 @@
           <a:noFill/>
         </p:spPr>
         <p:txBody>
-          <a:bodyPr wrap="square" lIns="36576" rIns="36576" tIns="36576" bIns="36576" anchor="t">
+          <a:bodyPr wrap="square" lIns="36576" tIns="36576" rIns="36576" bIns="36576" anchor="t">
             <a:spAutoFit/>
           </a:bodyPr>
           <a:lstStyle/>
@@ -15797,6 +16018,7 @@
           <a:lstStyle/>
           <a:p>
             <a:pPr algn="ctr"/>
+            <a:endParaRPr/>
           </a:p>
         </p:txBody>
       </p:sp>
@@ -15840,6 +16062,7 @@
           <a:lstStyle/>
           <a:p>
             <a:pPr algn="ctr"/>
+            <a:endParaRPr/>
           </a:p>
         </p:txBody>
       </p:sp>
@@ -15860,7 +16083,7 @@
           <a:noFill/>
         </p:spPr>
         <p:txBody>
-          <a:bodyPr wrap="square" lIns="36576" rIns="36576" tIns="36576" bIns="36576" anchor="t">
+          <a:bodyPr wrap="square" lIns="36576" tIns="36576" rIns="36576" bIns="36576" anchor="t">
             <a:spAutoFit/>
           </a:bodyPr>
           <a:lstStyle/>
@@ -15895,7 +16118,7 @@
           <a:noFill/>
         </p:spPr>
         <p:txBody>
-          <a:bodyPr wrap="square" lIns="36576" rIns="36576" tIns="36576" bIns="36576" anchor="t">
+          <a:bodyPr wrap="square" lIns="36576" tIns="36576" rIns="36576" bIns="36576" anchor="t">
             <a:spAutoFit/>
           </a:bodyPr>
           <a:lstStyle/>
@@ -15955,6 +16178,7 @@
           <a:lstStyle/>
           <a:p>
             <a:pPr algn="ctr"/>
+            <a:endParaRPr/>
           </a:p>
         </p:txBody>
       </p:sp>
@@ -15998,6 +16222,7 @@
           <a:lstStyle/>
           <a:p>
             <a:pPr algn="ctr"/>
+            <a:endParaRPr/>
           </a:p>
         </p:txBody>
       </p:sp>
@@ -16018,7 +16243,7 @@
           <a:noFill/>
         </p:spPr>
         <p:txBody>
-          <a:bodyPr wrap="square" lIns="36576" rIns="36576" tIns="36576" bIns="36576" anchor="t">
+          <a:bodyPr wrap="square" lIns="36576" tIns="36576" rIns="36576" bIns="36576" anchor="t">
             <a:spAutoFit/>
           </a:bodyPr>
           <a:lstStyle/>
@@ -16053,7 +16278,7 @@
           <a:noFill/>
         </p:spPr>
         <p:txBody>
-          <a:bodyPr wrap="square" lIns="36576" rIns="36576" tIns="36576" bIns="36576" anchor="t">
+          <a:bodyPr wrap="square" lIns="36576" tIns="36576" rIns="36576" bIns="36576" anchor="t">
             <a:spAutoFit/>
           </a:bodyPr>
           <a:lstStyle/>
@@ -16113,6 +16338,7 @@
           <a:lstStyle/>
           <a:p>
             <a:pPr algn="ctr"/>
+            <a:endParaRPr/>
           </a:p>
         </p:txBody>
       </p:sp>
@@ -16156,6 +16382,7 @@
           <a:lstStyle/>
           <a:p>
             <a:pPr algn="ctr"/>
+            <a:endParaRPr/>
           </a:p>
         </p:txBody>
       </p:sp>
@@ -16176,7 +16403,7 @@
           <a:noFill/>
         </p:spPr>
         <p:txBody>
-          <a:bodyPr wrap="square" lIns="36576" rIns="36576" tIns="36576" bIns="36576" anchor="t">
+          <a:bodyPr wrap="square" lIns="36576" tIns="36576" rIns="36576" bIns="36576" anchor="t">
             <a:spAutoFit/>
           </a:bodyPr>
           <a:lstStyle/>
@@ -16211,7 +16438,7 @@
           <a:noFill/>
         </p:spPr>
         <p:txBody>
-          <a:bodyPr wrap="square" lIns="36576" rIns="36576" tIns="36576" bIns="36576" anchor="t">
+          <a:bodyPr wrap="square" lIns="36576" tIns="36576" rIns="36576" bIns="36576" anchor="t">
             <a:spAutoFit/>
           </a:bodyPr>
           <a:lstStyle/>
@@ -16271,6 +16498,7 @@
           <a:lstStyle/>
           <a:p>
             <a:pPr algn="ctr"/>
+            <a:endParaRPr/>
           </a:p>
         </p:txBody>
       </p:sp>
@@ -16314,6 +16542,7 @@
           <a:lstStyle/>
           <a:p>
             <a:pPr algn="ctr"/>
+            <a:endParaRPr/>
           </a:p>
         </p:txBody>
       </p:sp>
@@ -16334,7 +16563,7 @@
           <a:noFill/>
         </p:spPr>
         <p:txBody>
-          <a:bodyPr wrap="square" lIns="36576" rIns="36576" tIns="36576" bIns="36576" anchor="t">
+          <a:bodyPr wrap="square" lIns="36576" tIns="36576" rIns="36576" bIns="36576" anchor="t">
             <a:spAutoFit/>
           </a:bodyPr>
           <a:lstStyle/>
@@ -16369,7 +16598,7 @@
           <a:noFill/>
         </p:spPr>
         <p:txBody>
-          <a:bodyPr wrap="square" lIns="36576" rIns="36576" tIns="36576" bIns="36576" anchor="t">
+          <a:bodyPr wrap="square" lIns="36576" tIns="36576" rIns="36576" bIns="36576" anchor="t">
             <a:spAutoFit/>
           </a:bodyPr>
           <a:lstStyle/>
@@ -16404,7 +16633,7 @@
           <a:noFill/>
         </p:spPr>
         <p:txBody>
-          <a:bodyPr wrap="square" lIns="36576" rIns="36576" tIns="36576" bIns="36576" anchor="t">
+          <a:bodyPr wrap="square" lIns="36576" tIns="36576" rIns="36576" bIns="36576" anchor="t">
             <a:spAutoFit/>
           </a:bodyPr>
           <a:lstStyle/>
@@ -16439,7 +16668,7 @@
           <a:noFill/>
         </p:spPr>
         <p:txBody>
-          <a:bodyPr wrap="square" lIns="36576" rIns="36576" tIns="36576" bIns="36576" anchor="t">
+          <a:bodyPr wrap="square" lIns="36576" tIns="36576" rIns="36576" bIns="36576" anchor="t">
             <a:spAutoFit/>
           </a:bodyPr>
           <a:lstStyle/>
@@ -16474,7 +16703,7 @@
           <a:noFill/>
         </p:spPr>
         <p:txBody>
-          <a:bodyPr wrap="square" lIns="36576" rIns="36576" tIns="36576" bIns="36576" anchor="t">
+          <a:bodyPr wrap="square" lIns="36576" tIns="36576" rIns="36576" bIns="36576" anchor="t">
             <a:spAutoFit/>
           </a:bodyPr>
           <a:lstStyle/>
@@ -16501,7 +16730,7 @@
 </file>
 
 <file path=ppt/slides/slide27.xml><?xml version="1.0" encoding="utf-8"?>
-<p:sld xmlns:a="http://schemas.openxmlformats.org/drawingml/2006/main" xmlns:p="http://schemas.openxmlformats.org/presentationml/2006/main" xmlns:r="http://schemas.openxmlformats.org/officeDocument/2006/relationships">
+<p:sld xmlns:a="http://schemas.openxmlformats.org/drawingml/2006/main" xmlns:r="http://schemas.openxmlformats.org/officeDocument/2006/relationships" xmlns:p="http://schemas.openxmlformats.org/presentationml/2006/main">
   <p:cSld>
     <p:bg>
       <p:bgPr>
@@ -16517,7 +16746,14 @@
         <p:cNvGrpSpPr/>
         <p:nvPr/>
       </p:nvGrpSpPr>
-      <p:grpSpPr/>
+      <p:grpSpPr>
+        <a:xfrm>
+          <a:off x="0" y="0"/>
+          <a:ext cx="0" cy="0"/>
+          <a:chOff x="0" y="0"/>
+          <a:chExt cx="0" cy="0"/>
+        </a:xfrm>
+      </p:grpSpPr>
       <p:sp>
         <p:nvSpPr>
           <p:cNvPr id="2" name="TextBox 1"/>
@@ -16535,7 +16771,7 @@
           <a:noFill/>
         </p:spPr>
         <p:txBody>
-          <a:bodyPr wrap="square" lIns="36576" rIns="36576" tIns="36576" bIns="36576" anchor="t">
+          <a:bodyPr wrap="square" lIns="36576" tIns="36576" rIns="36576" bIns="36576" anchor="t">
             <a:spAutoFit/>
           </a:bodyPr>
           <a:lstStyle/>
@@ -16570,7 +16806,7 @@
           <a:noFill/>
         </p:spPr>
         <p:txBody>
-          <a:bodyPr wrap="square" lIns="36576" rIns="36576" tIns="36576" bIns="36576" anchor="t">
+          <a:bodyPr wrap="square" lIns="36576" tIns="36576" rIns="36576" bIns="36576" anchor="t">
             <a:spAutoFit/>
           </a:bodyPr>
           <a:lstStyle/>
@@ -16640,7 +16876,7 @@
           <a:noFill/>
         </p:spPr>
         <p:txBody>
-          <a:bodyPr wrap="square" lIns="36576" rIns="36576" tIns="36576" bIns="36576" anchor="t">
+          <a:bodyPr wrap="square" lIns="36576" tIns="36576" rIns="36576" bIns="36576" anchor="t">
             <a:spAutoFit/>
           </a:bodyPr>
           <a:lstStyle/>
@@ -16700,6 +16936,7 @@
           <a:lstStyle/>
           <a:p>
             <a:pPr algn="ctr"/>
+            <a:endParaRPr/>
           </a:p>
         </p:txBody>
       </p:sp>
@@ -16743,6 +16980,7 @@
           <a:lstStyle/>
           <a:p>
             <a:pPr algn="ctr"/>
+            <a:endParaRPr/>
           </a:p>
         </p:txBody>
       </p:sp>
@@ -16763,7 +17001,7 @@
           <a:noFill/>
         </p:spPr>
         <p:txBody>
-          <a:bodyPr wrap="square" lIns="36576" rIns="36576" tIns="36576" bIns="36576" anchor="t">
+          <a:bodyPr wrap="square" lIns="36576" tIns="36576" rIns="36576" bIns="36576" anchor="t">
             <a:spAutoFit/>
           </a:bodyPr>
           <a:lstStyle/>
@@ -16798,7 +17036,7 @@
           <a:noFill/>
         </p:spPr>
         <p:txBody>
-          <a:bodyPr wrap="square" lIns="36576" rIns="36576" tIns="36576" bIns="36576" anchor="t">
+          <a:bodyPr wrap="square" lIns="36576" tIns="36576" rIns="36576" bIns="36576" anchor="t">
             <a:spAutoFit/>
           </a:bodyPr>
           <a:lstStyle/>
@@ -16833,7 +17071,7 @@
           <a:noFill/>
         </p:spPr>
         <p:txBody>
-          <a:bodyPr wrap="square" lIns="36576" rIns="36576" tIns="36576" bIns="36576" anchor="t">
+          <a:bodyPr wrap="square" lIns="36576" tIns="36576" rIns="36576" bIns="36576" anchor="t">
             <a:spAutoFit/>
           </a:bodyPr>
           <a:lstStyle/>
@@ -16893,6 +17131,7 @@
           <a:lstStyle/>
           <a:p>
             <a:pPr algn="ctr"/>
+            <a:endParaRPr/>
           </a:p>
         </p:txBody>
       </p:sp>
@@ -16936,6 +17175,7 @@
           <a:lstStyle/>
           <a:p>
             <a:pPr algn="ctr"/>
+            <a:endParaRPr/>
           </a:p>
         </p:txBody>
       </p:sp>
@@ -16956,7 +17196,7 @@
           <a:noFill/>
         </p:spPr>
         <p:txBody>
-          <a:bodyPr wrap="square" lIns="36576" rIns="36576" tIns="36576" bIns="36576" anchor="t">
+          <a:bodyPr wrap="square" lIns="36576" tIns="36576" rIns="36576" bIns="36576" anchor="t">
             <a:spAutoFit/>
           </a:bodyPr>
           <a:lstStyle/>
@@ -16991,7 +17231,7 @@
           <a:noFill/>
         </p:spPr>
         <p:txBody>
-          <a:bodyPr wrap="square" lIns="36576" rIns="36576" tIns="36576" bIns="36576" anchor="t">
+          <a:bodyPr wrap="square" lIns="36576" tIns="36576" rIns="36576" bIns="36576" anchor="t">
             <a:spAutoFit/>
           </a:bodyPr>
           <a:lstStyle/>
@@ -17026,7 +17266,7 @@
           <a:noFill/>
         </p:spPr>
         <p:txBody>
-          <a:bodyPr wrap="square" lIns="36576" rIns="36576" tIns="36576" bIns="36576" anchor="t">
+          <a:bodyPr wrap="square" lIns="36576" tIns="36576" rIns="36576" bIns="36576" anchor="t">
             <a:spAutoFit/>
           </a:bodyPr>
           <a:lstStyle/>
@@ -17086,6 +17326,7 @@
           <a:lstStyle/>
           <a:p>
             <a:pPr algn="ctr"/>
+            <a:endParaRPr/>
           </a:p>
         </p:txBody>
       </p:sp>
@@ -17129,6 +17370,7 @@
           <a:lstStyle/>
           <a:p>
             <a:pPr algn="ctr"/>
+            <a:endParaRPr/>
           </a:p>
         </p:txBody>
       </p:sp>
@@ -17149,7 +17391,7 @@
           <a:noFill/>
         </p:spPr>
         <p:txBody>
-          <a:bodyPr wrap="square" lIns="36576" rIns="36576" tIns="36576" bIns="36576" anchor="t">
+          <a:bodyPr wrap="square" lIns="36576" tIns="36576" rIns="36576" bIns="36576" anchor="t">
             <a:spAutoFit/>
           </a:bodyPr>
           <a:lstStyle/>
@@ -17184,7 +17426,7 @@
           <a:noFill/>
         </p:spPr>
         <p:txBody>
-          <a:bodyPr wrap="square" lIns="36576" rIns="36576" tIns="36576" bIns="36576" anchor="t">
+          <a:bodyPr wrap="square" lIns="36576" tIns="36576" rIns="36576" bIns="36576" anchor="t">
             <a:spAutoFit/>
           </a:bodyPr>
           <a:lstStyle/>
@@ -17219,7 +17461,7 @@
           <a:noFill/>
         </p:spPr>
         <p:txBody>
-          <a:bodyPr wrap="square" lIns="36576" rIns="36576" tIns="36576" bIns="36576" anchor="t">
+          <a:bodyPr wrap="square" lIns="36576" tIns="36576" rIns="36576" bIns="36576" anchor="t">
             <a:spAutoFit/>
           </a:bodyPr>
           <a:lstStyle/>
@@ -17279,6 +17521,7 @@
           <a:lstStyle/>
           <a:p>
             <a:pPr algn="ctr"/>
+            <a:endParaRPr/>
           </a:p>
         </p:txBody>
       </p:sp>
@@ -17322,6 +17565,7 @@
           <a:lstStyle/>
           <a:p>
             <a:pPr algn="ctr"/>
+            <a:endParaRPr/>
           </a:p>
         </p:txBody>
       </p:sp>
@@ -17342,7 +17586,7 @@
           <a:noFill/>
         </p:spPr>
         <p:txBody>
-          <a:bodyPr wrap="square" lIns="36576" rIns="36576" tIns="36576" bIns="36576" anchor="t">
+          <a:bodyPr wrap="square" lIns="36576" tIns="36576" rIns="36576" bIns="36576" anchor="t">
             <a:spAutoFit/>
           </a:bodyPr>
           <a:lstStyle/>
@@ -17377,7 +17621,7 @@
           <a:noFill/>
         </p:spPr>
         <p:txBody>
-          <a:bodyPr wrap="square" lIns="36576" rIns="36576" tIns="36576" bIns="36576" anchor="t">
+          <a:bodyPr wrap="square" lIns="36576" tIns="36576" rIns="36576" bIns="36576" anchor="t">
             <a:spAutoFit/>
           </a:bodyPr>
           <a:lstStyle/>
@@ -17437,6 +17681,7 @@
           <a:lstStyle/>
           <a:p>
             <a:pPr algn="ctr"/>
+            <a:endParaRPr/>
           </a:p>
         </p:txBody>
       </p:sp>
@@ -17480,6 +17725,7 @@
           <a:lstStyle/>
           <a:p>
             <a:pPr algn="ctr"/>
+            <a:endParaRPr/>
           </a:p>
         </p:txBody>
       </p:sp>
@@ -17500,7 +17746,7 @@
           <a:noFill/>
         </p:spPr>
         <p:txBody>
-          <a:bodyPr wrap="square" lIns="36576" rIns="36576" tIns="36576" bIns="36576" anchor="t">
+          <a:bodyPr wrap="square" lIns="36576" tIns="36576" rIns="36576" bIns="36576" anchor="t">
             <a:spAutoFit/>
           </a:bodyPr>
           <a:lstStyle/>
@@ -17535,7 +17781,7 @@
           <a:noFill/>
         </p:spPr>
         <p:txBody>
-          <a:bodyPr wrap="square" lIns="36576" rIns="36576" tIns="36576" bIns="36576" anchor="t">
+          <a:bodyPr wrap="square" lIns="36576" tIns="36576" rIns="36576" bIns="36576" anchor="t">
             <a:spAutoFit/>
           </a:bodyPr>
           <a:lstStyle/>
@@ -17595,6 +17841,7 @@
           <a:lstStyle/>
           <a:p>
             <a:pPr algn="ctr"/>
+            <a:endParaRPr/>
           </a:p>
         </p:txBody>
       </p:sp>
@@ -17638,6 +17885,7 @@
           <a:lstStyle/>
           <a:p>
             <a:pPr algn="ctr"/>
+            <a:endParaRPr/>
           </a:p>
         </p:txBody>
       </p:sp>
@@ -17658,7 +17906,7 @@
           <a:noFill/>
         </p:spPr>
         <p:txBody>
-          <a:bodyPr wrap="square" lIns="36576" rIns="36576" tIns="36576" bIns="36576" anchor="t">
+          <a:bodyPr wrap="square" lIns="36576" tIns="36576" rIns="36576" bIns="36576" anchor="t">
             <a:spAutoFit/>
           </a:bodyPr>
           <a:lstStyle/>
@@ -17693,7 +17941,7 @@
           <a:noFill/>
         </p:spPr>
         <p:txBody>
-          <a:bodyPr wrap="square" lIns="36576" rIns="36576" tIns="36576" bIns="36576" anchor="t">
+          <a:bodyPr wrap="square" lIns="36576" tIns="36576" rIns="36576" bIns="36576" anchor="t">
             <a:spAutoFit/>
           </a:bodyPr>
           <a:lstStyle/>
@@ -17728,7 +17976,7 @@
           <a:noFill/>
         </p:spPr>
         <p:txBody>
-          <a:bodyPr wrap="square" lIns="36576" rIns="36576" tIns="36576" bIns="36576" anchor="t">
+          <a:bodyPr wrap="square" lIns="36576" tIns="36576" rIns="36576" bIns="36576" anchor="t">
             <a:spAutoFit/>
           </a:bodyPr>
           <a:lstStyle/>
@@ -17763,7 +18011,7 @@
           <a:noFill/>
         </p:spPr>
         <p:txBody>
-          <a:bodyPr wrap="square" lIns="36576" rIns="36576" tIns="36576" bIns="36576" anchor="t">
+          <a:bodyPr wrap="square" lIns="36576" tIns="36576" rIns="36576" bIns="36576" anchor="t">
             <a:spAutoFit/>
           </a:bodyPr>
           <a:lstStyle/>
@@ -17790,7 +18038,7 @@
 </file>
 
 <file path=ppt/slides/slide28.xml><?xml version="1.0" encoding="utf-8"?>
-<p:sld xmlns:a="http://schemas.openxmlformats.org/drawingml/2006/main" xmlns:p="http://schemas.openxmlformats.org/presentationml/2006/main" xmlns:r="http://schemas.openxmlformats.org/officeDocument/2006/relationships">
+<p:sld xmlns:a="http://schemas.openxmlformats.org/drawingml/2006/main" xmlns:r="http://schemas.openxmlformats.org/officeDocument/2006/relationships" xmlns:p="http://schemas.openxmlformats.org/presentationml/2006/main">
   <p:cSld>
     <p:bg>
       <p:bgPr>
@@ -17806,7 +18054,14 @@
         <p:cNvGrpSpPr/>
         <p:nvPr/>
       </p:nvGrpSpPr>
-      <p:grpSpPr/>
+      <p:grpSpPr>
+        <a:xfrm>
+          <a:off x="0" y="0"/>
+          <a:ext cx="0" cy="0"/>
+          <a:chOff x="0" y="0"/>
+          <a:chExt cx="0" cy="0"/>
+        </a:xfrm>
+      </p:grpSpPr>
       <p:sp>
         <p:nvSpPr>
           <p:cNvPr id="2" name="TextBox 1"/>
@@ -17824,7 +18079,7 @@
           <a:noFill/>
         </p:spPr>
         <p:txBody>
-          <a:bodyPr wrap="square" lIns="36576" rIns="36576" tIns="36576" bIns="36576" anchor="t">
+          <a:bodyPr wrap="square" lIns="36576" tIns="36576" rIns="36576" bIns="36576" anchor="t">
             <a:spAutoFit/>
           </a:bodyPr>
           <a:lstStyle/>
@@ -17859,7 +18114,7 @@
           <a:noFill/>
         </p:spPr>
         <p:txBody>
-          <a:bodyPr wrap="square" lIns="36576" rIns="36576" tIns="36576" bIns="36576" anchor="t">
+          <a:bodyPr wrap="square" lIns="36576" tIns="36576" rIns="36576" bIns="36576" anchor="t">
             <a:spAutoFit/>
           </a:bodyPr>
           <a:lstStyle/>
@@ -17929,7 +18184,7 @@
           <a:noFill/>
         </p:spPr>
         <p:txBody>
-          <a:bodyPr wrap="square" lIns="36576" rIns="36576" tIns="36576" bIns="36576" anchor="t">
+          <a:bodyPr wrap="square" lIns="36576" tIns="36576" rIns="36576" bIns="36576" anchor="t">
             <a:spAutoFit/>
           </a:bodyPr>
           <a:lstStyle/>
@@ -17989,6 +18244,7 @@
           <a:lstStyle/>
           <a:p>
             <a:pPr algn="ctr"/>
+            <a:endParaRPr/>
           </a:p>
         </p:txBody>
       </p:sp>
@@ -18009,7 +18265,7 @@
           <a:noFill/>
         </p:spPr>
         <p:txBody>
-          <a:bodyPr wrap="square" lIns="36576" rIns="36576" tIns="36576" bIns="36576" anchor="t">
+          <a:bodyPr wrap="square" lIns="36576" tIns="36576" rIns="36576" bIns="36576" anchor="t">
             <a:spAutoFit/>
           </a:bodyPr>
           <a:lstStyle/>
@@ -18069,6 +18325,7 @@
           <a:lstStyle/>
           <a:p>
             <a:pPr algn="ctr"/>
+            <a:endParaRPr/>
           </a:p>
         </p:txBody>
       </p:sp>
@@ -18089,7 +18346,7 @@
           <a:noFill/>
         </p:spPr>
         <p:txBody>
-          <a:bodyPr wrap="square" lIns="36576" rIns="36576" tIns="36576" bIns="36576" anchor="t">
+          <a:bodyPr wrap="square" lIns="36576" tIns="36576" rIns="36576" bIns="36576" anchor="t">
             <a:spAutoFit/>
           </a:bodyPr>
           <a:lstStyle/>
@@ -18149,6 +18406,7 @@
           <a:lstStyle/>
           <a:p>
             <a:pPr algn="ctr"/>
+            <a:endParaRPr/>
           </a:p>
         </p:txBody>
       </p:sp>
@@ -18169,7 +18427,7 @@
           <a:noFill/>
         </p:spPr>
         <p:txBody>
-          <a:bodyPr wrap="square" lIns="36576" rIns="36576" tIns="36576" bIns="36576" anchor="t">
+          <a:bodyPr wrap="square" lIns="36576" tIns="36576" rIns="36576" bIns="36576" anchor="t">
             <a:spAutoFit/>
           </a:bodyPr>
           <a:lstStyle/>
@@ -18229,6 +18487,7 @@
           <a:lstStyle/>
           <a:p>
             <a:pPr algn="ctr"/>
+            <a:endParaRPr/>
           </a:p>
         </p:txBody>
       </p:sp>
@@ -18249,7 +18508,7 @@
           <a:noFill/>
         </p:spPr>
         <p:txBody>
-          <a:bodyPr wrap="square" lIns="36576" rIns="36576" tIns="36576" bIns="36576" anchor="t">
+          <a:bodyPr wrap="square" lIns="36576" tIns="36576" rIns="36576" bIns="36576" anchor="t">
             <a:spAutoFit/>
           </a:bodyPr>
           <a:lstStyle/>
@@ -18309,6 +18568,7 @@
           <a:lstStyle/>
           <a:p>
             <a:pPr algn="ctr"/>
+            <a:endParaRPr/>
           </a:p>
         </p:txBody>
       </p:sp>
@@ -18329,7 +18589,7 @@
           <a:noFill/>
         </p:spPr>
         <p:txBody>
-          <a:bodyPr wrap="square" lIns="36576" rIns="36576" tIns="36576" bIns="36576" anchor="ctr">
+          <a:bodyPr wrap="square" lIns="36576" tIns="36576" rIns="36576" bIns="36576" anchor="ctr">
             <a:spAutoFit/>
           </a:bodyPr>
           <a:lstStyle/>
@@ -18389,6 +18649,7 @@
           <a:lstStyle/>
           <a:p>
             <a:pPr algn="ctr"/>
+            <a:endParaRPr/>
           </a:p>
         </p:txBody>
       </p:sp>
@@ -18409,7 +18670,7 @@
           <a:noFill/>
         </p:spPr>
         <p:txBody>
-          <a:bodyPr wrap="square" lIns="36576" rIns="36576" tIns="36576" bIns="36576" anchor="ctr">
+          <a:bodyPr wrap="square" lIns="36576" tIns="36576" rIns="36576" bIns="36576" anchor="ctr">
             <a:spAutoFit/>
           </a:bodyPr>
           <a:lstStyle/>
@@ -18469,6 +18730,7 @@
           <a:lstStyle/>
           <a:p>
             <a:pPr algn="ctr"/>
+            <a:endParaRPr/>
           </a:p>
         </p:txBody>
       </p:sp>
@@ -18489,7 +18751,7 @@
           <a:noFill/>
         </p:spPr>
         <p:txBody>
-          <a:bodyPr wrap="square" lIns="36576" rIns="36576" tIns="36576" bIns="36576" anchor="ctr">
+          <a:bodyPr wrap="square" lIns="36576" tIns="36576" rIns="36576" bIns="36576" anchor="ctr">
             <a:spAutoFit/>
           </a:bodyPr>
           <a:lstStyle/>
@@ -18549,6 +18811,7 @@
           <a:lstStyle/>
           <a:p>
             <a:pPr algn="ctr"/>
+            <a:endParaRPr/>
           </a:p>
         </p:txBody>
       </p:sp>
@@ -18569,7 +18832,7 @@
           <a:noFill/>
         </p:spPr>
         <p:txBody>
-          <a:bodyPr wrap="square" lIns="36576" rIns="36576" tIns="36576" bIns="36576" anchor="ctr">
+          <a:bodyPr wrap="square" lIns="36576" tIns="36576" rIns="36576" bIns="36576" anchor="ctr">
             <a:spAutoFit/>
           </a:bodyPr>
           <a:lstStyle/>
@@ -18629,6 +18892,7 @@
           <a:lstStyle/>
           <a:p>
             <a:pPr algn="ctr"/>
+            <a:endParaRPr/>
           </a:p>
         </p:txBody>
       </p:sp>
@@ -18649,7 +18913,7 @@
           <a:noFill/>
         </p:spPr>
         <p:txBody>
-          <a:bodyPr wrap="square" lIns="36576" rIns="36576" tIns="36576" bIns="36576" anchor="ctr">
+          <a:bodyPr wrap="square" lIns="36576" tIns="36576" rIns="36576" bIns="36576" anchor="ctr">
             <a:spAutoFit/>
           </a:bodyPr>
           <a:lstStyle/>
@@ -18709,6 +18973,7 @@
           <a:lstStyle/>
           <a:p>
             <a:pPr algn="ctr"/>
+            <a:endParaRPr/>
           </a:p>
         </p:txBody>
       </p:sp>
@@ -18729,7 +18994,7 @@
           <a:noFill/>
         </p:spPr>
         <p:txBody>
-          <a:bodyPr wrap="square" lIns="36576" rIns="36576" tIns="36576" bIns="36576" anchor="ctr">
+          <a:bodyPr wrap="square" lIns="36576" tIns="36576" rIns="36576" bIns="36576" anchor="ctr">
             <a:spAutoFit/>
           </a:bodyPr>
           <a:lstStyle/>
@@ -18789,6 +19054,7 @@
           <a:lstStyle/>
           <a:p>
             <a:pPr algn="ctr"/>
+            <a:endParaRPr/>
           </a:p>
         </p:txBody>
       </p:sp>
@@ -18809,7 +19075,7 @@
           <a:noFill/>
         </p:spPr>
         <p:txBody>
-          <a:bodyPr wrap="square" lIns="36576" rIns="36576" tIns="36576" bIns="36576" anchor="ctr">
+          <a:bodyPr wrap="square" lIns="36576" tIns="36576" rIns="36576" bIns="36576" anchor="ctr">
             <a:spAutoFit/>
           </a:bodyPr>
           <a:lstStyle/>
@@ -18869,6 +19135,7 @@
           <a:lstStyle/>
           <a:p>
             <a:pPr algn="ctr"/>
+            <a:endParaRPr/>
           </a:p>
         </p:txBody>
       </p:sp>
@@ -18889,7 +19156,7 @@
           <a:noFill/>
         </p:spPr>
         <p:txBody>
-          <a:bodyPr wrap="square" lIns="36576" rIns="36576" tIns="36576" bIns="36576" anchor="ctr">
+          <a:bodyPr wrap="square" lIns="36576" tIns="36576" rIns="36576" bIns="36576" anchor="ctr">
             <a:spAutoFit/>
           </a:bodyPr>
           <a:lstStyle/>
@@ -18949,6 +19216,7 @@
           <a:lstStyle/>
           <a:p>
             <a:pPr algn="ctr"/>
+            <a:endParaRPr/>
           </a:p>
         </p:txBody>
       </p:sp>
@@ -18969,7 +19237,7 @@
           <a:noFill/>
         </p:spPr>
         <p:txBody>
-          <a:bodyPr wrap="square" lIns="36576" rIns="36576" tIns="36576" bIns="36576" anchor="ctr">
+          <a:bodyPr wrap="square" lIns="36576" tIns="36576" rIns="36576" bIns="36576" anchor="ctr">
             <a:spAutoFit/>
           </a:bodyPr>
           <a:lstStyle/>
@@ -19029,6 +19297,7 @@
           <a:lstStyle/>
           <a:p>
             <a:pPr algn="ctr"/>
+            <a:endParaRPr/>
           </a:p>
         </p:txBody>
       </p:sp>
@@ -19049,7 +19318,7 @@
           <a:noFill/>
         </p:spPr>
         <p:txBody>
-          <a:bodyPr wrap="square" lIns="36576" rIns="36576" tIns="36576" bIns="36576" anchor="ctr">
+          <a:bodyPr wrap="square" lIns="36576" tIns="36576" rIns="36576" bIns="36576" anchor="ctr">
             <a:spAutoFit/>
           </a:bodyPr>
           <a:lstStyle/>
@@ -19109,6 +19378,7 @@
           <a:lstStyle/>
           <a:p>
             <a:pPr algn="ctr"/>
+            <a:endParaRPr/>
           </a:p>
         </p:txBody>
       </p:sp>
@@ -19129,7 +19399,7 @@
           <a:noFill/>
         </p:spPr>
         <p:txBody>
-          <a:bodyPr wrap="square" lIns="36576" rIns="36576" tIns="36576" bIns="36576" anchor="ctr">
+          <a:bodyPr wrap="square" lIns="36576" tIns="36576" rIns="36576" bIns="36576" anchor="ctr">
             <a:spAutoFit/>
           </a:bodyPr>
           <a:lstStyle/>
@@ -19189,6 +19459,7 @@
           <a:lstStyle/>
           <a:p>
             <a:pPr algn="ctr"/>
+            <a:endParaRPr/>
           </a:p>
         </p:txBody>
       </p:sp>
@@ -19209,7 +19480,7 @@
           <a:noFill/>
         </p:spPr>
         <p:txBody>
-          <a:bodyPr wrap="square" lIns="36576" rIns="36576" tIns="36576" bIns="36576" anchor="ctr">
+          <a:bodyPr wrap="square" lIns="36576" tIns="36576" rIns="36576" bIns="36576" anchor="ctr">
             <a:spAutoFit/>
           </a:bodyPr>
           <a:lstStyle/>
@@ -19269,6 +19540,7 @@
           <a:lstStyle/>
           <a:p>
             <a:pPr algn="ctr"/>
+            <a:endParaRPr/>
           </a:p>
         </p:txBody>
       </p:sp>
@@ -19289,7 +19561,7 @@
           <a:noFill/>
         </p:spPr>
         <p:txBody>
-          <a:bodyPr wrap="square" lIns="36576" rIns="36576" tIns="36576" bIns="36576" anchor="ctr">
+          <a:bodyPr wrap="square" lIns="36576" tIns="36576" rIns="36576" bIns="36576" anchor="ctr">
             <a:spAutoFit/>
           </a:bodyPr>
           <a:lstStyle/>
@@ -19349,6 +19621,7 @@
           <a:lstStyle/>
           <a:p>
             <a:pPr algn="ctr"/>
+            <a:endParaRPr/>
           </a:p>
         </p:txBody>
       </p:sp>
@@ -19369,7 +19642,7 @@
           <a:noFill/>
         </p:spPr>
         <p:txBody>
-          <a:bodyPr wrap="square" lIns="36576" rIns="36576" tIns="36576" bIns="36576" anchor="ctr">
+          <a:bodyPr wrap="square" lIns="36576" tIns="36576" rIns="36576" bIns="36576" anchor="ctr">
             <a:spAutoFit/>
           </a:bodyPr>
           <a:lstStyle/>
@@ -19429,6 +19702,7 @@
           <a:lstStyle/>
           <a:p>
             <a:pPr algn="ctr"/>
+            <a:endParaRPr/>
           </a:p>
         </p:txBody>
       </p:sp>
@@ -19449,7 +19723,7 @@
           <a:noFill/>
         </p:spPr>
         <p:txBody>
-          <a:bodyPr wrap="square" lIns="36576" rIns="36576" tIns="36576" bIns="36576" anchor="ctr">
+          <a:bodyPr wrap="square" lIns="36576" tIns="36576" rIns="36576" bIns="36576" anchor="ctr">
             <a:spAutoFit/>
           </a:bodyPr>
           <a:lstStyle/>
@@ -19509,6 +19783,7 @@
           <a:lstStyle/>
           <a:p>
             <a:pPr algn="ctr"/>
+            <a:endParaRPr/>
           </a:p>
         </p:txBody>
       </p:sp>
@@ -19529,7 +19804,7 @@
           <a:noFill/>
         </p:spPr>
         <p:txBody>
-          <a:bodyPr wrap="square" lIns="36576" rIns="36576" tIns="36576" bIns="36576" anchor="ctr">
+          <a:bodyPr wrap="square" lIns="36576" tIns="36576" rIns="36576" bIns="36576" anchor="ctr">
             <a:spAutoFit/>
           </a:bodyPr>
           <a:lstStyle/>
@@ -19564,7 +19839,7 @@
           <a:noFill/>
         </p:spPr>
         <p:txBody>
-          <a:bodyPr wrap="square" lIns="36576" rIns="36576" tIns="36576" bIns="36576" anchor="t">
+          <a:bodyPr wrap="square" lIns="36576" tIns="36576" rIns="36576" bIns="36576" anchor="t">
             <a:spAutoFit/>
           </a:bodyPr>
           <a:lstStyle/>
@@ -19599,7 +19874,7 @@
           <a:noFill/>
         </p:spPr>
         <p:txBody>
-          <a:bodyPr wrap="square" lIns="36576" rIns="36576" tIns="36576" bIns="36576" anchor="t">
+          <a:bodyPr wrap="square" lIns="36576" tIns="36576" rIns="36576" bIns="36576" anchor="t">
             <a:spAutoFit/>
           </a:bodyPr>
           <a:lstStyle/>
@@ -19626,7 +19901,7 @@
 </file>
 
 <file path=ppt/slides/slide29.xml><?xml version="1.0" encoding="utf-8"?>
-<p:sld xmlns:a="http://schemas.openxmlformats.org/drawingml/2006/main" xmlns:p="http://schemas.openxmlformats.org/presentationml/2006/main" xmlns:r="http://schemas.openxmlformats.org/officeDocument/2006/relationships">
+<p:sld xmlns:a="http://schemas.openxmlformats.org/drawingml/2006/main" xmlns:r="http://schemas.openxmlformats.org/officeDocument/2006/relationships" xmlns:p="http://schemas.openxmlformats.org/presentationml/2006/main">
   <p:cSld>
     <p:bg>
       <p:bgPr>
@@ -19642,7 +19917,14 @@
         <p:cNvGrpSpPr/>
         <p:nvPr/>
       </p:nvGrpSpPr>
-      <p:grpSpPr/>
+      <p:grpSpPr>
+        <a:xfrm>
+          <a:off x="0" y="0"/>
+          <a:ext cx="0" cy="0"/>
+          <a:chOff x="0" y="0"/>
+          <a:chExt cx="0" cy="0"/>
+        </a:xfrm>
+      </p:grpSpPr>
       <p:sp>
         <p:nvSpPr>
           <p:cNvPr id="2" name="TextBox 1"/>
@@ -19660,7 +19942,7 @@
           <a:noFill/>
         </p:spPr>
         <p:txBody>
-          <a:bodyPr wrap="square" lIns="36576" rIns="36576" tIns="36576" bIns="36576" anchor="t">
+          <a:bodyPr wrap="square" lIns="36576" tIns="36576" rIns="36576" bIns="36576" anchor="t">
             <a:spAutoFit/>
           </a:bodyPr>
           <a:lstStyle/>
@@ -19695,7 +19977,7 @@
           <a:noFill/>
         </p:spPr>
         <p:txBody>
-          <a:bodyPr wrap="square" lIns="36576" rIns="36576" tIns="36576" bIns="36576" anchor="t">
+          <a:bodyPr wrap="square" lIns="36576" tIns="36576" rIns="36576" bIns="36576" anchor="t">
             <a:spAutoFit/>
           </a:bodyPr>
           <a:lstStyle/>
@@ -19765,7 +20047,7 @@
           <a:noFill/>
         </p:spPr>
         <p:txBody>
-          <a:bodyPr wrap="square" lIns="36576" rIns="36576" tIns="36576" bIns="36576" anchor="t">
+          <a:bodyPr wrap="square" lIns="36576" tIns="36576" rIns="36576" bIns="36576" anchor="t">
             <a:spAutoFit/>
           </a:bodyPr>
           <a:lstStyle/>
@@ -19825,6 +20107,7 @@
           <a:lstStyle/>
           <a:p>
             <a:pPr algn="ctr"/>
+            <a:endParaRPr/>
           </a:p>
         </p:txBody>
       </p:sp>
@@ -19868,6 +20151,7 @@
           <a:lstStyle/>
           <a:p>
             <a:pPr algn="ctr"/>
+            <a:endParaRPr/>
           </a:p>
         </p:txBody>
       </p:sp>
@@ -19888,7 +20172,7 @@
           <a:noFill/>
         </p:spPr>
         <p:txBody>
-          <a:bodyPr wrap="square" lIns="36576" rIns="36576" tIns="36576" bIns="36576" anchor="t">
+          <a:bodyPr wrap="square" lIns="36576" tIns="36576" rIns="36576" bIns="36576" anchor="t">
             <a:spAutoFit/>
           </a:bodyPr>
           <a:lstStyle/>
@@ -19923,7 +20207,7 @@
           <a:noFill/>
         </p:spPr>
         <p:txBody>
-          <a:bodyPr wrap="square" lIns="36576" rIns="36576" tIns="36576" bIns="36576" anchor="t">
+          <a:bodyPr wrap="square" lIns="36576" tIns="36576" rIns="36576" bIns="36576" anchor="t">
             <a:spAutoFit/>
           </a:bodyPr>
           <a:lstStyle/>
@@ -19983,6 +20267,7 @@
           <a:lstStyle/>
           <a:p>
             <a:pPr algn="ctr"/>
+            <a:endParaRPr/>
           </a:p>
         </p:txBody>
       </p:sp>
@@ -20026,6 +20311,7 @@
           <a:lstStyle/>
           <a:p>
             <a:pPr algn="ctr"/>
+            <a:endParaRPr/>
           </a:p>
         </p:txBody>
       </p:sp>
@@ -20046,7 +20332,7 @@
           <a:noFill/>
         </p:spPr>
         <p:txBody>
-          <a:bodyPr wrap="square" lIns="36576" rIns="36576" tIns="36576" bIns="36576" anchor="t">
+          <a:bodyPr wrap="square" lIns="36576" tIns="36576" rIns="36576" bIns="36576" anchor="t">
             <a:spAutoFit/>
           </a:bodyPr>
           <a:lstStyle/>
@@ -20081,7 +20367,7 @@
           <a:noFill/>
         </p:spPr>
         <p:txBody>
-          <a:bodyPr wrap="square" lIns="36576" rIns="36576" tIns="36576" bIns="36576" anchor="t">
+          <a:bodyPr wrap="square" lIns="36576" tIns="36576" rIns="36576" bIns="36576" anchor="t">
             <a:spAutoFit/>
           </a:bodyPr>
           <a:lstStyle/>
@@ -20141,6 +20427,7 @@
           <a:lstStyle/>
           <a:p>
             <a:pPr algn="ctr"/>
+            <a:endParaRPr/>
           </a:p>
         </p:txBody>
       </p:sp>
@@ -20184,6 +20471,7 @@
           <a:lstStyle/>
           <a:p>
             <a:pPr algn="ctr"/>
+            <a:endParaRPr/>
           </a:p>
         </p:txBody>
       </p:sp>
@@ -20204,7 +20492,7 @@
           <a:noFill/>
         </p:spPr>
         <p:txBody>
-          <a:bodyPr wrap="square" lIns="36576" rIns="36576" tIns="36576" bIns="36576" anchor="t">
+          <a:bodyPr wrap="square" lIns="36576" tIns="36576" rIns="36576" bIns="36576" anchor="t">
             <a:spAutoFit/>
           </a:bodyPr>
           <a:lstStyle/>
@@ -20239,7 +20527,7 @@
           <a:noFill/>
         </p:spPr>
         <p:txBody>
-          <a:bodyPr wrap="square" lIns="36576" rIns="36576" tIns="36576" bIns="36576" anchor="t">
+          <a:bodyPr wrap="square" lIns="36576" tIns="36576" rIns="36576" bIns="36576" anchor="t">
             <a:spAutoFit/>
           </a:bodyPr>
           <a:lstStyle/>
@@ -20299,6 +20587,7 @@
           <a:lstStyle/>
           <a:p>
             <a:pPr algn="ctr"/>
+            <a:endParaRPr/>
           </a:p>
         </p:txBody>
       </p:sp>
@@ -20342,6 +20631,7 @@
           <a:lstStyle/>
           <a:p>
             <a:pPr algn="ctr"/>
+            <a:endParaRPr/>
           </a:p>
         </p:txBody>
       </p:sp>
@@ -20362,7 +20652,7 @@
           <a:noFill/>
         </p:spPr>
         <p:txBody>
-          <a:bodyPr wrap="square" lIns="36576" rIns="36576" tIns="36576" bIns="36576" anchor="t">
+          <a:bodyPr wrap="square" lIns="36576" tIns="36576" rIns="36576" bIns="36576" anchor="t">
             <a:spAutoFit/>
           </a:bodyPr>
           <a:lstStyle/>
@@ -20397,7 +20687,7 @@
           <a:noFill/>
         </p:spPr>
         <p:txBody>
-          <a:bodyPr wrap="square" lIns="36576" rIns="36576" tIns="36576" bIns="36576" anchor="t">
+          <a:bodyPr wrap="square" lIns="36576" tIns="36576" rIns="36576" bIns="36576" anchor="t">
             <a:spAutoFit/>
           </a:bodyPr>
           <a:lstStyle/>
@@ -20432,7 +20722,7 @@
           <a:noFill/>
         </p:spPr>
         <p:txBody>
-          <a:bodyPr wrap="square" lIns="36576" rIns="36576" tIns="36576" bIns="36576" anchor="t">
+          <a:bodyPr wrap="square" lIns="36576" tIns="36576" rIns="36576" bIns="36576" anchor="t">
             <a:spAutoFit/>
           </a:bodyPr>
           <a:lstStyle/>
@@ -20467,7 +20757,7 @@
           <a:noFill/>
         </p:spPr>
         <p:txBody>
-          <a:bodyPr wrap="square" lIns="36576" rIns="36576" tIns="36576" bIns="36576" anchor="t">
+          <a:bodyPr wrap="square" lIns="36576" tIns="36576" rIns="36576" bIns="36576" anchor="t">
             <a:spAutoFit/>
           </a:bodyPr>
           <a:lstStyle/>
@@ -20502,7 +20792,7 @@
           <a:noFill/>
         </p:spPr>
         <p:txBody>
-          <a:bodyPr wrap="square" lIns="36576" rIns="36576" tIns="36576" bIns="36576" anchor="t">
+          <a:bodyPr wrap="square" lIns="36576" tIns="36576" rIns="36576" bIns="36576" anchor="t">
             <a:spAutoFit/>
           </a:bodyPr>
           <a:lstStyle/>
@@ -20529,7 +20819,7 @@
 </file>
 
 <file path=ppt/slides/slide3.xml><?xml version="1.0" encoding="utf-8"?>
-<p:sld xmlns:a="http://schemas.openxmlformats.org/drawingml/2006/main" xmlns:p="http://schemas.openxmlformats.org/presentationml/2006/main" xmlns:r="http://schemas.openxmlformats.org/officeDocument/2006/relationships">
+<p:sld xmlns:a="http://schemas.openxmlformats.org/drawingml/2006/main" xmlns:r="http://schemas.openxmlformats.org/officeDocument/2006/relationships" xmlns:p="http://schemas.openxmlformats.org/presentationml/2006/main">
   <p:cSld>
     <p:bg>
       <p:bgPr>
@@ -20545,7 +20835,14 @@
         <p:cNvGrpSpPr/>
         <p:nvPr/>
       </p:nvGrpSpPr>
-      <p:grpSpPr/>
+      <p:grpSpPr>
+        <a:xfrm>
+          <a:off x="0" y="0"/>
+          <a:ext cx="0" cy="0"/>
+          <a:chOff x="0" y="0"/>
+          <a:chExt cx="0" cy="0"/>
+        </a:xfrm>
+      </p:grpSpPr>
       <p:sp>
         <p:nvSpPr>
           <p:cNvPr id="2" name="TextBox 1"/>
@@ -20563,7 +20860,7 @@
           <a:noFill/>
         </p:spPr>
         <p:txBody>
-          <a:bodyPr wrap="square" lIns="36576" rIns="36576" tIns="36576" bIns="36576" anchor="t">
+          <a:bodyPr wrap="square" lIns="36576" tIns="36576" rIns="36576" bIns="36576" anchor="t">
             <a:spAutoFit/>
           </a:bodyPr>
           <a:lstStyle/>
@@ -20598,7 +20895,7 @@
           <a:noFill/>
         </p:spPr>
         <p:txBody>
-          <a:bodyPr wrap="square" lIns="36576" rIns="36576" tIns="36576" bIns="36576" anchor="t">
+          <a:bodyPr wrap="square" lIns="36576" tIns="36576" rIns="36576" bIns="36576" anchor="t">
             <a:spAutoFit/>
           </a:bodyPr>
           <a:lstStyle/>
@@ -20668,7 +20965,7 @@
           <a:noFill/>
         </p:spPr>
         <p:txBody>
-          <a:bodyPr wrap="square" lIns="36576" rIns="36576" tIns="36576" bIns="36576" anchor="t">
+          <a:bodyPr wrap="square" lIns="36576" tIns="36576" rIns="36576" bIns="36576" anchor="t">
             <a:spAutoFit/>
           </a:bodyPr>
           <a:lstStyle/>
@@ -20728,6 +21025,7 @@
           <a:lstStyle/>
           <a:p>
             <a:pPr algn="ctr"/>
+            <a:endParaRPr/>
           </a:p>
         </p:txBody>
       </p:sp>
@@ -20771,6 +21069,7 @@
           <a:lstStyle/>
           <a:p>
             <a:pPr algn="ctr"/>
+            <a:endParaRPr/>
           </a:p>
         </p:txBody>
       </p:sp>
@@ -20791,7 +21090,7 @@
           <a:noFill/>
         </p:spPr>
         <p:txBody>
-          <a:bodyPr wrap="square" lIns="36576" rIns="36576" tIns="36576" bIns="36576" anchor="t">
+          <a:bodyPr wrap="square" lIns="36576" tIns="36576" rIns="36576" bIns="36576" anchor="t">
             <a:spAutoFit/>
           </a:bodyPr>
           <a:lstStyle/>
@@ -20826,7 +21125,7 @@
           <a:noFill/>
         </p:spPr>
         <p:txBody>
-          <a:bodyPr wrap="square" lIns="36576" rIns="36576" tIns="36576" bIns="36576" anchor="t">
+          <a:bodyPr wrap="square" lIns="36576" tIns="36576" rIns="36576" bIns="36576" anchor="t">
             <a:spAutoFit/>
           </a:bodyPr>
           <a:lstStyle/>
@@ -20886,6 +21185,7 @@
           <a:lstStyle/>
           <a:p>
             <a:pPr algn="ctr"/>
+            <a:endParaRPr/>
           </a:p>
         </p:txBody>
       </p:sp>
@@ -20929,6 +21229,7 @@
           <a:lstStyle/>
           <a:p>
             <a:pPr algn="ctr"/>
+            <a:endParaRPr/>
           </a:p>
         </p:txBody>
       </p:sp>
@@ -20949,7 +21250,7 @@
           <a:noFill/>
         </p:spPr>
         <p:txBody>
-          <a:bodyPr wrap="square" lIns="36576" rIns="36576" tIns="36576" bIns="36576" anchor="t">
+          <a:bodyPr wrap="square" lIns="36576" tIns="36576" rIns="36576" bIns="36576" anchor="t">
             <a:spAutoFit/>
           </a:bodyPr>
           <a:lstStyle/>
@@ -20984,7 +21285,7 @@
           <a:noFill/>
         </p:spPr>
         <p:txBody>
-          <a:bodyPr wrap="square" lIns="36576" rIns="36576" tIns="36576" bIns="36576" anchor="t">
+          <a:bodyPr wrap="square" lIns="36576" tIns="36576" rIns="36576" bIns="36576" anchor="t">
             <a:spAutoFit/>
           </a:bodyPr>
           <a:lstStyle/>
@@ -21044,6 +21345,7 @@
           <a:lstStyle/>
           <a:p>
             <a:pPr algn="ctr"/>
+            <a:endParaRPr/>
           </a:p>
         </p:txBody>
       </p:sp>
@@ -21087,6 +21389,7 @@
           <a:lstStyle/>
           <a:p>
             <a:pPr algn="ctr"/>
+            <a:endParaRPr/>
           </a:p>
         </p:txBody>
       </p:sp>
@@ -21107,7 +21410,7 @@
           <a:noFill/>
         </p:spPr>
         <p:txBody>
-          <a:bodyPr wrap="square" lIns="36576" rIns="36576" tIns="36576" bIns="36576" anchor="t">
+          <a:bodyPr wrap="square" lIns="36576" tIns="36576" rIns="36576" bIns="36576" anchor="t">
             <a:spAutoFit/>
           </a:bodyPr>
           <a:lstStyle/>
@@ -21142,7 +21445,7 @@
           <a:noFill/>
         </p:spPr>
         <p:txBody>
-          <a:bodyPr wrap="square" lIns="36576" rIns="36576" tIns="36576" bIns="36576" anchor="t">
+          <a:bodyPr wrap="square" lIns="36576" tIns="36576" rIns="36576" bIns="36576" anchor="t">
             <a:spAutoFit/>
           </a:bodyPr>
           <a:lstStyle/>
@@ -21201,7 +21504,7 @@
           <a:noFill/>
         </p:spPr>
         <p:txBody>
-          <a:bodyPr wrap="square" lIns="36576" rIns="36576" tIns="36576" bIns="36576" anchor="t">
+          <a:bodyPr wrap="square" lIns="36576" tIns="36576" rIns="36576" bIns="36576" anchor="t">
             <a:spAutoFit/>
           </a:bodyPr>
           <a:lstStyle/>
@@ -21236,7 +21539,7 @@
           <a:noFill/>
         </p:spPr>
         <p:txBody>
-          <a:bodyPr wrap="square" lIns="36576" rIns="36576" tIns="36576" bIns="36576" anchor="t">
+          <a:bodyPr wrap="square" lIns="36576" tIns="36576" rIns="36576" bIns="36576" anchor="t">
             <a:spAutoFit/>
           </a:bodyPr>
           <a:lstStyle/>
@@ -21263,7 +21566,7 @@
 </file>
 
 <file path=ppt/slides/slide30.xml><?xml version="1.0" encoding="utf-8"?>
-<p:sld xmlns:a="http://schemas.openxmlformats.org/drawingml/2006/main" xmlns:p="http://schemas.openxmlformats.org/presentationml/2006/main" xmlns:r="http://schemas.openxmlformats.org/officeDocument/2006/relationships">
+<p:sld xmlns:a="http://schemas.openxmlformats.org/drawingml/2006/main" xmlns:r="http://schemas.openxmlformats.org/officeDocument/2006/relationships" xmlns:p="http://schemas.openxmlformats.org/presentationml/2006/main">
   <p:cSld>
     <p:bg>
       <p:bgPr>
@@ -21279,7 +21582,14 @@
         <p:cNvGrpSpPr/>
         <p:nvPr/>
       </p:nvGrpSpPr>
-      <p:grpSpPr/>
+      <p:grpSpPr>
+        <a:xfrm>
+          <a:off x="0" y="0"/>
+          <a:ext cx="0" cy="0"/>
+          <a:chOff x="0" y="0"/>
+          <a:chExt cx="0" cy="0"/>
+        </a:xfrm>
+      </p:grpSpPr>
       <p:sp>
         <p:nvSpPr>
           <p:cNvPr id="2" name="TextBox 1"/>
@@ -21297,7 +21607,7 @@
           <a:noFill/>
         </p:spPr>
         <p:txBody>
-          <a:bodyPr wrap="square" lIns="36576" rIns="36576" tIns="36576" bIns="36576" anchor="t">
+          <a:bodyPr wrap="square" lIns="36576" tIns="36576" rIns="36576" bIns="36576" anchor="t">
             <a:spAutoFit/>
           </a:bodyPr>
           <a:lstStyle/>
@@ -21332,7 +21642,7 @@
           <a:noFill/>
         </p:spPr>
         <p:txBody>
-          <a:bodyPr wrap="square" lIns="36576" rIns="36576" tIns="36576" bIns="36576" anchor="t">
+          <a:bodyPr wrap="square" lIns="36576" tIns="36576" rIns="36576" bIns="36576" anchor="t">
             <a:spAutoFit/>
           </a:bodyPr>
           <a:lstStyle/>
@@ -21402,7 +21712,7 @@
           <a:noFill/>
         </p:spPr>
         <p:txBody>
-          <a:bodyPr wrap="square" lIns="36576" rIns="36576" tIns="36576" bIns="36576" anchor="t">
+          <a:bodyPr wrap="square" lIns="36576" tIns="36576" rIns="36576" bIns="36576" anchor="t">
             <a:spAutoFit/>
           </a:bodyPr>
           <a:lstStyle/>
@@ -21462,6 +21772,7 @@
           <a:lstStyle/>
           <a:p>
             <a:pPr algn="ctr"/>
+            <a:endParaRPr/>
           </a:p>
         </p:txBody>
       </p:sp>
@@ -21505,6 +21816,7 @@
           <a:lstStyle/>
           <a:p>
             <a:pPr algn="ctr"/>
+            <a:endParaRPr/>
           </a:p>
         </p:txBody>
       </p:sp>
@@ -21525,7 +21837,7 @@
           <a:noFill/>
         </p:spPr>
         <p:txBody>
-          <a:bodyPr wrap="square" lIns="36576" rIns="36576" tIns="36576" bIns="36576" anchor="t">
+          <a:bodyPr wrap="square" lIns="36576" tIns="36576" rIns="36576" bIns="36576" anchor="t">
             <a:spAutoFit/>
           </a:bodyPr>
           <a:lstStyle/>
@@ -21560,7 +21872,7 @@
           <a:noFill/>
         </p:spPr>
         <p:txBody>
-          <a:bodyPr wrap="square" lIns="36576" rIns="36576" tIns="36576" bIns="36576" anchor="t">
+          <a:bodyPr wrap="square" lIns="36576" tIns="36576" rIns="36576" bIns="36576" anchor="t">
             <a:spAutoFit/>
           </a:bodyPr>
           <a:lstStyle/>
@@ -21620,6 +21932,7 @@
           <a:lstStyle/>
           <a:p>
             <a:pPr algn="ctr"/>
+            <a:endParaRPr/>
           </a:p>
         </p:txBody>
       </p:sp>
@@ -21663,6 +21976,7 @@
           <a:lstStyle/>
           <a:p>
             <a:pPr algn="ctr"/>
+            <a:endParaRPr/>
           </a:p>
         </p:txBody>
       </p:sp>
@@ -21683,7 +21997,7 @@
           <a:noFill/>
         </p:spPr>
         <p:txBody>
-          <a:bodyPr wrap="square" lIns="36576" rIns="36576" tIns="36576" bIns="36576" anchor="t">
+          <a:bodyPr wrap="square" lIns="36576" tIns="36576" rIns="36576" bIns="36576" anchor="t">
             <a:spAutoFit/>
           </a:bodyPr>
           <a:lstStyle/>
@@ -21718,7 +22032,7 @@
           <a:noFill/>
         </p:spPr>
         <p:txBody>
-          <a:bodyPr wrap="square" lIns="36576" rIns="36576" tIns="36576" bIns="36576" anchor="t">
+          <a:bodyPr wrap="square" lIns="36576" tIns="36576" rIns="36576" bIns="36576" anchor="t">
             <a:spAutoFit/>
           </a:bodyPr>
           <a:lstStyle/>
@@ -21778,6 +22092,7 @@
           <a:lstStyle/>
           <a:p>
             <a:pPr algn="ctr"/>
+            <a:endParaRPr/>
           </a:p>
         </p:txBody>
       </p:sp>
@@ -21821,6 +22136,7 @@
           <a:lstStyle/>
           <a:p>
             <a:pPr algn="ctr"/>
+            <a:endParaRPr/>
           </a:p>
         </p:txBody>
       </p:sp>
@@ -21841,7 +22157,7 @@
           <a:noFill/>
         </p:spPr>
         <p:txBody>
-          <a:bodyPr wrap="square" lIns="36576" rIns="36576" tIns="36576" bIns="36576" anchor="t">
+          <a:bodyPr wrap="square" lIns="36576" tIns="36576" rIns="36576" bIns="36576" anchor="t">
             <a:spAutoFit/>
           </a:bodyPr>
           <a:lstStyle/>
@@ -21876,7 +22192,7 @@
           <a:noFill/>
         </p:spPr>
         <p:txBody>
-          <a:bodyPr wrap="square" lIns="36576" rIns="36576" tIns="36576" bIns="36576" anchor="t">
+          <a:bodyPr wrap="square" lIns="36576" tIns="36576" rIns="36576" bIns="36576" anchor="t">
             <a:spAutoFit/>
           </a:bodyPr>
           <a:lstStyle/>
@@ -21936,6 +22252,7 @@
           <a:lstStyle/>
           <a:p>
             <a:pPr algn="ctr"/>
+            <a:endParaRPr/>
           </a:p>
         </p:txBody>
       </p:sp>
@@ -21979,6 +22296,7 @@
           <a:lstStyle/>
           <a:p>
             <a:pPr algn="ctr"/>
+            <a:endParaRPr/>
           </a:p>
         </p:txBody>
       </p:sp>
@@ -21999,7 +22317,7 @@
           <a:noFill/>
         </p:spPr>
         <p:txBody>
-          <a:bodyPr wrap="square" lIns="36576" rIns="36576" tIns="36576" bIns="36576" anchor="t">
+          <a:bodyPr wrap="square" lIns="36576" tIns="36576" rIns="36576" bIns="36576" anchor="t">
             <a:spAutoFit/>
           </a:bodyPr>
           <a:lstStyle/>
@@ -22034,7 +22352,7 @@
           <a:noFill/>
         </p:spPr>
         <p:txBody>
-          <a:bodyPr wrap="square" lIns="36576" rIns="36576" tIns="36576" bIns="36576" anchor="t">
+          <a:bodyPr wrap="square" lIns="36576" tIns="36576" rIns="36576" bIns="36576" anchor="t">
             <a:spAutoFit/>
           </a:bodyPr>
           <a:lstStyle/>
@@ -22069,7 +22387,7 @@
           <a:noFill/>
         </p:spPr>
         <p:txBody>
-          <a:bodyPr wrap="square" lIns="36576" rIns="36576" tIns="36576" bIns="36576" anchor="t">
+          <a:bodyPr wrap="square" lIns="36576" tIns="36576" rIns="36576" bIns="36576" anchor="t">
             <a:spAutoFit/>
           </a:bodyPr>
           <a:lstStyle/>
@@ -22104,7 +22422,7 @@
           <a:noFill/>
         </p:spPr>
         <p:txBody>
-          <a:bodyPr wrap="square" lIns="36576" rIns="36576" tIns="36576" bIns="36576" anchor="t">
+          <a:bodyPr wrap="square" lIns="36576" tIns="36576" rIns="36576" bIns="36576" anchor="t">
             <a:spAutoFit/>
           </a:bodyPr>
           <a:lstStyle/>
@@ -22139,7 +22457,7 @@
           <a:noFill/>
         </p:spPr>
         <p:txBody>
-          <a:bodyPr wrap="square" lIns="36576" rIns="36576" tIns="36576" bIns="36576" anchor="t">
+          <a:bodyPr wrap="square" lIns="36576" tIns="36576" rIns="36576" bIns="36576" anchor="t">
             <a:spAutoFit/>
           </a:bodyPr>
           <a:lstStyle/>
@@ -22166,7 +22484,7 @@
 </file>
 
 <file path=ppt/slides/slide31.xml><?xml version="1.0" encoding="utf-8"?>
-<p:sld xmlns:a="http://schemas.openxmlformats.org/drawingml/2006/main" xmlns:p="http://schemas.openxmlformats.org/presentationml/2006/main" xmlns:r="http://schemas.openxmlformats.org/officeDocument/2006/relationships">
+<p:sld xmlns:a="http://schemas.openxmlformats.org/drawingml/2006/main" xmlns:r="http://schemas.openxmlformats.org/officeDocument/2006/relationships" xmlns:p="http://schemas.openxmlformats.org/presentationml/2006/main">
   <p:cSld>
     <p:bg>
       <p:bgPr>
@@ -22182,7 +22500,14 @@
         <p:cNvGrpSpPr/>
         <p:nvPr/>
       </p:nvGrpSpPr>
-      <p:grpSpPr/>
+      <p:grpSpPr>
+        <a:xfrm>
+          <a:off x="0" y="0"/>
+          <a:ext cx="0" cy="0"/>
+          <a:chOff x="0" y="0"/>
+          <a:chExt cx="0" cy="0"/>
+        </a:xfrm>
+      </p:grpSpPr>
       <p:sp>
         <p:nvSpPr>
           <p:cNvPr id="2" name="TextBox 1"/>
@@ -22200,7 +22525,7 @@
           <a:noFill/>
         </p:spPr>
         <p:txBody>
-          <a:bodyPr wrap="square" lIns="36576" rIns="36576" tIns="36576" bIns="36576" anchor="t">
+          <a:bodyPr wrap="square" lIns="36576" tIns="36576" rIns="36576" bIns="36576" anchor="t">
             <a:spAutoFit/>
           </a:bodyPr>
           <a:lstStyle/>
@@ -22235,7 +22560,7 @@
           <a:noFill/>
         </p:spPr>
         <p:txBody>
-          <a:bodyPr wrap="square" lIns="36576" rIns="36576" tIns="36576" bIns="36576" anchor="t">
+          <a:bodyPr wrap="square" lIns="36576" tIns="36576" rIns="36576" bIns="36576" anchor="t">
             <a:spAutoFit/>
           </a:bodyPr>
           <a:lstStyle/>
@@ -22305,7 +22630,7 @@
           <a:noFill/>
         </p:spPr>
         <p:txBody>
-          <a:bodyPr wrap="square" lIns="36576" rIns="36576" tIns="36576" bIns="36576" anchor="t">
+          <a:bodyPr wrap="square" lIns="36576" tIns="36576" rIns="36576" bIns="36576" anchor="t">
             <a:spAutoFit/>
           </a:bodyPr>
           <a:lstStyle/>
@@ -22365,6 +22690,7 @@
           <a:lstStyle/>
           <a:p>
             <a:pPr algn="ctr"/>
+            <a:endParaRPr/>
           </a:p>
         </p:txBody>
       </p:sp>
@@ -22408,6 +22734,7 @@
           <a:lstStyle/>
           <a:p>
             <a:pPr algn="ctr"/>
+            <a:endParaRPr/>
           </a:p>
         </p:txBody>
       </p:sp>
@@ -22428,7 +22755,7 @@
           <a:noFill/>
         </p:spPr>
         <p:txBody>
-          <a:bodyPr wrap="square" lIns="36576" rIns="36576" tIns="36576" bIns="36576" anchor="t">
+          <a:bodyPr wrap="square" lIns="36576" tIns="36576" rIns="36576" bIns="36576" anchor="t">
             <a:spAutoFit/>
           </a:bodyPr>
           <a:lstStyle/>
@@ -22463,7 +22790,7 @@
           <a:noFill/>
         </p:spPr>
         <p:txBody>
-          <a:bodyPr wrap="square" lIns="36576" rIns="36576" tIns="36576" bIns="36576" anchor="t">
+          <a:bodyPr wrap="square" lIns="36576" tIns="36576" rIns="36576" bIns="36576" anchor="t">
             <a:spAutoFit/>
           </a:bodyPr>
           <a:lstStyle/>
@@ -22523,6 +22850,7 @@
           <a:lstStyle/>
           <a:p>
             <a:pPr algn="ctr"/>
+            <a:endParaRPr/>
           </a:p>
         </p:txBody>
       </p:sp>
@@ -22566,6 +22894,7 @@
           <a:lstStyle/>
           <a:p>
             <a:pPr algn="ctr"/>
+            <a:endParaRPr/>
           </a:p>
         </p:txBody>
       </p:sp>
@@ -22586,7 +22915,7 @@
           <a:noFill/>
         </p:spPr>
         <p:txBody>
-          <a:bodyPr wrap="square" lIns="36576" rIns="36576" tIns="36576" bIns="36576" anchor="t">
+          <a:bodyPr wrap="square" lIns="36576" tIns="36576" rIns="36576" bIns="36576" anchor="t">
             <a:spAutoFit/>
           </a:bodyPr>
           <a:lstStyle/>
@@ -22621,7 +22950,7 @@
           <a:noFill/>
         </p:spPr>
         <p:txBody>
-          <a:bodyPr wrap="square" lIns="36576" rIns="36576" tIns="36576" bIns="36576" anchor="t">
+          <a:bodyPr wrap="square" lIns="36576" tIns="36576" rIns="36576" bIns="36576" anchor="t">
             <a:spAutoFit/>
           </a:bodyPr>
           <a:lstStyle/>
@@ -22681,6 +23010,7 @@
           <a:lstStyle/>
           <a:p>
             <a:pPr algn="ctr"/>
+            <a:endParaRPr/>
           </a:p>
         </p:txBody>
       </p:sp>
@@ -22724,6 +23054,7 @@
           <a:lstStyle/>
           <a:p>
             <a:pPr algn="ctr"/>
+            <a:endParaRPr/>
           </a:p>
         </p:txBody>
       </p:sp>
@@ -22744,7 +23075,7 @@
           <a:noFill/>
         </p:spPr>
         <p:txBody>
-          <a:bodyPr wrap="square" lIns="36576" rIns="36576" tIns="36576" bIns="36576" anchor="t">
+          <a:bodyPr wrap="square" lIns="36576" tIns="36576" rIns="36576" bIns="36576" anchor="t">
             <a:spAutoFit/>
           </a:bodyPr>
           <a:lstStyle/>
@@ -22779,7 +23110,7 @@
           <a:noFill/>
         </p:spPr>
         <p:txBody>
-          <a:bodyPr wrap="square" lIns="36576" rIns="36576" tIns="36576" bIns="36576" anchor="t">
+          <a:bodyPr wrap="square" lIns="36576" tIns="36576" rIns="36576" bIns="36576" anchor="t">
             <a:spAutoFit/>
           </a:bodyPr>
           <a:lstStyle/>
@@ -22839,6 +23170,7 @@
           <a:lstStyle/>
           <a:p>
             <a:pPr algn="ctr"/>
+            <a:endParaRPr/>
           </a:p>
         </p:txBody>
       </p:sp>
@@ -22882,6 +23214,7 @@
           <a:lstStyle/>
           <a:p>
             <a:pPr algn="ctr"/>
+            <a:endParaRPr/>
           </a:p>
         </p:txBody>
       </p:sp>
@@ -22902,7 +23235,7 @@
           <a:noFill/>
         </p:spPr>
         <p:txBody>
-          <a:bodyPr wrap="square" lIns="36576" rIns="36576" tIns="36576" bIns="36576" anchor="t">
+          <a:bodyPr wrap="square" lIns="36576" tIns="36576" rIns="36576" bIns="36576" anchor="t">
             <a:spAutoFit/>
           </a:bodyPr>
           <a:lstStyle/>
@@ -22937,7 +23270,7 @@
           <a:noFill/>
         </p:spPr>
         <p:txBody>
-          <a:bodyPr wrap="square" lIns="36576" rIns="36576" tIns="36576" bIns="36576" anchor="t">
+          <a:bodyPr wrap="square" lIns="36576" tIns="36576" rIns="36576" bIns="36576" anchor="t">
             <a:spAutoFit/>
           </a:bodyPr>
           <a:lstStyle/>
@@ -22972,7 +23305,7 @@
           <a:noFill/>
         </p:spPr>
         <p:txBody>
-          <a:bodyPr wrap="square" lIns="36576" rIns="36576" tIns="36576" bIns="36576" anchor="t">
+          <a:bodyPr wrap="square" lIns="36576" tIns="36576" rIns="36576" bIns="36576" anchor="t">
             <a:spAutoFit/>
           </a:bodyPr>
           <a:lstStyle/>
@@ -23007,7 +23340,7 @@
           <a:noFill/>
         </p:spPr>
         <p:txBody>
-          <a:bodyPr wrap="square" lIns="36576" rIns="36576" tIns="36576" bIns="36576" anchor="t">
+          <a:bodyPr wrap="square" lIns="36576" tIns="36576" rIns="36576" bIns="36576" anchor="t">
             <a:spAutoFit/>
           </a:bodyPr>
           <a:lstStyle/>
@@ -23034,7 +23367,7 @@
 </file>
 
 <file path=ppt/slides/slide32.xml><?xml version="1.0" encoding="utf-8"?>
-<p:sld xmlns:a="http://schemas.openxmlformats.org/drawingml/2006/main" xmlns:p="http://schemas.openxmlformats.org/presentationml/2006/main" xmlns:r="http://schemas.openxmlformats.org/officeDocument/2006/relationships">
+<p:sld xmlns:a="http://schemas.openxmlformats.org/drawingml/2006/main" xmlns:r="http://schemas.openxmlformats.org/officeDocument/2006/relationships" xmlns:p="http://schemas.openxmlformats.org/presentationml/2006/main">
   <p:cSld>
     <p:bg>
       <p:bgPr>
@@ -23050,7 +23383,14 @@
         <p:cNvGrpSpPr/>
         <p:nvPr/>
       </p:nvGrpSpPr>
-      <p:grpSpPr/>
+      <p:grpSpPr>
+        <a:xfrm>
+          <a:off x="0" y="0"/>
+          <a:ext cx="0" cy="0"/>
+          <a:chOff x="0" y="0"/>
+          <a:chExt cx="0" cy="0"/>
+        </a:xfrm>
+      </p:grpSpPr>
       <p:sp>
         <p:nvSpPr>
           <p:cNvPr id="2" name="TextBox 1"/>
@@ -23068,7 +23408,7 @@
           <a:noFill/>
         </p:spPr>
         <p:txBody>
-          <a:bodyPr wrap="square" lIns="36576" rIns="36576" tIns="36576" bIns="36576" anchor="t">
+          <a:bodyPr wrap="square" lIns="36576" tIns="36576" rIns="36576" bIns="36576" anchor="t">
             <a:spAutoFit/>
           </a:bodyPr>
           <a:lstStyle/>
@@ -23103,7 +23443,7 @@
           <a:noFill/>
         </p:spPr>
         <p:txBody>
-          <a:bodyPr wrap="square" lIns="36576" rIns="36576" tIns="36576" bIns="36576" anchor="t">
+          <a:bodyPr wrap="square" lIns="36576" tIns="36576" rIns="36576" bIns="36576" anchor="t">
             <a:spAutoFit/>
           </a:bodyPr>
           <a:lstStyle/>
@@ -23173,7 +23513,7 @@
           <a:noFill/>
         </p:spPr>
         <p:txBody>
-          <a:bodyPr wrap="square" lIns="36576" rIns="36576" tIns="36576" bIns="36576" anchor="t">
+          <a:bodyPr wrap="square" lIns="36576" tIns="36576" rIns="36576" bIns="36576" anchor="t">
             <a:spAutoFit/>
           </a:bodyPr>
           <a:lstStyle/>
@@ -23233,6 +23573,7 @@
           <a:lstStyle/>
           <a:p>
             <a:pPr algn="ctr"/>
+            <a:endParaRPr/>
           </a:p>
         </p:txBody>
       </p:sp>
@@ -23276,6 +23617,7 @@
           <a:lstStyle/>
           <a:p>
             <a:pPr algn="ctr"/>
+            <a:endParaRPr/>
           </a:p>
         </p:txBody>
       </p:sp>
@@ -23296,7 +23638,7 @@
           <a:noFill/>
         </p:spPr>
         <p:txBody>
-          <a:bodyPr wrap="square" lIns="36576" rIns="36576" tIns="36576" bIns="36576" anchor="t">
+          <a:bodyPr wrap="square" lIns="36576" tIns="36576" rIns="36576" bIns="36576" anchor="t">
             <a:spAutoFit/>
           </a:bodyPr>
           <a:lstStyle/>
@@ -23331,7 +23673,7 @@
           <a:noFill/>
         </p:spPr>
         <p:txBody>
-          <a:bodyPr wrap="square" lIns="36576" rIns="36576" tIns="36576" bIns="36576" anchor="t">
+          <a:bodyPr wrap="square" lIns="36576" tIns="36576" rIns="36576" bIns="36576" anchor="t">
             <a:spAutoFit/>
           </a:bodyPr>
           <a:lstStyle/>
@@ -23391,6 +23733,7 @@
           <a:lstStyle/>
           <a:p>
             <a:pPr algn="ctr"/>
+            <a:endParaRPr/>
           </a:p>
         </p:txBody>
       </p:sp>
@@ -23434,6 +23777,7 @@
           <a:lstStyle/>
           <a:p>
             <a:pPr algn="ctr"/>
+            <a:endParaRPr/>
           </a:p>
         </p:txBody>
       </p:sp>
@@ -23454,7 +23798,7 @@
           <a:noFill/>
         </p:spPr>
         <p:txBody>
-          <a:bodyPr wrap="square" lIns="36576" rIns="36576" tIns="36576" bIns="36576" anchor="t">
+          <a:bodyPr wrap="square" lIns="36576" tIns="36576" rIns="36576" bIns="36576" anchor="t">
             <a:spAutoFit/>
           </a:bodyPr>
           <a:lstStyle/>
@@ -23489,7 +23833,7 @@
           <a:noFill/>
         </p:spPr>
         <p:txBody>
-          <a:bodyPr wrap="square" lIns="36576" rIns="36576" tIns="36576" bIns="36576" anchor="t">
+          <a:bodyPr wrap="square" lIns="36576" tIns="36576" rIns="36576" bIns="36576" anchor="t">
             <a:spAutoFit/>
           </a:bodyPr>
           <a:lstStyle/>
@@ -23549,6 +23893,7 @@
           <a:lstStyle/>
           <a:p>
             <a:pPr algn="ctr"/>
+            <a:endParaRPr/>
           </a:p>
         </p:txBody>
       </p:sp>
@@ -23592,6 +23937,7 @@
           <a:lstStyle/>
           <a:p>
             <a:pPr algn="ctr"/>
+            <a:endParaRPr/>
           </a:p>
         </p:txBody>
       </p:sp>
@@ -23612,7 +23958,7 @@
           <a:noFill/>
         </p:spPr>
         <p:txBody>
-          <a:bodyPr wrap="square" lIns="36576" rIns="36576" tIns="36576" bIns="36576" anchor="t">
+          <a:bodyPr wrap="square" lIns="36576" tIns="36576" rIns="36576" bIns="36576" anchor="t">
             <a:spAutoFit/>
           </a:bodyPr>
           <a:lstStyle/>
@@ -23647,7 +23993,7 @@
           <a:noFill/>
         </p:spPr>
         <p:txBody>
-          <a:bodyPr wrap="square" lIns="36576" rIns="36576" tIns="36576" bIns="36576" anchor="t">
+          <a:bodyPr wrap="square" lIns="36576" tIns="36576" rIns="36576" bIns="36576" anchor="t">
             <a:spAutoFit/>
           </a:bodyPr>
           <a:lstStyle/>
@@ -23707,6 +24053,7 @@
           <a:lstStyle/>
           <a:p>
             <a:pPr algn="ctr"/>
+            <a:endParaRPr/>
           </a:p>
         </p:txBody>
       </p:sp>
@@ -23750,6 +24097,7 @@
           <a:lstStyle/>
           <a:p>
             <a:pPr algn="ctr"/>
+            <a:endParaRPr/>
           </a:p>
         </p:txBody>
       </p:sp>
@@ -23770,7 +24118,7 @@
           <a:noFill/>
         </p:spPr>
         <p:txBody>
-          <a:bodyPr wrap="square" lIns="36576" rIns="36576" tIns="36576" bIns="36576" anchor="t">
+          <a:bodyPr wrap="square" lIns="36576" tIns="36576" rIns="36576" bIns="36576" anchor="t">
             <a:spAutoFit/>
           </a:bodyPr>
           <a:lstStyle/>
@@ -23805,7 +24153,7 @@
           <a:noFill/>
         </p:spPr>
         <p:txBody>
-          <a:bodyPr wrap="square" lIns="36576" rIns="36576" tIns="36576" bIns="36576" anchor="t">
+          <a:bodyPr wrap="square" lIns="36576" tIns="36576" rIns="36576" bIns="36576" anchor="t">
             <a:spAutoFit/>
           </a:bodyPr>
           <a:lstStyle/>
@@ -23840,7 +24188,7 @@
           <a:noFill/>
         </p:spPr>
         <p:txBody>
-          <a:bodyPr wrap="square" lIns="36576" rIns="36576" tIns="36576" bIns="36576" anchor="t">
+          <a:bodyPr wrap="square" lIns="36576" tIns="36576" rIns="36576" bIns="36576" anchor="t">
             <a:spAutoFit/>
           </a:bodyPr>
           <a:lstStyle/>
@@ -23875,7 +24223,7 @@
           <a:noFill/>
         </p:spPr>
         <p:txBody>
-          <a:bodyPr wrap="square" lIns="36576" rIns="36576" tIns="36576" bIns="36576" anchor="t">
+          <a:bodyPr wrap="square" lIns="36576" tIns="36576" rIns="36576" bIns="36576" anchor="t">
             <a:spAutoFit/>
           </a:bodyPr>
           <a:lstStyle/>
@@ -23902,7 +24250,7 @@
 </file>
 
 <file path=ppt/slides/slide33.xml><?xml version="1.0" encoding="utf-8"?>
-<p:sld xmlns:a="http://schemas.openxmlformats.org/drawingml/2006/main" xmlns:p="http://schemas.openxmlformats.org/presentationml/2006/main" xmlns:r="http://schemas.openxmlformats.org/officeDocument/2006/relationships">
+<p:sld xmlns:a="http://schemas.openxmlformats.org/drawingml/2006/main" xmlns:r="http://schemas.openxmlformats.org/officeDocument/2006/relationships" xmlns:p="http://schemas.openxmlformats.org/presentationml/2006/main">
   <p:cSld>
     <p:bg>
       <p:bgPr>
@@ -23918,7 +24266,14 @@
         <p:cNvGrpSpPr/>
         <p:nvPr/>
       </p:nvGrpSpPr>
-      <p:grpSpPr/>
+      <p:grpSpPr>
+        <a:xfrm>
+          <a:off x="0" y="0"/>
+          <a:ext cx="0" cy="0"/>
+          <a:chOff x="0" y="0"/>
+          <a:chExt cx="0" cy="0"/>
+        </a:xfrm>
+      </p:grpSpPr>
       <p:sp>
         <p:nvSpPr>
           <p:cNvPr id="2" name="TextBox 1"/>
@@ -23936,7 +24291,7 @@
           <a:noFill/>
         </p:spPr>
         <p:txBody>
-          <a:bodyPr wrap="square" lIns="36576" rIns="36576" tIns="36576" bIns="36576" anchor="t">
+          <a:bodyPr wrap="square" lIns="36576" tIns="36576" rIns="36576" bIns="36576" anchor="t">
             <a:spAutoFit/>
           </a:bodyPr>
           <a:lstStyle/>
@@ -23971,7 +24326,7 @@
           <a:noFill/>
         </p:spPr>
         <p:txBody>
-          <a:bodyPr wrap="square" lIns="36576" rIns="36576" tIns="36576" bIns="36576" anchor="t">
+          <a:bodyPr wrap="square" lIns="36576" tIns="36576" rIns="36576" bIns="36576" anchor="t">
             <a:spAutoFit/>
           </a:bodyPr>
           <a:lstStyle/>
@@ -24007,7 +24362,7 @@
           <a:noFill/>
         </p:spPr>
         <p:txBody>
-          <a:bodyPr wrap="square" lIns="36576" rIns="36576" tIns="36576" bIns="36576" anchor="t">
+          <a:bodyPr wrap="square" lIns="36576" tIns="36576" rIns="36576" bIns="36576" anchor="t">
             <a:spAutoFit/>
           </a:bodyPr>
           <a:lstStyle/>
@@ -24034,7 +24389,7 @@
 </file>
 
 <file path=ppt/slides/slide34.xml><?xml version="1.0" encoding="utf-8"?>
-<p:sld xmlns:a="http://schemas.openxmlformats.org/drawingml/2006/main" xmlns:p="http://schemas.openxmlformats.org/presentationml/2006/main" xmlns:r="http://schemas.openxmlformats.org/officeDocument/2006/relationships">
+<p:sld xmlns:a="http://schemas.openxmlformats.org/drawingml/2006/main" xmlns:r="http://schemas.openxmlformats.org/officeDocument/2006/relationships" xmlns:p="http://schemas.openxmlformats.org/presentationml/2006/main">
   <p:cSld>
     <p:bg>
       <p:bgPr>
@@ -24050,7 +24405,14 @@
         <p:cNvGrpSpPr/>
         <p:nvPr/>
       </p:nvGrpSpPr>
-      <p:grpSpPr/>
+      <p:grpSpPr>
+        <a:xfrm>
+          <a:off x="0" y="0"/>
+          <a:ext cx="0" cy="0"/>
+          <a:chOff x="0" y="0"/>
+          <a:chExt cx="0" cy="0"/>
+        </a:xfrm>
+      </p:grpSpPr>
       <p:sp>
         <p:nvSpPr>
           <p:cNvPr id="2" name="TextBox 1"/>
@@ -24068,7 +24430,7 @@
           <a:noFill/>
         </p:spPr>
         <p:txBody>
-          <a:bodyPr wrap="square" lIns="36576" rIns="36576" tIns="36576" bIns="36576" anchor="t">
+          <a:bodyPr wrap="square" lIns="36576" tIns="36576" rIns="36576" bIns="36576" anchor="t">
             <a:spAutoFit/>
           </a:bodyPr>
           <a:lstStyle/>
@@ -24103,7 +24465,7 @@
           <a:noFill/>
         </p:spPr>
         <p:txBody>
-          <a:bodyPr wrap="square" lIns="36576" rIns="36576" tIns="36576" bIns="36576" anchor="t">
+          <a:bodyPr wrap="square" lIns="36576" tIns="36576" rIns="36576" bIns="36576" anchor="t">
             <a:spAutoFit/>
           </a:bodyPr>
           <a:lstStyle/>
@@ -24173,7 +24535,7 @@
           <a:noFill/>
         </p:spPr>
         <p:txBody>
-          <a:bodyPr wrap="square" lIns="36576" rIns="36576" tIns="36576" bIns="36576" anchor="t">
+          <a:bodyPr wrap="square" lIns="36576" tIns="36576" rIns="36576" bIns="36576" anchor="t">
             <a:spAutoFit/>
           </a:bodyPr>
           <a:lstStyle/>
@@ -24233,6 +24595,7 @@
           <a:lstStyle/>
           <a:p>
             <a:pPr algn="ctr"/>
+            <a:endParaRPr/>
           </a:p>
         </p:txBody>
       </p:sp>
@@ -24276,6 +24639,7 @@
           <a:lstStyle/>
           <a:p>
             <a:pPr algn="ctr"/>
+            <a:endParaRPr/>
           </a:p>
         </p:txBody>
       </p:sp>
@@ -24296,7 +24660,7 @@
           <a:noFill/>
         </p:spPr>
         <p:txBody>
-          <a:bodyPr wrap="square" lIns="36576" rIns="36576" tIns="36576" bIns="36576" anchor="t">
+          <a:bodyPr wrap="square" lIns="36576" tIns="36576" rIns="36576" bIns="36576" anchor="t">
             <a:spAutoFit/>
           </a:bodyPr>
           <a:lstStyle/>
@@ -24331,7 +24695,7 @@
           <a:noFill/>
         </p:spPr>
         <p:txBody>
-          <a:bodyPr wrap="square" lIns="36576" rIns="36576" tIns="36576" bIns="36576" anchor="t">
+          <a:bodyPr wrap="square" lIns="36576" tIns="36576" rIns="36576" bIns="36576" anchor="t">
             <a:spAutoFit/>
           </a:bodyPr>
           <a:lstStyle/>
@@ -24391,6 +24755,7 @@
           <a:lstStyle/>
           <a:p>
             <a:pPr algn="ctr"/>
+            <a:endParaRPr/>
           </a:p>
         </p:txBody>
       </p:sp>
@@ -24434,6 +24799,7 @@
           <a:lstStyle/>
           <a:p>
             <a:pPr algn="ctr"/>
+            <a:endParaRPr/>
           </a:p>
         </p:txBody>
       </p:sp>
@@ -24454,7 +24820,7 @@
           <a:noFill/>
         </p:spPr>
         <p:txBody>
-          <a:bodyPr wrap="square" lIns="36576" rIns="36576" tIns="36576" bIns="36576" anchor="t">
+          <a:bodyPr wrap="square" lIns="36576" tIns="36576" rIns="36576" bIns="36576" anchor="t">
             <a:spAutoFit/>
           </a:bodyPr>
           <a:lstStyle/>
@@ -24489,7 +24855,7 @@
           <a:noFill/>
         </p:spPr>
         <p:txBody>
-          <a:bodyPr wrap="square" lIns="36576" rIns="36576" tIns="36576" bIns="36576" anchor="t">
+          <a:bodyPr wrap="square" lIns="36576" tIns="36576" rIns="36576" bIns="36576" anchor="t">
             <a:spAutoFit/>
           </a:bodyPr>
           <a:lstStyle/>
@@ -24549,6 +24915,7 @@
           <a:lstStyle/>
           <a:p>
             <a:pPr algn="ctr"/>
+            <a:endParaRPr/>
           </a:p>
         </p:txBody>
       </p:sp>
@@ -24592,6 +24959,7 @@
           <a:lstStyle/>
           <a:p>
             <a:pPr algn="ctr"/>
+            <a:endParaRPr/>
           </a:p>
         </p:txBody>
       </p:sp>
@@ -24612,7 +24980,7 @@
           <a:noFill/>
         </p:spPr>
         <p:txBody>
-          <a:bodyPr wrap="square" lIns="36576" rIns="36576" tIns="36576" bIns="36576" anchor="t">
+          <a:bodyPr wrap="square" lIns="36576" tIns="36576" rIns="36576" bIns="36576" anchor="t">
             <a:spAutoFit/>
           </a:bodyPr>
           <a:lstStyle/>
@@ -24647,7 +25015,7 @@
           <a:noFill/>
         </p:spPr>
         <p:txBody>
-          <a:bodyPr wrap="square" lIns="36576" rIns="36576" tIns="36576" bIns="36576" anchor="t">
+          <a:bodyPr wrap="square" lIns="36576" tIns="36576" rIns="36576" bIns="36576" anchor="t">
             <a:spAutoFit/>
           </a:bodyPr>
           <a:lstStyle/>
@@ -24707,6 +25075,7 @@
           <a:lstStyle/>
           <a:p>
             <a:pPr algn="ctr"/>
+            <a:endParaRPr/>
           </a:p>
         </p:txBody>
       </p:sp>
@@ -24750,6 +25119,7 @@
           <a:lstStyle/>
           <a:p>
             <a:pPr algn="ctr"/>
+            <a:endParaRPr/>
           </a:p>
         </p:txBody>
       </p:sp>
@@ -24770,7 +25140,7 @@
           <a:noFill/>
         </p:spPr>
         <p:txBody>
-          <a:bodyPr wrap="square" lIns="36576" rIns="36576" tIns="36576" bIns="36576" anchor="t">
+          <a:bodyPr wrap="square" lIns="36576" tIns="36576" rIns="36576" bIns="36576" anchor="t">
             <a:spAutoFit/>
           </a:bodyPr>
           <a:lstStyle/>
@@ -24805,7 +25175,7 @@
           <a:noFill/>
         </p:spPr>
         <p:txBody>
-          <a:bodyPr wrap="square" lIns="36576" rIns="36576" tIns="36576" bIns="36576" anchor="t">
+          <a:bodyPr wrap="square" lIns="36576" tIns="36576" rIns="36576" bIns="36576" anchor="t">
             <a:spAutoFit/>
           </a:bodyPr>
           <a:lstStyle/>
@@ -24840,7 +25210,7 @@
           <a:noFill/>
         </p:spPr>
         <p:txBody>
-          <a:bodyPr wrap="square" lIns="36576" rIns="36576" tIns="36576" bIns="36576" anchor="t">
+          <a:bodyPr wrap="square" lIns="36576" tIns="36576" rIns="36576" bIns="36576" anchor="t">
             <a:spAutoFit/>
           </a:bodyPr>
           <a:lstStyle/>
@@ -24875,7 +25245,7 @@
           <a:noFill/>
         </p:spPr>
         <p:txBody>
-          <a:bodyPr wrap="square" lIns="36576" rIns="36576" tIns="36576" bIns="36576" anchor="t">
+          <a:bodyPr wrap="square" lIns="36576" tIns="36576" rIns="36576" bIns="36576" anchor="t">
             <a:spAutoFit/>
           </a:bodyPr>
           <a:lstStyle/>
@@ -24902,7 +25272,7 @@
 </file>
 
 <file path=ppt/slides/slide35.xml><?xml version="1.0" encoding="utf-8"?>
-<p:sld xmlns:a="http://schemas.openxmlformats.org/drawingml/2006/main" xmlns:p="http://schemas.openxmlformats.org/presentationml/2006/main" xmlns:r="http://schemas.openxmlformats.org/officeDocument/2006/relationships">
+<p:sld xmlns:a="http://schemas.openxmlformats.org/drawingml/2006/main" xmlns:r="http://schemas.openxmlformats.org/officeDocument/2006/relationships" xmlns:p="http://schemas.openxmlformats.org/presentationml/2006/main">
   <p:cSld>
     <p:bg>
       <p:bgPr>
@@ -24918,7 +25288,14 @@
         <p:cNvGrpSpPr/>
         <p:nvPr/>
       </p:nvGrpSpPr>
-      <p:grpSpPr/>
+      <p:grpSpPr>
+        <a:xfrm>
+          <a:off x="0" y="0"/>
+          <a:ext cx="0" cy="0"/>
+          <a:chOff x="0" y="0"/>
+          <a:chExt cx="0" cy="0"/>
+        </a:xfrm>
+      </p:grpSpPr>
       <p:sp>
         <p:nvSpPr>
           <p:cNvPr id="2" name="TextBox 1"/>
@@ -24936,7 +25313,7 @@
           <a:noFill/>
         </p:spPr>
         <p:txBody>
-          <a:bodyPr wrap="square" lIns="36576" rIns="36576" tIns="36576" bIns="36576" anchor="t">
+          <a:bodyPr wrap="square" lIns="36576" tIns="36576" rIns="36576" bIns="36576" anchor="t">
             <a:spAutoFit/>
           </a:bodyPr>
           <a:lstStyle/>
@@ -24971,7 +25348,7 @@
           <a:noFill/>
         </p:spPr>
         <p:txBody>
-          <a:bodyPr wrap="square" lIns="36576" rIns="36576" tIns="36576" bIns="36576" anchor="t">
+          <a:bodyPr wrap="square" lIns="36576" tIns="36576" rIns="36576" bIns="36576" anchor="t">
             <a:spAutoFit/>
           </a:bodyPr>
           <a:lstStyle/>
@@ -25041,7 +25418,7 @@
           <a:noFill/>
         </p:spPr>
         <p:txBody>
-          <a:bodyPr wrap="square" lIns="36576" rIns="36576" tIns="36576" bIns="36576" anchor="t">
+          <a:bodyPr wrap="square" lIns="36576" tIns="36576" rIns="36576" bIns="36576" anchor="t">
             <a:spAutoFit/>
           </a:bodyPr>
           <a:lstStyle/>
@@ -25101,6 +25478,7 @@
           <a:lstStyle/>
           <a:p>
             <a:pPr algn="ctr"/>
+            <a:endParaRPr/>
           </a:p>
         </p:txBody>
       </p:sp>
@@ -25144,6 +25522,7 @@
           <a:lstStyle/>
           <a:p>
             <a:pPr algn="ctr"/>
+            <a:endParaRPr/>
           </a:p>
         </p:txBody>
       </p:sp>
@@ -25164,7 +25543,7 @@
           <a:noFill/>
         </p:spPr>
         <p:txBody>
-          <a:bodyPr wrap="square" lIns="36576" rIns="36576" tIns="36576" bIns="36576" anchor="t">
+          <a:bodyPr wrap="square" lIns="36576" tIns="36576" rIns="36576" bIns="36576" anchor="t">
             <a:spAutoFit/>
           </a:bodyPr>
           <a:lstStyle/>
@@ -25199,7 +25578,7 @@
           <a:noFill/>
         </p:spPr>
         <p:txBody>
-          <a:bodyPr wrap="square" lIns="36576" rIns="36576" tIns="36576" bIns="36576" anchor="t">
+          <a:bodyPr wrap="square" lIns="36576" tIns="36576" rIns="36576" bIns="36576" anchor="t">
             <a:spAutoFit/>
           </a:bodyPr>
           <a:lstStyle/>
@@ -25259,6 +25638,7 @@
           <a:lstStyle/>
           <a:p>
             <a:pPr algn="ctr"/>
+            <a:endParaRPr/>
           </a:p>
         </p:txBody>
       </p:sp>
@@ -25302,6 +25682,7 @@
           <a:lstStyle/>
           <a:p>
             <a:pPr algn="ctr"/>
+            <a:endParaRPr/>
           </a:p>
         </p:txBody>
       </p:sp>
@@ -25322,7 +25703,7 @@
           <a:noFill/>
         </p:spPr>
         <p:txBody>
-          <a:bodyPr wrap="square" lIns="36576" rIns="36576" tIns="36576" bIns="36576" anchor="t">
+          <a:bodyPr wrap="square" lIns="36576" tIns="36576" rIns="36576" bIns="36576" anchor="t">
             <a:spAutoFit/>
           </a:bodyPr>
           <a:lstStyle/>
@@ -25357,7 +25738,7 @@
           <a:noFill/>
         </p:spPr>
         <p:txBody>
-          <a:bodyPr wrap="square" lIns="36576" rIns="36576" tIns="36576" bIns="36576" anchor="t">
+          <a:bodyPr wrap="square" lIns="36576" tIns="36576" rIns="36576" bIns="36576" anchor="t">
             <a:spAutoFit/>
           </a:bodyPr>
           <a:lstStyle/>
@@ -25417,6 +25798,7 @@
           <a:lstStyle/>
           <a:p>
             <a:pPr algn="ctr"/>
+            <a:endParaRPr/>
           </a:p>
         </p:txBody>
       </p:sp>
@@ -25460,6 +25842,7 @@
           <a:lstStyle/>
           <a:p>
             <a:pPr algn="ctr"/>
+            <a:endParaRPr/>
           </a:p>
         </p:txBody>
       </p:sp>
@@ -25480,7 +25863,7 @@
           <a:noFill/>
         </p:spPr>
         <p:txBody>
-          <a:bodyPr wrap="square" lIns="36576" rIns="36576" tIns="36576" bIns="36576" anchor="t">
+          <a:bodyPr wrap="square" lIns="36576" tIns="36576" rIns="36576" bIns="36576" anchor="t">
             <a:spAutoFit/>
           </a:bodyPr>
           <a:lstStyle/>
@@ -25515,7 +25898,7 @@
           <a:noFill/>
         </p:spPr>
         <p:txBody>
-          <a:bodyPr wrap="square" lIns="36576" rIns="36576" tIns="36576" bIns="36576" anchor="t">
+          <a:bodyPr wrap="square" lIns="36576" tIns="36576" rIns="36576" bIns="36576" anchor="t">
             <a:spAutoFit/>
           </a:bodyPr>
           <a:lstStyle/>
@@ -25575,6 +25958,7 @@
           <a:lstStyle/>
           <a:p>
             <a:pPr algn="ctr"/>
+            <a:endParaRPr/>
           </a:p>
         </p:txBody>
       </p:sp>
@@ -25618,6 +26002,7 @@
           <a:lstStyle/>
           <a:p>
             <a:pPr algn="ctr"/>
+            <a:endParaRPr/>
           </a:p>
         </p:txBody>
       </p:sp>
@@ -25638,7 +26023,7 @@
           <a:noFill/>
         </p:spPr>
         <p:txBody>
-          <a:bodyPr wrap="square" lIns="36576" rIns="36576" tIns="36576" bIns="36576" anchor="t">
+          <a:bodyPr wrap="square" lIns="36576" tIns="36576" rIns="36576" bIns="36576" anchor="t">
             <a:spAutoFit/>
           </a:bodyPr>
           <a:lstStyle/>
@@ -25673,7 +26058,7 @@
           <a:noFill/>
         </p:spPr>
         <p:txBody>
-          <a:bodyPr wrap="square" lIns="36576" rIns="36576" tIns="36576" bIns="36576" anchor="t">
+          <a:bodyPr wrap="square" lIns="36576" tIns="36576" rIns="36576" bIns="36576" anchor="t">
             <a:spAutoFit/>
           </a:bodyPr>
           <a:lstStyle/>
@@ -25708,7 +26093,7 @@
           <a:noFill/>
         </p:spPr>
         <p:txBody>
-          <a:bodyPr wrap="square" lIns="36576" rIns="36576" tIns="36576" bIns="36576" anchor="t">
+          <a:bodyPr wrap="square" lIns="36576" tIns="36576" rIns="36576" bIns="36576" anchor="t">
             <a:spAutoFit/>
           </a:bodyPr>
           <a:lstStyle/>
@@ -25743,7 +26128,7 @@
           <a:noFill/>
         </p:spPr>
         <p:txBody>
-          <a:bodyPr wrap="square" lIns="36576" rIns="36576" tIns="36576" bIns="36576" anchor="t">
+          <a:bodyPr wrap="square" lIns="36576" tIns="36576" rIns="36576" bIns="36576" anchor="t">
             <a:spAutoFit/>
           </a:bodyPr>
           <a:lstStyle/>
@@ -25770,7 +26155,7 @@
 </file>
 
 <file path=ppt/slides/slide36.xml><?xml version="1.0" encoding="utf-8"?>
-<p:sld xmlns:a="http://schemas.openxmlformats.org/drawingml/2006/main" xmlns:p="http://schemas.openxmlformats.org/presentationml/2006/main" xmlns:r="http://schemas.openxmlformats.org/officeDocument/2006/relationships">
+<p:sld xmlns:a="http://schemas.openxmlformats.org/drawingml/2006/main" xmlns:r="http://schemas.openxmlformats.org/officeDocument/2006/relationships" xmlns:p="http://schemas.openxmlformats.org/presentationml/2006/main">
   <p:cSld>
     <p:bg>
       <p:bgPr>
@@ -25786,7 +26171,14 @@
         <p:cNvGrpSpPr/>
         <p:nvPr/>
       </p:nvGrpSpPr>
-      <p:grpSpPr/>
+      <p:grpSpPr>
+        <a:xfrm>
+          <a:off x="0" y="0"/>
+          <a:ext cx="0" cy="0"/>
+          <a:chOff x="0" y="0"/>
+          <a:chExt cx="0" cy="0"/>
+        </a:xfrm>
+      </p:grpSpPr>
       <p:sp>
         <p:nvSpPr>
           <p:cNvPr id="2" name="TextBox 1"/>
@@ -25804,7 +26196,7 @@
           <a:noFill/>
         </p:spPr>
         <p:txBody>
-          <a:bodyPr wrap="square" lIns="36576" rIns="36576" tIns="36576" bIns="36576" anchor="t">
+          <a:bodyPr wrap="square" lIns="36576" tIns="36576" rIns="36576" bIns="36576" anchor="t">
             <a:spAutoFit/>
           </a:bodyPr>
           <a:lstStyle/>
@@ -25839,7 +26231,7 @@
           <a:noFill/>
         </p:spPr>
         <p:txBody>
-          <a:bodyPr wrap="square" lIns="36576" rIns="36576" tIns="36576" bIns="36576" anchor="t">
+          <a:bodyPr wrap="square" lIns="36576" tIns="36576" rIns="36576" bIns="36576" anchor="t">
             <a:spAutoFit/>
           </a:bodyPr>
           <a:lstStyle/>
@@ -25909,7 +26301,7 @@
           <a:noFill/>
         </p:spPr>
         <p:txBody>
-          <a:bodyPr wrap="square" lIns="36576" rIns="36576" tIns="36576" bIns="36576" anchor="t">
+          <a:bodyPr wrap="square" lIns="36576" tIns="36576" rIns="36576" bIns="36576" anchor="t">
             <a:spAutoFit/>
           </a:bodyPr>
           <a:lstStyle/>
@@ -25969,6 +26361,7 @@
           <a:lstStyle/>
           <a:p>
             <a:pPr algn="ctr"/>
+            <a:endParaRPr/>
           </a:p>
         </p:txBody>
       </p:sp>
@@ -26012,6 +26405,7 @@
           <a:lstStyle/>
           <a:p>
             <a:pPr algn="ctr"/>
+            <a:endParaRPr/>
           </a:p>
         </p:txBody>
       </p:sp>
@@ -26032,7 +26426,7 @@
           <a:noFill/>
         </p:spPr>
         <p:txBody>
-          <a:bodyPr wrap="square" lIns="36576" rIns="36576" tIns="36576" bIns="36576" anchor="t">
+          <a:bodyPr wrap="square" lIns="36576" tIns="36576" rIns="36576" bIns="36576" anchor="t">
             <a:spAutoFit/>
           </a:bodyPr>
           <a:lstStyle/>
@@ -26067,7 +26461,7 @@
           <a:noFill/>
         </p:spPr>
         <p:txBody>
-          <a:bodyPr wrap="square" lIns="36576" rIns="36576" tIns="36576" bIns="36576" anchor="t">
+          <a:bodyPr wrap="square" lIns="36576" tIns="36576" rIns="36576" bIns="36576" anchor="t">
             <a:spAutoFit/>
           </a:bodyPr>
           <a:lstStyle/>
@@ -26127,6 +26521,7 @@
           <a:lstStyle/>
           <a:p>
             <a:pPr algn="ctr"/>
+            <a:endParaRPr/>
           </a:p>
         </p:txBody>
       </p:sp>
@@ -26170,6 +26565,7 @@
           <a:lstStyle/>
           <a:p>
             <a:pPr algn="ctr"/>
+            <a:endParaRPr/>
           </a:p>
         </p:txBody>
       </p:sp>
@@ -26190,7 +26586,7 @@
           <a:noFill/>
         </p:spPr>
         <p:txBody>
-          <a:bodyPr wrap="square" lIns="36576" rIns="36576" tIns="36576" bIns="36576" anchor="t">
+          <a:bodyPr wrap="square" lIns="36576" tIns="36576" rIns="36576" bIns="36576" anchor="t">
             <a:spAutoFit/>
           </a:bodyPr>
           <a:lstStyle/>
@@ -26225,7 +26621,7 @@
           <a:noFill/>
         </p:spPr>
         <p:txBody>
-          <a:bodyPr wrap="square" lIns="36576" rIns="36576" tIns="36576" bIns="36576" anchor="t">
+          <a:bodyPr wrap="square" lIns="36576" tIns="36576" rIns="36576" bIns="36576" anchor="t">
             <a:spAutoFit/>
           </a:bodyPr>
           <a:lstStyle/>
@@ -26260,7 +26656,7 @@
           <a:noFill/>
         </p:spPr>
         <p:txBody>
-          <a:bodyPr wrap="square" lIns="36576" rIns="36576" tIns="36576" bIns="36576" anchor="t">
+          <a:bodyPr wrap="square" lIns="36576" tIns="36576" rIns="36576" bIns="36576" anchor="t">
             <a:spAutoFit/>
           </a:bodyPr>
           <a:lstStyle/>
@@ -26295,7 +26691,7 @@
           <a:noFill/>
         </p:spPr>
         <p:txBody>
-          <a:bodyPr wrap="square" lIns="36576" rIns="36576" tIns="36576" bIns="36576" anchor="t">
+          <a:bodyPr wrap="square" lIns="36576" tIns="36576" rIns="36576" bIns="36576" anchor="t">
             <a:spAutoFit/>
           </a:bodyPr>
           <a:lstStyle/>
@@ -26322,7 +26718,7 @@
 </file>
 
 <file path=ppt/slides/slide37.xml><?xml version="1.0" encoding="utf-8"?>
-<p:sld xmlns:a="http://schemas.openxmlformats.org/drawingml/2006/main" xmlns:p="http://schemas.openxmlformats.org/presentationml/2006/main" xmlns:r="http://schemas.openxmlformats.org/officeDocument/2006/relationships">
+<p:sld xmlns:a="http://schemas.openxmlformats.org/drawingml/2006/main" xmlns:r="http://schemas.openxmlformats.org/officeDocument/2006/relationships" xmlns:p="http://schemas.openxmlformats.org/presentationml/2006/main">
   <p:cSld>
     <p:bg>
       <p:bgPr>
@@ -26338,7 +26734,14 @@
         <p:cNvGrpSpPr/>
         <p:nvPr/>
       </p:nvGrpSpPr>
-      <p:grpSpPr/>
+      <p:grpSpPr>
+        <a:xfrm>
+          <a:off x="0" y="0"/>
+          <a:ext cx="0" cy="0"/>
+          <a:chOff x="0" y="0"/>
+          <a:chExt cx="0" cy="0"/>
+        </a:xfrm>
+      </p:grpSpPr>
       <p:sp>
         <p:nvSpPr>
           <p:cNvPr id="2" name="TextBox 1"/>
@@ -26356,7 +26759,7 @@
           <a:noFill/>
         </p:spPr>
         <p:txBody>
-          <a:bodyPr wrap="square" lIns="36576" rIns="36576" tIns="36576" bIns="36576" anchor="t">
+          <a:bodyPr wrap="square" lIns="36576" tIns="36576" rIns="36576" bIns="36576" anchor="t">
             <a:spAutoFit/>
           </a:bodyPr>
           <a:lstStyle/>
@@ -26391,7 +26794,7 @@
           <a:noFill/>
         </p:spPr>
         <p:txBody>
-          <a:bodyPr wrap="square" lIns="36576" rIns="36576" tIns="36576" bIns="36576" anchor="t">
+          <a:bodyPr wrap="square" lIns="36576" tIns="36576" rIns="36576" bIns="36576" anchor="t">
             <a:spAutoFit/>
           </a:bodyPr>
           <a:lstStyle/>
@@ -26461,7 +26864,7 @@
           <a:noFill/>
         </p:spPr>
         <p:txBody>
-          <a:bodyPr wrap="square" lIns="36576" rIns="36576" tIns="36576" bIns="36576" anchor="t">
+          <a:bodyPr wrap="square" lIns="36576" tIns="36576" rIns="36576" bIns="36576" anchor="t">
             <a:spAutoFit/>
           </a:bodyPr>
           <a:lstStyle/>
@@ -26521,6 +26924,7 @@
           <a:lstStyle/>
           <a:p>
             <a:pPr algn="ctr"/>
+            <a:endParaRPr/>
           </a:p>
         </p:txBody>
       </p:sp>
@@ -26564,6 +26968,7 @@
           <a:lstStyle/>
           <a:p>
             <a:pPr algn="ctr"/>
+            <a:endParaRPr/>
           </a:p>
         </p:txBody>
       </p:sp>
@@ -26584,7 +26989,7 @@
           <a:noFill/>
         </p:spPr>
         <p:txBody>
-          <a:bodyPr wrap="square" lIns="36576" rIns="36576" tIns="36576" bIns="36576" anchor="t">
+          <a:bodyPr wrap="square" lIns="36576" tIns="36576" rIns="36576" bIns="36576" anchor="t">
             <a:spAutoFit/>
           </a:bodyPr>
           <a:lstStyle/>
@@ -26619,7 +27024,7 @@
           <a:noFill/>
         </p:spPr>
         <p:txBody>
-          <a:bodyPr wrap="square" lIns="36576" rIns="36576" tIns="36576" bIns="36576" anchor="t">
+          <a:bodyPr wrap="square" lIns="36576" tIns="36576" rIns="36576" bIns="36576" anchor="t">
             <a:spAutoFit/>
           </a:bodyPr>
           <a:lstStyle/>
@@ -26703,6 +27108,7 @@
           <a:lstStyle/>
           <a:p>
             <a:pPr algn="ctr"/>
+            <a:endParaRPr/>
           </a:p>
         </p:txBody>
       </p:sp>
@@ -26746,6 +27152,7 @@
           <a:lstStyle/>
           <a:p>
             <a:pPr algn="ctr"/>
+            <a:endParaRPr/>
           </a:p>
         </p:txBody>
       </p:sp>
@@ -26766,7 +27173,7 @@
           <a:noFill/>
         </p:spPr>
         <p:txBody>
-          <a:bodyPr wrap="square" lIns="36576" rIns="36576" tIns="36576" bIns="36576" anchor="t">
+          <a:bodyPr wrap="square" lIns="36576" tIns="36576" rIns="36576" bIns="36576" anchor="t">
             <a:spAutoFit/>
           </a:bodyPr>
           <a:lstStyle/>
@@ -26801,7 +27208,7 @@
           <a:noFill/>
         </p:spPr>
         <p:txBody>
-          <a:bodyPr wrap="square" lIns="36576" rIns="36576" tIns="36576" bIns="36576" anchor="t">
+          <a:bodyPr wrap="square" lIns="36576" tIns="36576" rIns="36576" bIns="36576" anchor="t">
             <a:spAutoFit/>
           </a:bodyPr>
           <a:lstStyle/>
@@ -26836,7 +27243,7 @@
           <a:noFill/>
         </p:spPr>
         <p:txBody>
-          <a:bodyPr wrap="square" lIns="36576" rIns="36576" tIns="36576" bIns="36576" anchor="t">
+          <a:bodyPr wrap="square" lIns="36576" tIns="36576" rIns="36576" bIns="36576" anchor="t">
             <a:spAutoFit/>
           </a:bodyPr>
           <a:lstStyle/>
@@ -26871,7 +27278,7 @@
           <a:noFill/>
         </p:spPr>
         <p:txBody>
-          <a:bodyPr wrap="square" lIns="36576" rIns="36576" tIns="36576" bIns="36576" anchor="t">
+          <a:bodyPr wrap="square" lIns="36576" tIns="36576" rIns="36576" bIns="36576" anchor="t">
             <a:spAutoFit/>
           </a:bodyPr>
           <a:lstStyle/>
@@ -26898,7 +27305,7 @@
 </file>
 
 <file path=ppt/slides/slide4.xml><?xml version="1.0" encoding="utf-8"?>
-<p:sld xmlns:a="http://schemas.openxmlformats.org/drawingml/2006/main" xmlns:p="http://schemas.openxmlformats.org/presentationml/2006/main" xmlns:r="http://schemas.openxmlformats.org/officeDocument/2006/relationships">
+<p:sld xmlns:a="http://schemas.openxmlformats.org/drawingml/2006/main" xmlns:r="http://schemas.openxmlformats.org/officeDocument/2006/relationships" xmlns:p="http://schemas.openxmlformats.org/presentationml/2006/main">
   <p:cSld>
     <p:bg>
       <p:bgPr>
@@ -26914,7 +27321,14 @@
         <p:cNvGrpSpPr/>
         <p:nvPr/>
       </p:nvGrpSpPr>
-      <p:grpSpPr/>
+      <p:grpSpPr>
+        <a:xfrm>
+          <a:off x="0" y="0"/>
+          <a:ext cx="0" cy="0"/>
+          <a:chOff x="0" y="0"/>
+          <a:chExt cx="0" cy="0"/>
+        </a:xfrm>
+      </p:grpSpPr>
       <p:sp>
         <p:nvSpPr>
           <p:cNvPr id="2" name="TextBox 1"/>
@@ -26932,7 +27346,7 @@
           <a:noFill/>
         </p:spPr>
         <p:txBody>
-          <a:bodyPr wrap="square" lIns="36576" rIns="36576" tIns="36576" bIns="36576" anchor="t">
+          <a:bodyPr wrap="square" lIns="36576" tIns="36576" rIns="36576" bIns="36576" anchor="t">
             <a:spAutoFit/>
           </a:bodyPr>
           <a:lstStyle/>
@@ -26967,7 +27381,7 @@
           <a:noFill/>
         </p:spPr>
         <p:txBody>
-          <a:bodyPr wrap="square" lIns="36576" rIns="36576" tIns="36576" bIns="36576" anchor="t">
+          <a:bodyPr wrap="square" lIns="36576" tIns="36576" rIns="36576" bIns="36576" anchor="t">
             <a:spAutoFit/>
           </a:bodyPr>
           <a:lstStyle/>
@@ -27037,7 +27451,7 @@
           <a:noFill/>
         </p:spPr>
         <p:txBody>
-          <a:bodyPr wrap="square" lIns="36576" rIns="36576" tIns="36576" bIns="36576" anchor="t">
+          <a:bodyPr wrap="square" lIns="36576" tIns="36576" rIns="36576" bIns="36576" anchor="t">
             <a:spAutoFit/>
           </a:bodyPr>
           <a:lstStyle/>
@@ -27121,6 +27535,7 @@
           <a:lstStyle/>
           <a:p>
             <a:pPr algn="ctr"/>
+            <a:endParaRPr/>
           </a:p>
         </p:txBody>
       </p:sp>
@@ -27164,6 +27579,7 @@
           <a:lstStyle/>
           <a:p>
             <a:pPr algn="ctr"/>
+            <a:endParaRPr/>
           </a:p>
         </p:txBody>
       </p:sp>
@@ -27184,7 +27600,7 @@
           <a:noFill/>
         </p:spPr>
         <p:txBody>
-          <a:bodyPr wrap="square" lIns="36576" rIns="36576" tIns="36576" bIns="36576" anchor="t">
+          <a:bodyPr wrap="square" lIns="36576" tIns="36576" rIns="36576" bIns="36576" anchor="t">
             <a:spAutoFit/>
           </a:bodyPr>
           <a:lstStyle/>
@@ -27219,7 +27635,7 @@
           <a:noFill/>
         </p:spPr>
         <p:txBody>
-          <a:bodyPr wrap="square" lIns="36576" rIns="36576" tIns="36576" bIns="36576" anchor="t">
+          <a:bodyPr wrap="square" lIns="36576" tIns="36576" rIns="36576" bIns="36576" anchor="t">
             <a:spAutoFit/>
           </a:bodyPr>
           <a:lstStyle/>
@@ -27279,6 +27695,7 @@
           <a:lstStyle/>
           <a:p>
             <a:pPr algn="ctr"/>
+            <a:endParaRPr/>
           </a:p>
         </p:txBody>
       </p:sp>
@@ -27322,6 +27739,7 @@
           <a:lstStyle/>
           <a:p>
             <a:pPr algn="ctr"/>
+            <a:endParaRPr/>
           </a:p>
         </p:txBody>
       </p:sp>
@@ -27342,7 +27760,7 @@
           <a:noFill/>
         </p:spPr>
         <p:txBody>
-          <a:bodyPr wrap="square" lIns="36576" rIns="36576" tIns="36576" bIns="36576" anchor="t">
+          <a:bodyPr wrap="square" lIns="36576" tIns="36576" rIns="36576" bIns="36576" anchor="t">
             <a:spAutoFit/>
           </a:bodyPr>
           <a:lstStyle/>
@@ -27377,7 +27795,7 @@
           <a:noFill/>
         </p:spPr>
         <p:txBody>
-          <a:bodyPr wrap="square" lIns="36576" rIns="36576" tIns="36576" bIns="36576" anchor="t">
+          <a:bodyPr wrap="square" lIns="36576" tIns="36576" rIns="36576" bIns="36576" anchor="t">
             <a:spAutoFit/>
           </a:bodyPr>
           <a:lstStyle/>
@@ -27437,6 +27855,7 @@
           <a:lstStyle/>
           <a:p>
             <a:pPr algn="ctr"/>
+            <a:endParaRPr/>
           </a:p>
         </p:txBody>
       </p:sp>
@@ -27480,6 +27899,7 @@
           <a:lstStyle/>
           <a:p>
             <a:pPr algn="ctr"/>
+            <a:endParaRPr/>
           </a:p>
         </p:txBody>
       </p:sp>
@@ -27500,7 +27920,7 @@
           <a:noFill/>
         </p:spPr>
         <p:txBody>
-          <a:bodyPr wrap="square" lIns="36576" rIns="36576" tIns="36576" bIns="36576" anchor="t">
+          <a:bodyPr wrap="square" lIns="36576" tIns="36576" rIns="36576" bIns="36576" anchor="t">
             <a:spAutoFit/>
           </a:bodyPr>
           <a:lstStyle/>
@@ -27535,7 +27955,7 @@
           <a:noFill/>
         </p:spPr>
         <p:txBody>
-          <a:bodyPr wrap="square" lIns="36576" rIns="36576" tIns="36576" bIns="36576" anchor="t">
+          <a:bodyPr wrap="square" lIns="36576" tIns="36576" rIns="36576" bIns="36576" anchor="t">
             <a:spAutoFit/>
           </a:bodyPr>
           <a:lstStyle/>
@@ -27570,7 +27990,7 @@
           <a:noFill/>
         </p:spPr>
         <p:txBody>
-          <a:bodyPr wrap="square" lIns="36576" rIns="36576" tIns="36576" bIns="36576" anchor="t">
+          <a:bodyPr wrap="square" lIns="36576" tIns="36576" rIns="36576" bIns="36576" anchor="t">
             <a:spAutoFit/>
           </a:bodyPr>
           <a:lstStyle/>
@@ -27605,7 +28025,7 @@
           <a:noFill/>
         </p:spPr>
         <p:txBody>
-          <a:bodyPr wrap="square" lIns="36576" rIns="36576" tIns="36576" bIns="36576" anchor="t">
+          <a:bodyPr wrap="square" lIns="36576" tIns="36576" rIns="36576" bIns="36576" anchor="t">
             <a:spAutoFit/>
           </a:bodyPr>
           <a:lstStyle/>
@@ -27632,7 +28052,7 @@
 </file>
 
 <file path=ppt/slides/slide5.xml><?xml version="1.0" encoding="utf-8"?>
-<p:sld xmlns:a="http://schemas.openxmlformats.org/drawingml/2006/main" xmlns:p="http://schemas.openxmlformats.org/presentationml/2006/main" xmlns:r="http://schemas.openxmlformats.org/officeDocument/2006/relationships">
+<p:sld xmlns:a="http://schemas.openxmlformats.org/drawingml/2006/main" xmlns:r="http://schemas.openxmlformats.org/officeDocument/2006/relationships" xmlns:p="http://schemas.openxmlformats.org/presentationml/2006/main">
   <p:cSld>
     <p:bg>
       <p:bgPr>
@@ -27648,7 +28068,14 @@
         <p:cNvGrpSpPr/>
         <p:nvPr/>
       </p:nvGrpSpPr>
-      <p:grpSpPr/>
+      <p:grpSpPr>
+        <a:xfrm>
+          <a:off x="0" y="0"/>
+          <a:ext cx="0" cy="0"/>
+          <a:chOff x="0" y="0"/>
+          <a:chExt cx="0" cy="0"/>
+        </a:xfrm>
+      </p:grpSpPr>
       <p:sp>
         <p:nvSpPr>
           <p:cNvPr id="2" name="TextBox 1"/>
@@ -27666,7 +28093,7 @@
           <a:noFill/>
         </p:spPr>
         <p:txBody>
-          <a:bodyPr wrap="square" lIns="36576" rIns="36576" tIns="36576" bIns="36576" anchor="t">
+          <a:bodyPr wrap="square" lIns="36576" tIns="36576" rIns="36576" bIns="36576" anchor="t">
             <a:spAutoFit/>
           </a:bodyPr>
           <a:lstStyle/>
@@ -27701,7 +28128,7 @@
           <a:noFill/>
         </p:spPr>
         <p:txBody>
-          <a:bodyPr wrap="square" lIns="36576" rIns="36576" tIns="36576" bIns="36576" anchor="t">
+          <a:bodyPr wrap="square" lIns="36576" tIns="36576" rIns="36576" bIns="36576" anchor="t">
             <a:spAutoFit/>
           </a:bodyPr>
           <a:lstStyle/>
@@ -27771,7 +28198,7 @@
           <a:noFill/>
         </p:spPr>
         <p:txBody>
-          <a:bodyPr wrap="square" lIns="36576" rIns="36576" tIns="36576" bIns="36576" anchor="t">
+          <a:bodyPr wrap="square" lIns="36576" tIns="36576" rIns="36576" bIns="36576" anchor="t">
             <a:spAutoFit/>
           </a:bodyPr>
           <a:lstStyle/>
@@ -27829,7 +28256,7 @@
         </p:blipFill>
         <p:spPr>
           <a:xfrm>
-            <a:off x="731520" y="2606040"/>
+            <a:off x="731520" y="3281130"/>
             <a:ext cx="6217920" cy="929182"/>
           </a:xfrm>
           <a:prstGeom prst="rect">
@@ -27879,6 +28306,7 @@
           <a:lstStyle/>
           <a:p>
             <a:pPr algn="ctr"/>
+            <a:endParaRPr/>
           </a:p>
         </p:txBody>
       </p:sp>
@@ -27922,6 +28350,7 @@
           <a:lstStyle/>
           <a:p>
             <a:pPr algn="ctr"/>
+            <a:endParaRPr/>
           </a:p>
         </p:txBody>
       </p:sp>
@@ -27942,7 +28371,7 @@
           <a:noFill/>
         </p:spPr>
         <p:txBody>
-          <a:bodyPr wrap="square" lIns="36576" rIns="36576" tIns="36576" bIns="36576" anchor="t">
+          <a:bodyPr wrap="square" lIns="36576" tIns="36576" rIns="36576" bIns="36576" anchor="t">
             <a:spAutoFit/>
           </a:bodyPr>
           <a:lstStyle/>
@@ -27977,7 +28406,7 @@
           <a:noFill/>
         </p:spPr>
         <p:txBody>
-          <a:bodyPr wrap="square" lIns="36576" rIns="36576" tIns="36576" bIns="36576" anchor="t">
+          <a:bodyPr wrap="square" lIns="36576" tIns="36576" rIns="36576" bIns="36576" anchor="t">
             <a:spAutoFit/>
           </a:bodyPr>
           <a:lstStyle/>
@@ -28037,6 +28466,7 @@
           <a:lstStyle/>
           <a:p>
             <a:pPr algn="ctr"/>
+            <a:endParaRPr/>
           </a:p>
         </p:txBody>
       </p:sp>
@@ -28080,6 +28510,7 @@
           <a:lstStyle/>
           <a:p>
             <a:pPr algn="ctr"/>
+            <a:endParaRPr/>
           </a:p>
         </p:txBody>
       </p:sp>
@@ -28100,7 +28531,7 @@
           <a:noFill/>
         </p:spPr>
         <p:txBody>
-          <a:bodyPr wrap="square" lIns="36576" rIns="36576" tIns="36576" bIns="36576" anchor="t">
+          <a:bodyPr wrap="square" lIns="36576" tIns="36576" rIns="36576" bIns="36576" anchor="t">
             <a:spAutoFit/>
           </a:bodyPr>
           <a:lstStyle/>
@@ -28135,7 +28566,7 @@
           <a:noFill/>
         </p:spPr>
         <p:txBody>
-          <a:bodyPr wrap="square" lIns="36576" rIns="36576" tIns="36576" bIns="36576" anchor="t">
+          <a:bodyPr wrap="square" lIns="36576" tIns="36576" rIns="36576" bIns="36576" anchor="t">
             <a:spAutoFit/>
           </a:bodyPr>
           <a:lstStyle/>
@@ -28195,6 +28626,7 @@
           <a:lstStyle/>
           <a:p>
             <a:pPr algn="ctr"/>
+            <a:endParaRPr/>
           </a:p>
         </p:txBody>
       </p:sp>
@@ -28238,6 +28670,7 @@
           <a:lstStyle/>
           <a:p>
             <a:pPr algn="ctr"/>
+            <a:endParaRPr/>
           </a:p>
         </p:txBody>
       </p:sp>
@@ -28258,7 +28691,7 @@
           <a:noFill/>
         </p:spPr>
         <p:txBody>
-          <a:bodyPr wrap="square" lIns="36576" rIns="36576" tIns="36576" bIns="36576" anchor="t">
+          <a:bodyPr wrap="square" lIns="36576" tIns="36576" rIns="36576" bIns="36576" anchor="t">
             <a:spAutoFit/>
           </a:bodyPr>
           <a:lstStyle/>
@@ -28293,7 +28726,7 @@
           <a:noFill/>
         </p:spPr>
         <p:txBody>
-          <a:bodyPr wrap="square" lIns="36576" rIns="36576" tIns="36576" bIns="36576" anchor="t">
+          <a:bodyPr wrap="square" lIns="36576" tIns="36576" rIns="36576" bIns="36576" anchor="t">
             <a:spAutoFit/>
           </a:bodyPr>
           <a:lstStyle/>
@@ -28328,7 +28761,7 @@
           <a:noFill/>
         </p:spPr>
         <p:txBody>
-          <a:bodyPr wrap="square" lIns="36576" rIns="36576" tIns="36576" bIns="36576" anchor="t">
+          <a:bodyPr wrap="square" lIns="36576" tIns="36576" rIns="36576" bIns="36576" anchor="t">
             <a:spAutoFit/>
           </a:bodyPr>
           <a:lstStyle/>
@@ -28363,7 +28796,7 @@
           <a:noFill/>
         </p:spPr>
         <p:txBody>
-          <a:bodyPr wrap="square" lIns="36576" rIns="36576" tIns="36576" bIns="36576" anchor="t">
+          <a:bodyPr wrap="square" lIns="36576" tIns="36576" rIns="36576" bIns="36576" anchor="t">
             <a:spAutoFit/>
           </a:bodyPr>
           <a:lstStyle/>
@@ -28390,7 +28823,7 @@
 </file>
 
 <file path=ppt/slides/slide6.xml><?xml version="1.0" encoding="utf-8"?>
-<p:sld xmlns:a="http://schemas.openxmlformats.org/drawingml/2006/main" xmlns:p="http://schemas.openxmlformats.org/presentationml/2006/main" xmlns:r="http://schemas.openxmlformats.org/officeDocument/2006/relationships">
+<p:sld xmlns:a="http://schemas.openxmlformats.org/drawingml/2006/main" xmlns:r="http://schemas.openxmlformats.org/officeDocument/2006/relationships" xmlns:p="http://schemas.openxmlformats.org/presentationml/2006/main">
   <p:cSld>
     <p:bg>
       <p:bgPr>
@@ -28406,7 +28839,14 @@
         <p:cNvGrpSpPr/>
         <p:nvPr/>
       </p:nvGrpSpPr>
-      <p:grpSpPr/>
+      <p:grpSpPr>
+        <a:xfrm>
+          <a:off x="0" y="0"/>
+          <a:ext cx="0" cy="0"/>
+          <a:chOff x="0" y="0"/>
+          <a:chExt cx="0" cy="0"/>
+        </a:xfrm>
+      </p:grpSpPr>
       <p:sp>
         <p:nvSpPr>
           <p:cNvPr id="2" name="TextBox 1"/>
@@ -28424,7 +28864,7 @@
           <a:noFill/>
         </p:spPr>
         <p:txBody>
-          <a:bodyPr wrap="square" lIns="36576" rIns="36576" tIns="36576" bIns="36576" anchor="t">
+          <a:bodyPr wrap="square" lIns="36576" tIns="36576" rIns="36576" bIns="36576" anchor="t">
             <a:spAutoFit/>
           </a:bodyPr>
           <a:lstStyle/>
@@ -28459,7 +28899,7 @@
           <a:noFill/>
         </p:spPr>
         <p:txBody>
-          <a:bodyPr wrap="square" lIns="36576" rIns="36576" tIns="36576" bIns="36576" anchor="t">
+          <a:bodyPr wrap="square" lIns="36576" tIns="36576" rIns="36576" bIns="36576" anchor="t">
             <a:spAutoFit/>
           </a:bodyPr>
           <a:lstStyle/>
@@ -28529,7 +28969,7 @@
           <a:noFill/>
         </p:spPr>
         <p:txBody>
-          <a:bodyPr wrap="square" lIns="36576" rIns="36576" tIns="36576" bIns="36576" anchor="t">
+          <a:bodyPr wrap="square" lIns="36576" tIns="36576" rIns="36576" bIns="36576" anchor="t">
             <a:spAutoFit/>
           </a:bodyPr>
           <a:lstStyle/>
@@ -28579,7 +29019,7 @@
         </p:nvSpPr>
         <p:spPr>
           <a:xfrm>
-            <a:off x="731520" y="2651760"/>
+            <a:off x="731520" y="3017519"/>
             <a:ext cx="3474720" cy="1280160"/>
           </a:xfrm>
           <a:prstGeom prst="roundRect">
@@ -28613,6 +29053,7 @@
           <a:lstStyle/>
           <a:p>
             <a:pPr algn="ctr"/>
+            <a:endParaRPr/>
           </a:p>
         </p:txBody>
       </p:sp>
@@ -28624,7 +29065,7 @@
         </p:nvSpPr>
         <p:spPr>
           <a:xfrm>
-            <a:off x="731520" y="2651760"/>
+            <a:off x="731520" y="3017519"/>
             <a:ext cx="50292" cy="1280160"/>
           </a:xfrm>
           <a:prstGeom prst="rect">
@@ -28656,6 +29097,7 @@
           <a:lstStyle/>
           <a:p>
             <a:pPr algn="ctr"/>
+            <a:endParaRPr/>
           </a:p>
         </p:txBody>
       </p:sp>
@@ -28667,7 +29109,7 @@
         </p:nvSpPr>
         <p:spPr>
           <a:xfrm>
-            <a:off x="877824" y="2761488"/>
+            <a:off x="877824" y="3127247"/>
             <a:ext cx="3246120" cy="292608"/>
           </a:xfrm>
           <a:prstGeom prst="rect">
@@ -28676,7 +29118,7 @@
           <a:noFill/>
         </p:spPr>
         <p:txBody>
-          <a:bodyPr wrap="square" lIns="36576" rIns="36576" tIns="36576" bIns="36576" anchor="t">
+          <a:bodyPr wrap="square" lIns="36576" tIns="36576" rIns="36576" bIns="36576" anchor="t">
             <a:spAutoFit/>
           </a:bodyPr>
           <a:lstStyle/>
@@ -28702,7 +29144,7 @@
         </p:nvSpPr>
         <p:spPr>
           <a:xfrm>
-            <a:off x="877824" y="3136392"/>
+            <a:off x="877824" y="3502151"/>
             <a:ext cx="3246120" cy="713232"/>
           </a:xfrm>
           <a:prstGeom prst="rect">
@@ -28711,7 +29153,7 @@
           <a:noFill/>
         </p:spPr>
         <p:txBody>
-          <a:bodyPr wrap="square" lIns="36576" rIns="36576" tIns="36576" bIns="36576" anchor="t">
+          <a:bodyPr wrap="square" lIns="36576" tIns="36576" rIns="36576" bIns="36576" anchor="t">
             <a:spAutoFit/>
           </a:bodyPr>
           <a:lstStyle/>
@@ -28737,7 +29179,7 @@
         </p:nvSpPr>
         <p:spPr>
           <a:xfrm>
-            <a:off x="4480560" y="2651760"/>
+            <a:off x="4480560" y="3017519"/>
             <a:ext cx="3474720" cy="1280160"/>
           </a:xfrm>
           <a:prstGeom prst="roundRect">
@@ -28771,6 +29213,7 @@
           <a:lstStyle/>
           <a:p>
             <a:pPr algn="ctr"/>
+            <a:endParaRPr/>
           </a:p>
         </p:txBody>
       </p:sp>
@@ -28782,7 +29225,7 @@
         </p:nvSpPr>
         <p:spPr>
           <a:xfrm>
-            <a:off x="4480560" y="2651760"/>
+            <a:off x="4480560" y="3017519"/>
             <a:ext cx="50292" cy="1280160"/>
           </a:xfrm>
           <a:prstGeom prst="rect">
@@ -28814,6 +29257,7 @@
           <a:lstStyle/>
           <a:p>
             <a:pPr algn="ctr"/>
+            <a:endParaRPr/>
           </a:p>
         </p:txBody>
       </p:sp>
@@ -28825,7 +29269,7 @@
         </p:nvSpPr>
         <p:spPr>
           <a:xfrm>
-            <a:off x="4626864" y="2761488"/>
+            <a:off x="4626864" y="3127247"/>
             <a:ext cx="3246120" cy="292608"/>
           </a:xfrm>
           <a:prstGeom prst="rect">
@@ -28834,7 +29278,7 @@
           <a:noFill/>
         </p:spPr>
         <p:txBody>
-          <a:bodyPr wrap="square" lIns="36576" rIns="36576" tIns="36576" bIns="36576" anchor="t">
+          <a:bodyPr wrap="square" lIns="36576" tIns="36576" rIns="36576" bIns="36576" anchor="t">
             <a:spAutoFit/>
           </a:bodyPr>
           <a:lstStyle/>
@@ -28860,7 +29304,7 @@
         </p:nvSpPr>
         <p:spPr>
           <a:xfrm>
-            <a:off x="4626864" y="3136392"/>
+            <a:off x="4626864" y="3502151"/>
             <a:ext cx="3246120" cy="713232"/>
           </a:xfrm>
           <a:prstGeom prst="rect">
@@ -28869,7 +29313,7 @@
           <a:noFill/>
         </p:spPr>
         <p:txBody>
-          <a:bodyPr wrap="square" lIns="36576" rIns="36576" tIns="36576" bIns="36576" anchor="t">
+          <a:bodyPr wrap="square" lIns="36576" tIns="36576" rIns="36576" bIns="36576" anchor="t">
             <a:spAutoFit/>
           </a:bodyPr>
           <a:lstStyle/>
@@ -28895,7 +29339,7 @@
         </p:nvSpPr>
         <p:spPr>
           <a:xfrm>
-            <a:off x="8229600" y="2651760"/>
+            <a:off x="8229600" y="3017519"/>
             <a:ext cx="3200400" cy="1280160"/>
           </a:xfrm>
           <a:prstGeom prst="roundRect">
@@ -28929,6 +29373,7 @@
           <a:lstStyle/>
           <a:p>
             <a:pPr algn="ctr"/>
+            <a:endParaRPr/>
           </a:p>
         </p:txBody>
       </p:sp>
@@ -28940,7 +29385,7 @@
         </p:nvSpPr>
         <p:spPr>
           <a:xfrm>
-            <a:off x="8229600" y="2651760"/>
+            <a:off x="8229600" y="3017519"/>
             <a:ext cx="50292" cy="1280160"/>
           </a:xfrm>
           <a:prstGeom prst="rect">
@@ -28972,6 +29417,7 @@
           <a:lstStyle/>
           <a:p>
             <a:pPr algn="ctr"/>
+            <a:endParaRPr/>
           </a:p>
         </p:txBody>
       </p:sp>
@@ -28983,7 +29429,7 @@
         </p:nvSpPr>
         <p:spPr>
           <a:xfrm>
-            <a:off x="8375904" y="2761488"/>
+            <a:off x="8375904" y="3127247"/>
             <a:ext cx="2971800" cy="292608"/>
           </a:xfrm>
           <a:prstGeom prst="rect">
@@ -28992,7 +29438,7 @@
           <a:noFill/>
         </p:spPr>
         <p:txBody>
-          <a:bodyPr wrap="square" lIns="36576" rIns="36576" tIns="36576" bIns="36576" anchor="t">
+          <a:bodyPr wrap="square" lIns="36576" tIns="36576" rIns="36576" bIns="36576" anchor="t">
             <a:spAutoFit/>
           </a:bodyPr>
           <a:lstStyle/>
@@ -29018,7 +29464,7 @@
         </p:nvSpPr>
         <p:spPr>
           <a:xfrm>
-            <a:off x="8375904" y="3136392"/>
+            <a:off x="8375904" y="3502151"/>
             <a:ext cx="2971800" cy="713232"/>
           </a:xfrm>
           <a:prstGeom prst="rect">
@@ -29027,7 +29473,7 @@
           <a:noFill/>
         </p:spPr>
         <p:txBody>
-          <a:bodyPr wrap="square" lIns="36576" rIns="36576" tIns="36576" bIns="36576" anchor="t">
+          <a:bodyPr wrap="square" lIns="36576" tIns="36576" rIns="36576" bIns="36576" anchor="t">
             <a:spAutoFit/>
           </a:bodyPr>
           <a:lstStyle/>
@@ -29062,7 +29508,7 @@
           <a:noFill/>
         </p:spPr>
         <p:txBody>
-          <a:bodyPr wrap="square" lIns="36576" rIns="36576" tIns="36576" bIns="36576" anchor="t">
+          <a:bodyPr wrap="square" lIns="36576" tIns="36576" rIns="36576" bIns="36576" anchor="t">
             <a:spAutoFit/>
           </a:bodyPr>
           <a:lstStyle/>
@@ -29097,7 +29543,7 @@
           <a:noFill/>
         </p:spPr>
         <p:txBody>
-          <a:bodyPr wrap="square" lIns="36576" rIns="36576" tIns="36576" bIns="36576" anchor="t">
+          <a:bodyPr wrap="square" lIns="36576" tIns="36576" rIns="36576" bIns="36576" anchor="t">
             <a:spAutoFit/>
           </a:bodyPr>
           <a:lstStyle/>
@@ -29124,7 +29570,7 @@
 </file>
 
 <file path=ppt/slides/slide7.xml><?xml version="1.0" encoding="utf-8"?>
-<p:sld xmlns:a="http://schemas.openxmlformats.org/drawingml/2006/main" xmlns:p="http://schemas.openxmlformats.org/presentationml/2006/main" xmlns:r="http://schemas.openxmlformats.org/officeDocument/2006/relationships">
+<p:sld xmlns:a="http://schemas.openxmlformats.org/drawingml/2006/main" xmlns:r="http://schemas.openxmlformats.org/officeDocument/2006/relationships" xmlns:p="http://schemas.openxmlformats.org/presentationml/2006/main">
   <p:cSld>
     <p:bg>
       <p:bgPr>
@@ -29140,7 +29586,14 @@
         <p:cNvGrpSpPr/>
         <p:nvPr/>
       </p:nvGrpSpPr>
-      <p:grpSpPr/>
+      <p:grpSpPr>
+        <a:xfrm>
+          <a:off x="0" y="0"/>
+          <a:ext cx="0" cy="0"/>
+          <a:chOff x="0" y="0"/>
+          <a:chExt cx="0" cy="0"/>
+        </a:xfrm>
+      </p:grpSpPr>
       <p:sp>
         <p:nvSpPr>
           <p:cNvPr id="2" name="TextBox 1"/>
@@ -29158,7 +29611,7 @@
           <a:noFill/>
         </p:spPr>
         <p:txBody>
-          <a:bodyPr wrap="square" lIns="36576" rIns="36576" tIns="36576" bIns="36576" anchor="t">
+          <a:bodyPr wrap="square" lIns="36576" tIns="36576" rIns="36576" bIns="36576" anchor="t">
             <a:spAutoFit/>
           </a:bodyPr>
           <a:lstStyle/>
@@ -29193,7 +29646,7 @@
           <a:noFill/>
         </p:spPr>
         <p:txBody>
-          <a:bodyPr wrap="square" lIns="36576" rIns="36576" tIns="36576" bIns="36576" anchor="t">
+          <a:bodyPr wrap="square" lIns="36576" tIns="36576" rIns="36576" bIns="36576" anchor="t">
             <a:spAutoFit/>
           </a:bodyPr>
           <a:lstStyle/>
@@ -29263,7 +29716,7 @@
           <a:noFill/>
         </p:spPr>
         <p:txBody>
-          <a:bodyPr wrap="square" lIns="36576" rIns="36576" tIns="36576" bIns="36576" anchor="t">
+          <a:bodyPr wrap="square" lIns="36576" tIns="36576" rIns="36576" bIns="36576" anchor="t">
             <a:spAutoFit/>
           </a:bodyPr>
           <a:lstStyle/>
@@ -29323,6 +29776,7 @@
           <a:lstStyle/>
           <a:p>
             <a:pPr algn="ctr"/>
+            <a:endParaRPr/>
           </a:p>
         </p:txBody>
       </p:sp>
@@ -29343,7 +29797,7 @@
           <a:noFill/>
         </p:spPr>
         <p:txBody>
-          <a:bodyPr wrap="square" lIns="36576" rIns="36576" tIns="36576" bIns="36576" anchor="t">
+          <a:bodyPr wrap="square" lIns="36576" tIns="36576" rIns="36576" bIns="36576" anchor="t">
             <a:spAutoFit/>
           </a:bodyPr>
           <a:lstStyle/>
@@ -29403,6 +29857,7 @@
           <a:lstStyle/>
           <a:p>
             <a:pPr algn="ctr"/>
+            <a:endParaRPr/>
           </a:p>
         </p:txBody>
       </p:sp>
@@ -29423,7 +29878,7 @@
           <a:noFill/>
         </p:spPr>
         <p:txBody>
-          <a:bodyPr wrap="square" lIns="36576" rIns="36576" tIns="36576" bIns="36576" anchor="t">
+          <a:bodyPr wrap="square" lIns="36576" tIns="36576" rIns="36576" bIns="36576" anchor="t">
             <a:spAutoFit/>
           </a:bodyPr>
           <a:lstStyle/>
@@ -29483,6 +29938,7 @@
           <a:lstStyle/>
           <a:p>
             <a:pPr algn="ctr"/>
+            <a:endParaRPr/>
           </a:p>
         </p:txBody>
       </p:sp>
@@ -29503,7 +29959,7 @@
           <a:noFill/>
         </p:spPr>
         <p:txBody>
-          <a:bodyPr wrap="square" lIns="36576" rIns="36576" tIns="36576" bIns="36576" anchor="t">
+          <a:bodyPr wrap="square" lIns="36576" tIns="36576" rIns="36576" bIns="36576" anchor="t">
             <a:spAutoFit/>
           </a:bodyPr>
           <a:lstStyle/>
@@ -29563,6 +30019,7 @@
           <a:lstStyle/>
           <a:p>
             <a:pPr algn="ctr"/>
+            <a:endParaRPr/>
           </a:p>
         </p:txBody>
       </p:sp>
@@ -29583,7 +30040,7 @@
           <a:noFill/>
         </p:spPr>
         <p:txBody>
-          <a:bodyPr wrap="square" lIns="36576" rIns="36576" tIns="36576" bIns="36576" anchor="t">
+          <a:bodyPr wrap="square" lIns="36576" tIns="36576" rIns="36576" bIns="36576" anchor="t">
             <a:spAutoFit/>
           </a:bodyPr>
           <a:lstStyle/>
@@ -29643,6 +30100,7 @@
           <a:lstStyle/>
           <a:p>
             <a:pPr algn="ctr"/>
+            <a:endParaRPr/>
           </a:p>
         </p:txBody>
       </p:sp>
@@ -29663,7 +30121,7 @@
           <a:noFill/>
         </p:spPr>
         <p:txBody>
-          <a:bodyPr wrap="square" lIns="36576" rIns="36576" tIns="36576" bIns="36576" anchor="ctr">
+          <a:bodyPr wrap="square" lIns="36576" tIns="36576" rIns="36576" bIns="36576" anchor="ctr">
             <a:spAutoFit/>
           </a:bodyPr>
           <a:lstStyle/>
@@ -29723,6 +30181,7 @@
           <a:lstStyle/>
           <a:p>
             <a:pPr algn="ctr"/>
+            <a:endParaRPr/>
           </a:p>
         </p:txBody>
       </p:sp>
@@ -29743,7 +30202,7 @@
           <a:noFill/>
         </p:spPr>
         <p:txBody>
-          <a:bodyPr wrap="square" lIns="36576" rIns="36576" tIns="36576" bIns="36576" anchor="ctr">
+          <a:bodyPr wrap="square" lIns="36576" tIns="36576" rIns="36576" bIns="36576" anchor="ctr">
             <a:spAutoFit/>
           </a:bodyPr>
           <a:lstStyle/>
@@ -29803,6 +30262,7 @@
           <a:lstStyle/>
           <a:p>
             <a:pPr algn="ctr"/>
+            <a:endParaRPr/>
           </a:p>
         </p:txBody>
       </p:sp>
@@ -29823,7 +30283,7 @@
           <a:noFill/>
         </p:spPr>
         <p:txBody>
-          <a:bodyPr wrap="square" lIns="36576" rIns="36576" tIns="36576" bIns="36576" anchor="ctr">
+          <a:bodyPr wrap="square" lIns="36576" tIns="36576" rIns="36576" bIns="36576" anchor="ctr">
             <a:spAutoFit/>
           </a:bodyPr>
           <a:lstStyle/>
@@ -29883,6 +30343,7 @@
           <a:lstStyle/>
           <a:p>
             <a:pPr algn="ctr"/>
+            <a:endParaRPr/>
           </a:p>
         </p:txBody>
       </p:sp>
@@ -29903,7 +30364,7 @@
           <a:noFill/>
         </p:spPr>
         <p:txBody>
-          <a:bodyPr wrap="square" lIns="36576" rIns="36576" tIns="36576" bIns="36576" anchor="ctr">
+          <a:bodyPr wrap="square" lIns="36576" tIns="36576" rIns="36576" bIns="36576" anchor="ctr">
             <a:spAutoFit/>
           </a:bodyPr>
           <a:lstStyle/>
@@ -29963,6 +30424,7 @@
           <a:lstStyle/>
           <a:p>
             <a:pPr algn="ctr"/>
+            <a:endParaRPr/>
           </a:p>
         </p:txBody>
       </p:sp>
@@ -29983,7 +30445,7 @@
           <a:noFill/>
         </p:spPr>
         <p:txBody>
-          <a:bodyPr wrap="square" lIns="36576" rIns="36576" tIns="36576" bIns="36576" anchor="ctr">
+          <a:bodyPr wrap="square" lIns="36576" tIns="36576" rIns="36576" bIns="36576" anchor="ctr">
             <a:spAutoFit/>
           </a:bodyPr>
           <a:lstStyle/>
@@ -30043,6 +30505,7 @@
           <a:lstStyle/>
           <a:p>
             <a:pPr algn="ctr"/>
+            <a:endParaRPr/>
           </a:p>
         </p:txBody>
       </p:sp>
@@ -30063,7 +30526,7 @@
           <a:noFill/>
         </p:spPr>
         <p:txBody>
-          <a:bodyPr wrap="square" lIns="36576" rIns="36576" tIns="36576" bIns="36576" anchor="ctr">
+          <a:bodyPr wrap="square" lIns="36576" tIns="36576" rIns="36576" bIns="36576" anchor="ctr">
             <a:spAutoFit/>
           </a:bodyPr>
           <a:lstStyle/>
@@ -30123,6 +30586,7 @@
           <a:lstStyle/>
           <a:p>
             <a:pPr algn="ctr"/>
+            <a:endParaRPr/>
           </a:p>
         </p:txBody>
       </p:sp>
@@ -30143,7 +30607,7 @@
           <a:noFill/>
         </p:spPr>
         <p:txBody>
-          <a:bodyPr wrap="square" lIns="36576" rIns="36576" tIns="36576" bIns="36576" anchor="ctr">
+          <a:bodyPr wrap="square" lIns="36576" tIns="36576" rIns="36576" bIns="36576" anchor="ctr">
             <a:spAutoFit/>
           </a:bodyPr>
           <a:lstStyle/>
@@ -30203,6 +30667,7 @@
           <a:lstStyle/>
           <a:p>
             <a:pPr algn="ctr"/>
+            <a:endParaRPr/>
           </a:p>
         </p:txBody>
       </p:sp>
@@ -30223,7 +30688,7 @@
           <a:noFill/>
         </p:spPr>
         <p:txBody>
-          <a:bodyPr wrap="square" lIns="36576" rIns="36576" tIns="36576" bIns="36576" anchor="ctr">
+          <a:bodyPr wrap="square" lIns="36576" tIns="36576" rIns="36576" bIns="36576" anchor="ctr">
             <a:spAutoFit/>
           </a:bodyPr>
           <a:lstStyle/>
@@ -30283,6 +30748,7 @@
           <a:lstStyle/>
           <a:p>
             <a:pPr algn="ctr"/>
+            <a:endParaRPr/>
           </a:p>
         </p:txBody>
       </p:sp>
@@ -30303,7 +30769,7 @@
           <a:noFill/>
         </p:spPr>
         <p:txBody>
-          <a:bodyPr wrap="square" lIns="36576" rIns="36576" tIns="36576" bIns="36576" anchor="ctr">
+          <a:bodyPr wrap="square" lIns="36576" tIns="36576" rIns="36576" bIns="36576" anchor="ctr">
             <a:spAutoFit/>
           </a:bodyPr>
           <a:lstStyle/>
@@ -30363,6 +30829,7 @@
           <a:lstStyle/>
           <a:p>
             <a:pPr algn="ctr"/>
+            <a:endParaRPr/>
           </a:p>
         </p:txBody>
       </p:sp>
@@ -30383,7 +30850,7 @@
           <a:noFill/>
         </p:spPr>
         <p:txBody>
-          <a:bodyPr wrap="square" lIns="36576" rIns="36576" tIns="36576" bIns="36576" anchor="ctr">
+          <a:bodyPr wrap="square" lIns="36576" tIns="36576" rIns="36576" bIns="36576" anchor="ctr">
             <a:spAutoFit/>
           </a:bodyPr>
           <a:lstStyle/>
@@ -30443,6 +30910,7 @@
           <a:lstStyle/>
           <a:p>
             <a:pPr algn="ctr"/>
+            <a:endParaRPr/>
           </a:p>
         </p:txBody>
       </p:sp>
@@ -30463,7 +30931,7 @@
           <a:noFill/>
         </p:spPr>
         <p:txBody>
-          <a:bodyPr wrap="square" lIns="36576" rIns="36576" tIns="36576" bIns="36576" anchor="ctr">
+          <a:bodyPr wrap="square" lIns="36576" tIns="36576" rIns="36576" bIns="36576" anchor="ctr">
             <a:spAutoFit/>
           </a:bodyPr>
           <a:lstStyle/>
@@ -30523,6 +30991,7 @@
           <a:lstStyle/>
           <a:p>
             <a:pPr algn="ctr"/>
+            <a:endParaRPr/>
           </a:p>
         </p:txBody>
       </p:sp>
@@ -30543,7 +31012,7 @@
           <a:noFill/>
         </p:spPr>
         <p:txBody>
-          <a:bodyPr wrap="square" lIns="36576" rIns="36576" tIns="36576" bIns="36576" anchor="ctr">
+          <a:bodyPr wrap="square" lIns="36576" tIns="36576" rIns="36576" bIns="36576" anchor="ctr">
             <a:spAutoFit/>
           </a:bodyPr>
           <a:lstStyle/>
@@ -30603,6 +31072,7 @@
           <a:lstStyle/>
           <a:p>
             <a:pPr algn="ctr"/>
+            <a:endParaRPr/>
           </a:p>
         </p:txBody>
       </p:sp>
@@ -30623,7 +31093,7 @@
           <a:noFill/>
         </p:spPr>
         <p:txBody>
-          <a:bodyPr wrap="square" lIns="36576" rIns="36576" tIns="36576" bIns="36576" anchor="ctr">
+          <a:bodyPr wrap="square" lIns="36576" tIns="36576" rIns="36576" bIns="36576" anchor="ctr">
             <a:spAutoFit/>
           </a:bodyPr>
           <a:lstStyle/>
@@ -30683,6 +31153,7 @@
           <a:lstStyle/>
           <a:p>
             <a:pPr algn="ctr"/>
+            <a:endParaRPr/>
           </a:p>
         </p:txBody>
       </p:sp>
@@ -30703,7 +31174,7 @@
           <a:noFill/>
         </p:spPr>
         <p:txBody>
-          <a:bodyPr wrap="square" lIns="36576" rIns="36576" tIns="36576" bIns="36576" anchor="ctr">
+          <a:bodyPr wrap="square" lIns="36576" tIns="36576" rIns="36576" bIns="36576" anchor="ctr">
             <a:spAutoFit/>
           </a:bodyPr>
           <a:lstStyle/>
@@ -30763,6 +31234,7 @@
           <a:lstStyle/>
           <a:p>
             <a:pPr algn="ctr"/>
+            <a:endParaRPr/>
           </a:p>
         </p:txBody>
       </p:sp>
@@ -30783,7 +31255,7 @@
           <a:noFill/>
         </p:spPr>
         <p:txBody>
-          <a:bodyPr wrap="square" lIns="36576" rIns="36576" tIns="36576" bIns="36576" anchor="ctr">
+          <a:bodyPr wrap="square" lIns="36576" tIns="36576" rIns="36576" bIns="36576" anchor="ctr">
             <a:spAutoFit/>
           </a:bodyPr>
           <a:lstStyle/>
@@ -30843,6 +31315,7 @@
           <a:lstStyle/>
           <a:p>
             <a:pPr algn="ctr"/>
+            <a:endParaRPr/>
           </a:p>
         </p:txBody>
       </p:sp>
@@ -30863,7 +31336,7 @@
           <a:noFill/>
         </p:spPr>
         <p:txBody>
-          <a:bodyPr wrap="square" lIns="36576" rIns="36576" tIns="36576" bIns="36576" anchor="ctr">
+          <a:bodyPr wrap="square" lIns="36576" tIns="36576" rIns="36576" bIns="36576" anchor="ctr">
             <a:spAutoFit/>
           </a:bodyPr>
           <a:lstStyle/>
@@ -30889,7 +31362,7 @@
         </p:nvSpPr>
         <p:spPr>
           <a:xfrm>
-            <a:off x="1280160" y="5349240"/>
+            <a:off x="1279788" y="5422393"/>
             <a:ext cx="9509760" cy="685800"/>
           </a:xfrm>
           <a:prstGeom prst="roundRect">
@@ -30923,6 +31396,7 @@
           <a:lstStyle/>
           <a:p>
             <a:pPr algn="ctr"/>
+            <a:endParaRPr/>
           </a:p>
         </p:txBody>
       </p:sp>
@@ -30934,7 +31408,7 @@
         </p:nvSpPr>
         <p:spPr>
           <a:xfrm>
-            <a:off x="1280160" y="5349240"/>
+            <a:off x="1255014" y="5422393"/>
             <a:ext cx="50292" cy="685800"/>
           </a:xfrm>
           <a:prstGeom prst="rect">
@@ -30966,6 +31440,7 @@
           <a:lstStyle/>
           <a:p>
             <a:pPr algn="ctr"/>
+            <a:endParaRPr/>
           </a:p>
         </p:txBody>
       </p:sp>
@@ -30986,7 +31461,7 @@
           <a:noFill/>
         </p:spPr>
         <p:txBody>
-          <a:bodyPr wrap="square" lIns="36576" rIns="36576" tIns="36576" bIns="36576" anchor="t">
+          <a:bodyPr wrap="square" lIns="36576" tIns="36576" rIns="36576" bIns="36576" anchor="t">
             <a:spAutoFit/>
           </a:bodyPr>
           <a:lstStyle/>
@@ -31021,14 +31496,14 @@
           <a:noFill/>
         </p:spPr>
         <p:txBody>
-          <a:bodyPr wrap="square" lIns="36576" rIns="36576" tIns="36576" bIns="36576" anchor="t">
+          <a:bodyPr wrap="square" lIns="36576" tIns="36576" rIns="36576" bIns="36576" anchor="t">
             <a:spAutoFit/>
           </a:bodyPr>
           <a:lstStyle/>
           <a:p>
             <a:pPr algn="l"/>
             <a:r>
-              <a:rPr sz="1150" b="0" i="0">
+              <a:rPr sz="1150" b="0" i="0" dirty="0">
                 <a:solidFill>
                   <a:srgbClr val="2A323D"/>
                 </a:solidFill>
@@ -31056,7 +31531,7 @@
           <a:noFill/>
         </p:spPr>
         <p:txBody>
-          <a:bodyPr wrap="square" lIns="36576" rIns="36576" tIns="36576" bIns="36576" anchor="t">
+          <a:bodyPr wrap="square" lIns="36576" tIns="36576" rIns="36576" bIns="36576" anchor="t">
             <a:spAutoFit/>
           </a:bodyPr>
           <a:lstStyle/>
@@ -31091,7 +31566,7 @@
           <a:noFill/>
         </p:spPr>
         <p:txBody>
-          <a:bodyPr wrap="square" lIns="36576" rIns="36576" tIns="36576" bIns="36576" anchor="t">
+          <a:bodyPr wrap="square" lIns="36576" tIns="36576" rIns="36576" bIns="36576" anchor="t">
             <a:spAutoFit/>
           </a:bodyPr>
           <a:lstStyle/>
@@ -31118,7 +31593,7 @@
 </file>
 
 <file path=ppt/slides/slide8.xml><?xml version="1.0" encoding="utf-8"?>
-<p:sld xmlns:a="http://schemas.openxmlformats.org/drawingml/2006/main" xmlns:p="http://schemas.openxmlformats.org/presentationml/2006/main" xmlns:r="http://schemas.openxmlformats.org/officeDocument/2006/relationships">
+<p:sld xmlns:a="http://schemas.openxmlformats.org/drawingml/2006/main" xmlns:r="http://schemas.openxmlformats.org/officeDocument/2006/relationships" xmlns:p="http://schemas.openxmlformats.org/presentationml/2006/main">
   <p:cSld>
     <p:bg>
       <p:bgPr>
@@ -31134,7 +31609,14 @@
         <p:cNvGrpSpPr/>
         <p:nvPr/>
       </p:nvGrpSpPr>
-      <p:grpSpPr/>
+      <p:grpSpPr>
+        <a:xfrm>
+          <a:off x="0" y="0"/>
+          <a:ext cx="0" cy="0"/>
+          <a:chOff x="0" y="0"/>
+          <a:chExt cx="0" cy="0"/>
+        </a:xfrm>
+      </p:grpSpPr>
       <p:sp>
         <p:nvSpPr>
           <p:cNvPr id="2" name="TextBox 1"/>
@@ -31152,7 +31634,7 @@
           <a:noFill/>
         </p:spPr>
         <p:txBody>
-          <a:bodyPr wrap="square" lIns="36576" rIns="36576" tIns="36576" bIns="36576" anchor="t">
+          <a:bodyPr wrap="square" lIns="36576" tIns="36576" rIns="36576" bIns="36576" anchor="t">
             <a:spAutoFit/>
           </a:bodyPr>
           <a:lstStyle/>
@@ -31187,7 +31669,7 @@
           <a:noFill/>
         </p:spPr>
         <p:txBody>
-          <a:bodyPr wrap="square" lIns="36576" rIns="36576" tIns="36576" bIns="36576" anchor="t">
+          <a:bodyPr wrap="square" lIns="36576" tIns="36576" rIns="36576" bIns="36576" anchor="t">
             <a:spAutoFit/>
           </a:bodyPr>
           <a:lstStyle/>
@@ -31257,7 +31739,7 @@
           <a:noFill/>
         </p:spPr>
         <p:txBody>
-          <a:bodyPr wrap="square" lIns="36576" rIns="36576" tIns="36576" bIns="36576" anchor="t">
+          <a:bodyPr wrap="square" lIns="36576" tIns="36576" rIns="36576" bIns="36576" anchor="t">
             <a:spAutoFit/>
           </a:bodyPr>
           <a:lstStyle/>
@@ -31317,6 +31799,7 @@
           <a:lstStyle/>
           <a:p>
             <a:pPr algn="ctr"/>
+            <a:endParaRPr/>
           </a:p>
         </p:txBody>
       </p:sp>
@@ -31360,6 +31843,7 @@
           <a:lstStyle/>
           <a:p>
             <a:pPr algn="ctr"/>
+            <a:endParaRPr/>
           </a:p>
         </p:txBody>
       </p:sp>
@@ -31380,7 +31864,7 @@
           <a:noFill/>
         </p:spPr>
         <p:txBody>
-          <a:bodyPr wrap="square" lIns="36576" rIns="36576" tIns="36576" bIns="36576" anchor="t">
+          <a:bodyPr wrap="square" lIns="36576" tIns="36576" rIns="36576" bIns="36576" anchor="t">
             <a:spAutoFit/>
           </a:bodyPr>
           <a:lstStyle/>
@@ -31415,7 +31899,7 @@
           <a:noFill/>
         </p:spPr>
         <p:txBody>
-          <a:bodyPr wrap="square" lIns="36576" rIns="36576" tIns="36576" bIns="36576" anchor="t">
+          <a:bodyPr wrap="square" lIns="36576" tIns="36576" rIns="36576" bIns="36576" anchor="t">
             <a:spAutoFit/>
           </a:bodyPr>
           <a:lstStyle/>
@@ -31475,6 +31959,7 @@
           <a:lstStyle/>
           <a:p>
             <a:pPr algn="ctr"/>
+            <a:endParaRPr/>
           </a:p>
         </p:txBody>
       </p:sp>
@@ -31518,6 +32003,7 @@
           <a:lstStyle/>
           <a:p>
             <a:pPr algn="ctr"/>
+            <a:endParaRPr/>
           </a:p>
         </p:txBody>
       </p:sp>
@@ -31538,7 +32024,7 @@
           <a:noFill/>
         </p:spPr>
         <p:txBody>
-          <a:bodyPr wrap="square" lIns="36576" rIns="36576" tIns="36576" bIns="36576" anchor="t">
+          <a:bodyPr wrap="square" lIns="36576" tIns="36576" rIns="36576" bIns="36576" anchor="t">
             <a:spAutoFit/>
           </a:bodyPr>
           <a:lstStyle/>
@@ -31573,7 +32059,7 @@
           <a:noFill/>
         </p:spPr>
         <p:txBody>
-          <a:bodyPr wrap="square" lIns="36576" rIns="36576" tIns="36576" bIns="36576" anchor="t">
+          <a:bodyPr wrap="square" lIns="36576" tIns="36576" rIns="36576" bIns="36576" anchor="t">
             <a:spAutoFit/>
           </a:bodyPr>
           <a:lstStyle/>
@@ -31633,6 +32119,7 @@
           <a:lstStyle/>
           <a:p>
             <a:pPr algn="ctr"/>
+            <a:endParaRPr/>
           </a:p>
         </p:txBody>
       </p:sp>
@@ -31676,6 +32163,7 @@
           <a:lstStyle/>
           <a:p>
             <a:pPr algn="ctr"/>
+            <a:endParaRPr/>
           </a:p>
         </p:txBody>
       </p:sp>
@@ -31696,7 +32184,7 @@
           <a:noFill/>
         </p:spPr>
         <p:txBody>
-          <a:bodyPr wrap="square" lIns="36576" rIns="36576" tIns="36576" bIns="36576" anchor="t">
+          <a:bodyPr wrap="square" lIns="36576" tIns="36576" rIns="36576" bIns="36576" anchor="t">
             <a:spAutoFit/>
           </a:bodyPr>
           <a:lstStyle/>
@@ -31731,7 +32219,7 @@
           <a:noFill/>
         </p:spPr>
         <p:txBody>
-          <a:bodyPr wrap="square" lIns="36576" rIns="36576" tIns="36576" bIns="36576" anchor="t">
+          <a:bodyPr wrap="square" lIns="36576" tIns="36576" rIns="36576" bIns="36576" anchor="t">
             <a:spAutoFit/>
           </a:bodyPr>
           <a:lstStyle/>
@@ -31791,6 +32279,7 @@
           <a:lstStyle/>
           <a:p>
             <a:pPr algn="ctr"/>
+            <a:endParaRPr/>
           </a:p>
         </p:txBody>
       </p:sp>
@@ -31834,6 +32323,7 @@
           <a:lstStyle/>
           <a:p>
             <a:pPr algn="ctr"/>
+            <a:endParaRPr/>
           </a:p>
         </p:txBody>
       </p:sp>
@@ -31854,7 +32344,7 @@
           <a:noFill/>
         </p:spPr>
         <p:txBody>
-          <a:bodyPr wrap="square" lIns="36576" rIns="36576" tIns="36576" bIns="36576" anchor="t">
+          <a:bodyPr wrap="square" lIns="36576" tIns="36576" rIns="36576" bIns="36576" anchor="t">
             <a:spAutoFit/>
           </a:bodyPr>
           <a:lstStyle/>
@@ -31889,7 +32379,7 @@
           <a:noFill/>
         </p:spPr>
         <p:txBody>
-          <a:bodyPr wrap="square" lIns="36576" rIns="36576" tIns="36576" bIns="36576" anchor="t">
+          <a:bodyPr wrap="square" lIns="36576" tIns="36576" rIns="36576" bIns="36576" anchor="t">
             <a:spAutoFit/>
           </a:bodyPr>
           <a:lstStyle/>
@@ -31949,6 +32439,7 @@
           <a:lstStyle/>
           <a:p>
             <a:pPr algn="ctr"/>
+            <a:endParaRPr/>
           </a:p>
         </p:txBody>
       </p:sp>
@@ -31992,6 +32483,7 @@
           <a:lstStyle/>
           <a:p>
             <a:pPr algn="ctr"/>
+            <a:endParaRPr/>
           </a:p>
         </p:txBody>
       </p:sp>
@@ -32012,7 +32504,7 @@
           <a:noFill/>
         </p:spPr>
         <p:txBody>
-          <a:bodyPr wrap="square" lIns="36576" rIns="36576" tIns="36576" bIns="36576" anchor="t">
+          <a:bodyPr wrap="square" lIns="36576" tIns="36576" rIns="36576" bIns="36576" anchor="t">
             <a:spAutoFit/>
           </a:bodyPr>
           <a:lstStyle/>
@@ -32047,7 +32539,7 @@
           <a:noFill/>
         </p:spPr>
         <p:txBody>
-          <a:bodyPr wrap="square" lIns="36576" rIns="36576" tIns="36576" bIns="36576" anchor="t">
+          <a:bodyPr wrap="square" lIns="36576" tIns="36576" rIns="36576" bIns="36576" anchor="t">
             <a:spAutoFit/>
           </a:bodyPr>
           <a:lstStyle/>
@@ -32107,6 +32599,7 @@
           <a:lstStyle/>
           <a:p>
             <a:pPr algn="ctr"/>
+            <a:endParaRPr/>
           </a:p>
         </p:txBody>
       </p:sp>
@@ -32150,6 +32643,7 @@
           <a:lstStyle/>
           <a:p>
             <a:pPr algn="ctr"/>
+            <a:endParaRPr/>
           </a:p>
         </p:txBody>
       </p:sp>
@@ -32170,7 +32664,7 @@
           <a:noFill/>
         </p:spPr>
         <p:txBody>
-          <a:bodyPr wrap="square" lIns="36576" rIns="36576" tIns="36576" bIns="36576" anchor="t">
+          <a:bodyPr wrap="square" lIns="36576" tIns="36576" rIns="36576" bIns="36576" anchor="t">
             <a:spAutoFit/>
           </a:bodyPr>
           <a:lstStyle/>
@@ -32205,7 +32699,7 @@
           <a:noFill/>
         </p:spPr>
         <p:txBody>
-          <a:bodyPr wrap="square" lIns="36576" rIns="36576" tIns="36576" bIns="36576" anchor="t">
+          <a:bodyPr wrap="square" lIns="36576" tIns="36576" rIns="36576" bIns="36576" anchor="t">
             <a:spAutoFit/>
           </a:bodyPr>
           <a:lstStyle/>
@@ -32240,7 +32734,7 @@
           <a:noFill/>
         </p:spPr>
         <p:txBody>
-          <a:bodyPr wrap="square" lIns="36576" rIns="36576" tIns="36576" bIns="36576" anchor="t">
+          <a:bodyPr wrap="square" lIns="36576" tIns="36576" rIns="36576" bIns="36576" anchor="t">
             <a:spAutoFit/>
           </a:bodyPr>
           <a:lstStyle/>
@@ -32275,7 +32769,7 @@
           <a:noFill/>
         </p:spPr>
         <p:txBody>
-          <a:bodyPr wrap="square" lIns="36576" rIns="36576" tIns="36576" bIns="36576" anchor="t">
+          <a:bodyPr wrap="square" lIns="36576" tIns="36576" rIns="36576" bIns="36576" anchor="t">
             <a:spAutoFit/>
           </a:bodyPr>
           <a:lstStyle/>
@@ -32302,7 +32796,7 @@
 </file>
 
 <file path=ppt/slides/slide9.xml><?xml version="1.0" encoding="utf-8"?>
-<p:sld xmlns:a="http://schemas.openxmlformats.org/drawingml/2006/main" xmlns:p="http://schemas.openxmlformats.org/presentationml/2006/main" xmlns:r="http://schemas.openxmlformats.org/officeDocument/2006/relationships">
+<p:sld xmlns:a="http://schemas.openxmlformats.org/drawingml/2006/main" xmlns:r="http://schemas.openxmlformats.org/officeDocument/2006/relationships" xmlns:p="http://schemas.openxmlformats.org/presentationml/2006/main">
   <p:cSld>
     <p:bg>
       <p:bgPr>
@@ -32318,7 +32812,14 @@
         <p:cNvGrpSpPr/>
         <p:nvPr/>
       </p:nvGrpSpPr>
-      <p:grpSpPr/>
+      <p:grpSpPr>
+        <a:xfrm>
+          <a:off x="0" y="0"/>
+          <a:ext cx="0" cy="0"/>
+          <a:chOff x="0" y="0"/>
+          <a:chExt cx="0" cy="0"/>
+        </a:xfrm>
+      </p:grpSpPr>
       <p:sp>
         <p:nvSpPr>
           <p:cNvPr id="2" name="TextBox 1"/>
@@ -32336,7 +32837,7 @@
           <a:noFill/>
         </p:spPr>
         <p:txBody>
-          <a:bodyPr wrap="square" lIns="36576" rIns="36576" tIns="36576" bIns="36576" anchor="t">
+          <a:bodyPr wrap="square" lIns="36576" tIns="36576" rIns="36576" bIns="36576" anchor="t">
             <a:spAutoFit/>
           </a:bodyPr>
           <a:lstStyle/>
@@ -32371,7 +32872,7 @@
           <a:noFill/>
         </p:spPr>
         <p:txBody>
-          <a:bodyPr wrap="square" lIns="36576" rIns="36576" tIns="36576" bIns="36576" anchor="t">
+          <a:bodyPr wrap="square" lIns="36576" tIns="36576" rIns="36576" bIns="36576" anchor="t">
             <a:spAutoFit/>
           </a:bodyPr>
           <a:lstStyle/>
@@ -32441,7 +32942,7 @@
           <a:noFill/>
         </p:spPr>
         <p:txBody>
-          <a:bodyPr wrap="square" lIns="36576" rIns="36576" tIns="36576" bIns="36576" anchor="t">
+          <a:bodyPr wrap="square" lIns="36576" tIns="36576" rIns="36576" bIns="36576" anchor="t">
             <a:spAutoFit/>
           </a:bodyPr>
           <a:lstStyle/>
@@ -32501,6 +33002,7 @@
           <a:lstStyle/>
           <a:p>
             <a:pPr algn="ctr"/>
+            <a:endParaRPr/>
           </a:p>
         </p:txBody>
       </p:sp>
@@ -32544,6 +33046,7 @@
           <a:lstStyle/>
           <a:p>
             <a:pPr algn="ctr"/>
+            <a:endParaRPr/>
           </a:p>
         </p:txBody>
       </p:sp>
@@ -32564,7 +33067,7 @@
           <a:noFill/>
         </p:spPr>
         <p:txBody>
-          <a:bodyPr wrap="square" lIns="36576" rIns="36576" tIns="36576" bIns="36576" anchor="t">
+          <a:bodyPr wrap="square" lIns="36576" tIns="36576" rIns="36576" bIns="36576" anchor="t">
             <a:spAutoFit/>
           </a:bodyPr>
           <a:lstStyle/>
@@ -32599,7 +33102,7 @@
           <a:noFill/>
         </p:spPr>
         <p:txBody>
-          <a:bodyPr wrap="square" lIns="36576" rIns="36576" tIns="36576" bIns="36576" anchor="t">
+          <a:bodyPr wrap="square" lIns="36576" tIns="36576" rIns="36576" bIns="36576" anchor="t">
             <a:spAutoFit/>
           </a:bodyPr>
           <a:lstStyle/>
@@ -32659,6 +33162,7 @@
           <a:lstStyle/>
           <a:p>
             <a:pPr algn="ctr"/>
+            <a:endParaRPr/>
           </a:p>
         </p:txBody>
       </p:sp>
@@ -32702,6 +33206,7 @@
           <a:lstStyle/>
           <a:p>
             <a:pPr algn="ctr"/>
+            <a:endParaRPr/>
           </a:p>
         </p:txBody>
       </p:sp>
@@ -32722,7 +33227,7 @@
           <a:noFill/>
         </p:spPr>
         <p:txBody>
-          <a:bodyPr wrap="square" lIns="36576" rIns="36576" tIns="36576" bIns="36576" anchor="t">
+          <a:bodyPr wrap="square" lIns="36576" tIns="36576" rIns="36576" bIns="36576" anchor="t">
             <a:spAutoFit/>
           </a:bodyPr>
           <a:lstStyle/>
@@ -32757,7 +33262,7 @@
           <a:noFill/>
         </p:spPr>
         <p:txBody>
-          <a:bodyPr wrap="square" lIns="36576" rIns="36576" tIns="36576" bIns="36576" anchor="t">
+          <a:bodyPr wrap="square" lIns="36576" tIns="36576" rIns="36576" bIns="36576" anchor="t">
             <a:spAutoFit/>
           </a:bodyPr>
           <a:lstStyle/>
@@ -32817,6 +33322,7 @@
           <a:lstStyle/>
           <a:p>
             <a:pPr algn="ctr"/>
+            <a:endParaRPr/>
           </a:p>
         </p:txBody>
       </p:sp>
@@ -32860,6 +33366,7 @@
           <a:lstStyle/>
           <a:p>
             <a:pPr algn="ctr"/>
+            <a:endParaRPr/>
           </a:p>
         </p:txBody>
       </p:sp>
@@ -32880,7 +33387,7 @@
           <a:noFill/>
         </p:spPr>
         <p:txBody>
-          <a:bodyPr wrap="square" lIns="36576" rIns="36576" tIns="36576" bIns="36576" anchor="t">
+          <a:bodyPr wrap="square" lIns="36576" tIns="36576" rIns="36576" bIns="36576" anchor="t">
             <a:spAutoFit/>
           </a:bodyPr>
           <a:lstStyle/>
@@ -32915,7 +33422,7 @@
           <a:noFill/>
         </p:spPr>
         <p:txBody>
-          <a:bodyPr wrap="square" lIns="36576" rIns="36576" tIns="36576" bIns="36576" anchor="t">
+          <a:bodyPr wrap="square" lIns="36576" tIns="36576" rIns="36576" bIns="36576" anchor="t">
             <a:spAutoFit/>
           </a:bodyPr>
           <a:lstStyle/>
@@ -32950,7 +33457,7 @@
           <a:noFill/>
         </p:spPr>
         <p:txBody>
-          <a:bodyPr wrap="square" lIns="36576" rIns="36576" tIns="36576" bIns="36576" anchor="t">
+          <a:bodyPr wrap="square" lIns="36576" tIns="36576" rIns="36576" bIns="36576" anchor="t">
             <a:spAutoFit/>
           </a:bodyPr>
           <a:lstStyle/>
@@ -32985,7 +33492,7 @@
           <a:noFill/>
         </p:spPr>
         <p:txBody>
-          <a:bodyPr wrap="square" lIns="36576" rIns="36576" tIns="36576" bIns="36576" anchor="t">
+          <a:bodyPr wrap="square" lIns="36576" tIns="36576" rIns="36576" bIns="36576" anchor="t">
             <a:spAutoFit/>
           </a:bodyPr>
           <a:lstStyle/>
@@ -33020,7 +33527,7 @@
           <a:noFill/>
         </p:spPr>
         <p:txBody>
-          <a:bodyPr wrap="square" lIns="36576" rIns="36576" tIns="36576" bIns="36576" anchor="t">
+          <a:bodyPr wrap="square" lIns="36576" tIns="36576" rIns="36576" bIns="36576" anchor="t">
             <a:spAutoFit/>
           </a:bodyPr>
           <a:lstStyle/>
